--- a/bigtree/samples/bigtree_lab_tables.pptx
+++ b/bigtree/samples/bigtree_lab_tables.pptx
@@ -3663,7 +3663,7 @@
             <a:noFill/>
           </p:spPr>
           <p:txBody>
-            <a:bodyPr wrap="none" lIns="0" tIns="0" rIns="0" bIns="0" anchor="ctr">
+            <a:bodyPr wrap="square" lIns="0" tIns="0" rIns="0" bIns="0" anchor="ctr">
               <a:noAutofit/>
             </a:bodyPr>
             <a:lstStyle>
@@ -3709,7 +3709,7 @@
             <a:noFill/>
           </p:spPr>
           <p:txBody>
-            <a:bodyPr wrap="none" lIns="0" tIns="0" rIns="0" bIns="0" anchor="ctr">
+            <a:bodyPr wrap="square" lIns="0" tIns="0" rIns="0" bIns="0" anchor="ctr">
               <a:noAutofit/>
             </a:bodyPr>
             <a:lstStyle>
@@ -3755,7 +3755,7 @@
             <a:noFill/>
           </p:spPr>
           <p:txBody>
-            <a:bodyPr wrap="none" lIns="0" tIns="0" rIns="0" bIns="0" anchor="ctr">
+            <a:bodyPr wrap="square" lIns="0" tIns="0" rIns="0" bIns="0" anchor="ctr">
               <a:noAutofit/>
             </a:bodyPr>
             <a:lstStyle>
@@ -3801,7 +3801,7 @@
             <a:noFill/>
           </p:spPr>
           <p:txBody>
-            <a:bodyPr wrap="none" lIns="0" tIns="0" rIns="0" bIns="0" anchor="ctr">
+            <a:bodyPr wrap="square" lIns="0" tIns="0" rIns="0" bIns="0" anchor="ctr">
               <a:noAutofit/>
             </a:bodyPr>
             <a:lstStyle>
@@ -3869,7 +3869,7 @@
             <a:noFill/>
           </p:spPr>
           <p:txBody>
-            <a:bodyPr wrap="none" lIns="0" tIns="0" rIns="0" bIns="0" anchor="ctr">
+            <a:bodyPr wrap="square" lIns="0" tIns="0" rIns="0" bIns="0" anchor="ctr">
               <a:noAutofit/>
             </a:bodyPr>
             <a:lstStyle>
@@ -3915,7 +3915,7 @@
             <a:noFill/>
           </p:spPr>
           <p:txBody>
-            <a:bodyPr wrap="none" lIns="0" tIns="0" rIns="0" bIns="0" anchor="ctr">
+            <a:bodyPr wrap="square" lIns="0" tIns="0" rIns="0" bIns="0" anchor="ctr">
               <a:noAutofit/>
             </a:bodyPr>
             <a:lstStyle>
@@ -3961,7 +3961,7 @@
             <a:noFill/>
           </p:spPr>
           <p:txBody>
-            <a:bodyPr wrap="none" lIns="0" tIns="0" rIns="0" bIns="0" anchor="ctr">
+            <a:bodyPr wrap="square" lIns="0" tIns="0" rIns="0" bIns="0" anchor="ctr">
               <a:noAutofit/>
             </a:bodyPr>
             <a:lstStyle>
@@ -4007,7 +4007,7 @@
             <a:noFill/>
           </p:spPr>
           <p:txBody>
-            <a:bodyPr wrap="none" lIns="0" tIns="0" rIns="0" bIns="0" anchor="ctr">
+            <a:bodyPr wrap="square" lIns="0" tIns="0" rIns="0" bIns="0" anchor="ctr">
               <a:noAutofit/>
             </a:bodyPr>
             <a:lstStyle>
@@ -4075,7 +4075,7 @@
             <a:noFill/>
           </p:spPr>
           <p:txBody>
-            <a:bodyPr wrap="none" lIns="0" tIns="0" rIns="0" bIns="0" anchor="ctr">
+            <a:bodyPr wrap="square" lIns="0" tIns="0" rIns="0" bIns="0" anchor="ctr">
               <a:noAutofit/>
             </a:bodyPr>
             <a:lstStyle>
@@ -4121,7 +4121,7 @@
             <a:noFill/>
           </p:spPr>
           <p:txBody>
-            <a:bodyPr wrap="none" lIns="0" tIns="0" rIns="0" bIns="0" anchor="ctr">
+            <a:bodyPr wrap="square" lIns="0" tIns="0" rIns="0" bIns="0" anchor="ctr">
               <a:noAutofit/>
             </a:bodyPr>
             <a:lstStyle>
@@ -4167,7 +4167,7 @@
             <a:noFill/>
           </p:spPr>
           <p:txBody>
-            <a:bodyPr wrap="none" lIns="0" tIns="0" rIns="0" bIns="0" anchor="ctr">
+            <a:bodyPr wrap="square" lIns="0" tIns="0" rIns="0" bIns="0" anchor="ctr">
               <a:noAutofit/>
             </a:bodyPr>
             <a:lstStyle>
@@ -4367,7 +4367,7 @@
             <a:noFill/>
           </p:spPr>
           <p:txBody>
-            <a:bodyPr wrap="none" lIns="0" tIns="0" rIns="0" bIns="0" anchor="ctr">
+            <a:bodyPr wrap="square" lIns="0" tIns="0" rIns="0" bIns="0" anchor="ctr">
               <a:noAutofit/>
             </a:bodyPr>
             <a:lstStyle>
@@ -4413,7 +4413,7 @@
             <a:noFill/>
           </p:spPr>
           <p:txBody>
-            <a:bodyPr wrap="none" lIns="0" tIns="0" rIns="0" bIns="0" anchor="ctr">
+            <a:bodyPr wrap="square" lIns="0" tIns="0" rIns="0" bIns="0" anchor="ctr">
               <a:noAutofit/>
             </a:bodyPr>
             <a:lstStyle>
@@ -4525,7 +4525,7 @@
             <a:noFill/>
           </p:spPr>
           <p:txBody>
-            <a:bodyPr wrap="none" lIns="0" tIns="0" rIns="0" bIns="0" anchor="ctr">
+            <a:bodyPr wrap="square" lIns="0" tIns="0" rIns="0" bIns="0" anchor="ctr">
               <a:noAutofit/>
             </a:bodyPr>
             <a:lstStyle>
@@ -4619,7 +4619,7 @@
             <a:noFill/>
           </p:spPr>
           <p:txBody>
-            <a:bodyPr wrap="none" lIns="0" tIns="0" rIns="0" bIns="0" anchor="ctr">
+            <a:bodyPr wrap="square" lIns="0" tIns="0" rIns="0" bIns="0" anchor="ctr">
               <a:noAutofit/>
             </a:bodyPr>
             <a:lstStyle>
@@ -4665,7 +4665,7 @@
             <a:noFill/>
           </p:spPr>
           <p:txBody>
-            <a:bodyPr wrap="none" lIns="0" tIns="0" rIns="0" bIns="0" anchor="ctr">
+            <a:bodyPr wrap="square" lIns="0" tIns="0" rIns="0" bIns="0" anchor="ctr">
               <a:noAutofit/>
             </a:bodyPr>
             <a:lstStyle>
@@ -4777,7 +4777,7 @@
             <a:noFill/>
           </p:spPr>
           <p:txBody>
-            <a:bodyPr wrap="none" lIns="0" tIns="0" rIns="0" bIns="0" anchor="ctr">
+            <a:bodyPr wrap="square" lIns="0" tIns="0" rIns="0" bIns="0" anchor="ctr">
               <a:noAutofit/>
             </a:bodyPr>
             <a:lstStyle>
@@ -4871,7 +4871,7 @@
             <a:noFill/>
           </p:spPr>
           <p:txBody>
-            <a:bodyPr wrap="none" lIns="0" tIns="0" rIns="0" bIns="0" anchor="ctr">
+            <a:bodyPr wrap="square" lIns="0" tIns="0" rIns="0" bIns="0" anchor="ctr">
               <a:noAutofit/>
             </a:bodyPr>
             <a:lstStyle>
@@ -4917,7 +4917,7 @@
             <a:noFill/>
           </p:spPr>
           <p:txBody>
-            <a:bodyPr wrap="none" lIns="0" tIns="0" rIns="0" bIns="0" anchor="ctr">
+            <a:bodyPr wrap="square" lIns="0" tIns="0" rIns="0" bIns="0" anchor="ctr">
               <a:noAutofit/>
             </a:bodyPr>
             <a:lstStyle>
@@ -5029,7 +5029,7 @@
             <a:noFill/>
           </p:spPr>
           <p:txBody>
-            <a:bodyPr wrap="none" lIns="0" tIns="0" rIns="0" bIns="0" anchor="ctr">
+            <a:bodyPr wrap="square" lIns="0" tIns="0" rIns="0" bIns="0" anchor="ctr">
               <a:noAutofit/>
             </a:bodyPr>
             <a:lstStyle>
@@ -5121,7 +5121,7 @@
             <a:noFill/>
           </p:spPr>
           <p:txBody>
-            <a:bodyPr wrap="none" lIns="0" tIns="0" rIns="0" bIns="0" anchor="ctr">
+            <a:bodyPr wrap="square" lIns="0" tIns="0" rIns="0" bIns="0" anchor="ctr">
               <a:noAutofit/>
             </a:bodyPr>
             <a:lstStyle>
@@ -5167,7 +5167,7 @@
             <a:noFill/>
           </p:spPr>
           <p:txBody>
-            <a:bodyPr wrap="none" lIns="0" tIns="0" rIns="0" bIns="0" anchor="ctr">
+            <a:bodyPr wrap="square" lIns="0" tIns="0" rIns="0" bIns="0" anchor="ctr">
               <a:noAutofit/>
             </a:bodyPr>
             <a:lstStyle>
@@ -5279,7 +5279,7 @@
             <a:noFill/>
           </p:spPr>
           <p:txBody>
-            <a:bodyPr wrap="none" lIns="0" tIns="0" rIns="0" bIns="0" anchor="ctr">
+            <a:bodyPr wrap="square" lIns="0" tIns="0" rIns="0" bIns="0" anchor="ctr">
               <a:noAutofit/>
             </a:bodyPr>
             <a:lstStyle>
@@ -5501,7 +5501,7 @@
             <a:noFill/>
           </p:spPr>
           <p:txBody>
-            <a:bodyPr wrap="none" lIns="0" tIns="0" rIns="0" bIns="0" anchor="ctr">
+            <a:bodyPr wrap="square" lIns="0" tIns="0" rIns="0" bIns="0" anchor="ctr">
               <a:noAutofit/>
             </a:bodyPr>
             <a:lstStyle>
@@ -5547,7 +5547,7 @@
             <a:noFill/>
           </p:spPr>
           <p:txBody>
-            <a:bodyPr wrap="none" lIns="0" tIns="0" rIns="0" bIns="0" anchor="ctr">
+            <a:bodyPr wrap="square" lIns="0" tIns="0" rIns="0" bIns="0" anchor="ctr">
               <a:noAutofit/>
             </a:bodyPr>
             <a:lstStyle>
@@ -5593,7 +5593,7 @@
             <a:noFill/>
           </p:spPr>
           <p:txBody>
-            <a:bodyPr wrap="none" lIns="0" tIns="0" rIns="0" bIns="0" anchor="ctr">
+            <a:bodyPr wrap="square" lIns="0" tIns="0" rIns="0" bIns="0" anchor="ctr">
               <a:noAutofit/>
             </a:bodyPr>
             <a:lstStyle>
@@ -5639,7 +5639,7 @@
             <a:noFill/>
           </p:spPr>
           <p:txBody>
-            <a:bodyPr wrap="none" lIns="0" tIns="0" rIns="0" bIns="0" anchor="ctr">
+            <a:bodyPr wrap="square" lIns="0" tIns="0" rIns="0" bIns="0" anchor="ctr">
               <a:noAutofit/>
             </a:bodyPr>
             <a:lstStyle>
@@ -5685,7 +5685,7 @@
             <a:noFill/>
           </p:spPr>
           <p:txBody>
-            <a:bodyPr wrap="none" lIns="0" tIns="0" rIns="0" bIns="0" anchor="ctr">
+            <a:bodyPr wrap="square" lIns="0" tIns="0" rIns="0" bIns="0" anchor="ctr">
               <a:noAutofit/>
             </a:bodyPr>
             <a:lstStyle>
@@ -5731,7 +5731,7 @@
             <a:noFill/>
           </p:spPr>
           <p:txBody>
-            <a:bodyPr wrap="none" lIns="0" tIns="0" rIns="0" bIns="0" anchor="ctr">
+            <a:bodyPr wrap="square" lIns="0" tIns="0" rIns="0" bIns="0" anchor="ctr">
               <a:noAutofit/>
             </a:bodyPr>
             <a:lstStyle>
@@ -5777,7 +5777,7 @@
             <a:noFill/>
           </p:spPr>
           <p:txBody>
-            <a:bodyPr wrap="none" lIns="0" tIns="0" rIns="0" bIns="0" anchor="ctr">
+            <a:bodyPr wrap="square" lIns="0" tIns="0" rIns="0" bIns="0" anchor="ctr">
               <a:noAutofit/>
             </a:bodyPr>
             <a:lstStyle>
@@ -5823,7 +5823,7 @@
             <a:noFill/>
           </p:spPr>
           <p:txBody>
-            <a:bodyPr wrap="none" lIns="0" tIns="0" rIns="0" bIns="0" anchor="ctr">
+            <a:bodyPr wrap="square" lIns="0" tIns="0" rIns="0" bIns="0" anchor="ctr">
               <a:noAutofit/>
             </a:bodyPr>
             <a:lstStyle>
@@ -5869,7 +5869,7 @@
             <a:noFill/>
           </p:spPr>
           <p:txBody>
-            <a:bodyPr wrap="none" lIns="0" tIns="0" rIns="0" bIns="0" anchor="ctr">
+            <a:bodyPr wrap="square" lIns="0" tIns="0" rIns="0" bIns="0" anchor="ctr">
               <a:noAutofit/>
             </a:bodyPr>
             <a:lstStyle>
@@ -6043,7 +6043,7 @@
             <a:noFill/>
           </p:spPr>
           <p:txBody>
-            <a:bodyPr wrap="none" lIns="0" tIns="0" rIns="0" bIns="0" anchor="ctr">
+            <a:bodyPr wrap="square" lIns="0" tIns="0" rIns="0" bIns="0" anchor="ctr">
               <a:noAutofit/>
             </a:bodyPr>
             <a:lstStyle>
@@ -6111,7 +6111,7 @@
             <a:noFill/>
           </p:spPr>
           <p:txBody>
-            <a:bodyPr wrap="none" lIns="0" tIns="0" rIns="0" bIns="0" anchor="ctr">
+            <a:bodyPr wrap="square" lIns="0" tIns="0" rIns="0" bIns="0" anchor="ctr">
               <a:noAutofit/>
             </a:bodyPr>
             <a:lstStyle>
@@ -6179,7 +6179,7 @@
             <a:noFill/>
           </p:spPr>
           <p:txBody>
-            <a:bodyPr wrap="none" lIns="0" tIns="0" rIns="0" bIns="0" anchor="ctr">
+            <a:bodyPr wrap="square" lIns="0" tIns="0" rIns="0" bIns="0" anchor="ctr">
               <a:noAutofit/>
             </a:bodyPr>
             <a:lstStyle>
@@ -6269,7 +6269,7 @@
             <a:noFill/>
           </p:spPr>
           <p:txBody>
-            <a:bodyPr wrap="none" lIns="0" tIns="0" rIns="0" bIns="0" anchor="ctr">
+            <a:bodyPr wrap="square" lIns="0" tIns="0" rIns="0" bIns="0" anchor="ctr">
               <a:noAutofit/>
             </a:bodyPr>
             <a:lstStyle>
@@ -6315,7 +6315,7 @@
             <a:noFill/>
           </p:spPr>
           <p:txBody>
-            <a:bodyPr wrap="none" lIns="0" tIns="0" rIns="0" bIns="0" anchor="ctr">
+            <a:bodyPr wrap="square" lIns="0" tIns="0" rIns="0" bIns="0" anchor="ctr">
               <a:noAutofit/>
             </a:bodyPr>
             <a:lstStyle>
@@ -6361,7 +6361,7 @@
             <a:noFill/>
           </p:spPr>
           <p:txBody>
-            <a:bodyPr wrap="none" lIns="0" tIns="0" rIns="0" bIns="0" anchor="ctr">
+            <a:bodyPr wrap="square" lIns="0" tIns="0" rIns="0" bIns="0" anchor="ctr">
               <a:noAutofit/>
             </a:bodyPr>
             <a:lstStyle>
@@ -6500,7 +6500,7 @@
             <a:noFill/>
           </p:spPr>
           <p:txBody>
-            <a:bodyPr wrap="none" lIns="0" tIns="0" rIns="0" bIns="0" anchor="ctr">
+            <a:bodyPr wrap="square" lIns="0" tIns="0" rIns="0" bIns="0" anchor="ctr">
               <a:noAutofit/>
             </a:bodyPr>
             <a:lstStyle>
@@ -6546,7 +6546,7 @@
             <a:noFill/>
           </p:spPr>
           <p:txBody>
-            <a:bodyPr wrap="none" lIns="0" tIns="0" rIns="0" bIns="0" anchor="ctr">
+            <a:bodyPr wrap="square" lIns="0" tIns="0" rIns="0" bIns="0" anchor="ctr">
               <a:noAutofit/>
             </a:bodyPr>
             <a:lstStyle>
@@ -6592,7 +6592,7 @@
             <a:noFill/>
           </p:spPr>
           <p:txBody>
-            <a:bodyPr wrap="none" lIns="0" tIns="0" rIns="0" bIns="0" anchor="ctr">
+            <a:bodyPr wrap="square" lIns="0" tIns="0" rIns="0" bIns="0" anchor="ctr">
               <a:noAutofit/>
             </a:bodyPr>
             <a:lstStyle>
@@ -6731,7 +6731,7 @@
             <a:noFill/>
           </p:spPr>
           <p:txBody>
-            <a:bodyPr wrap="none" lIns="0" tIns="0" rIns="0" bIns="0" anchor="ctr">
+            <a:bodyPr wrap="square" lIns="0" tIns="0" rIns="0" bIns="0" anchor="ctr">
               <a:noAutofit/>
             </a:bodyPr>
             <a:lstStyle>
@@ -6777,7 +6777,7 @@
             <a:noFill/>
           </p:spPr>
           <p:txBody>
-            <a:bodyPr wrap="none" lIns="0" tIns="0" rIns="0" bIns="0" anchor="ctr">
+            <a:bodyPr wrap="square" lIns="0" tIns="0" rIns="0" bIns="0" anchor="ctr">
               <a:noAutofit/>
             </a:bodyPr>
             <a:lstStyle>
@@ -6823,7 +6823,7 @@
             <a:noFill/>
           </p:spPr>
           <p:txBody>
-            <a:bodyPr wrap="none" lIns="0" tIns="0" rIns="0" bIns="0" anchor="ctr">
+            <a:bodyPr wrap="square" lIns="0" tIns="0" rIns="0" bIns="0" anchor="ctr">
               <a:noAutofit/>
             </a:bodyPr>
             <a:lstStyle>
@@ -6962,7 +6962,7 @@
             <a:noFill/>
           </p:spPr>
           <p:txBody>
-            <a:bodyPr wrap="none" lIns="0" tIns="0" rIns="0" bIns="0" anchor="ctr">
+            <a:bodyPr wrap="square" lIns="0" tIns="0" rIns="0" bIns="0" anchor="ctr">
               <a:noAutofit/>
             </a:bodyPr>
             <a:lstStyle>
@@ -7008,7 +7008,7 @@
             <a:noFill/>
           </p:spPr>
           <p:txBody>
-            <a:bodyPr wrap="none" lIns="0" tIns="0" rIns="0" bIns="0" anchor="ctr">
+            <a:bodyPr wrap="square" lIns="0" tIns="0" rIns="0" bIns="0" anchor="ctr">
               <a:noAutofit/>
             </a:bodyPr>
             <a:lstStyle>
@@ -7054,7 +7054,7 @@
             <a:noFill/>
           </p:spPr>
           <p:txBody>
-            <a:bodyPr wrap="none" lIns="0" tIns="0" rIns="0" bIns="0" anchor="ctr">
+            <a:bodyPr wrap="square" lIns="0" tIns="0" rIns="0" bIns="0" anchor="ctr">
               <a:noAutofit/>
             </a:bodyPr>
             <a:lstStyle>
@@ -7193,7 +7193,7 @@
             <a:noFill/>
           </p:spPr>
           <p:txBody>
-            <a:bodyPr wrap="none" lIns="0" tIns="0" rIns="0" bIns="0" anchor="ctr">
+            <a:bodyPr wrap="square" lIns="0" tIns="0" rIns="0" bIns="0" anchor="ctr">
               <a:noAutofit/>
             </a:bodyPr>
             <a:lstStyle>
@@ -7239,7 +7239,7 @@
             <a:noFill/>
           </p:spPr>
           <p:txBody>
-            <a:bodyPr wrap="none" lIns="0" tIns="0" rIns="0" bIns="0" anchor="ctr">
+            <a:bodyPr wrap="square" lIns="0" tIns="0" rIns="0" bIns="0" anchor="ctr">
               <a:noAutofit/>
             </a:bodyPr>
             <a:lstStyle>
@@ -7285,7 +7285,7 @@
             <a:noFill/>
           </p:spPr>
           <p:txBody>
-            <a:bodyPr wrap="none" lIns="0" tIns="0" rIns="0" bIns="0" anchor="ctr">
+            <a:bodyPr wrap="square" lIns="0" tIns="0" rIns="0" bIns="0" anchor="ctr">
               <a:noAutofit/>
             </a:bodyPr>
             <a:lstStyle>
@@ -7487,7 +7487,7 @@
             <a:noFill/>
           </p:spPr>
           <p:txBody>
-            <a:bodyPr wrap="none" lIns="0" tIns="0" rIns="0" bIns="0" anchor="ctr">
+            <a:bodyPr wrap="square" lIns="0" tIns="0" rIns="0" bIns="0" anchor="ctr">
               <a:noAutofit/>
             </a:bodyPr>
             <a:lstStyle>
@@ -7533,7 +7533,7 @@
             <a:noFill/>
           </p:spPr>
           <p:txBody>
-            <a:bodyPr wrap="none" lIns="0" tIns="0" rIns="0" bIns="0" anchor="ctr">
+            <a:bodyPr wrap="square" lIns="0" tIns="0" rIns="0" bIns="0" anchor="ctr">
               <a:noAutofit/>
             </a:bodyPr>
             <a:lstStyle>
@@ -7579,7 +7579,7 @@
             <a:noFill/>
           </p:spPr>
           <p:txBody>
-            <a:bodyPr wrap="none" lIns="0" tIns="0" rIns="0" bIns="0" anchor="ctr">
+            <a:bodyPr wrap="square" lIns="0" tIns="0" rIns="0" bIns="0" anchor="ctr">
               <a:noAutofit/>
             </a:bodyPr>
             <a:lstStyle>
@@ -7669,7 +7669,7 @@
             <a:noFill/>
           </p:spPr>
           <p:txBody>
-            <a:bodyPr wrap="none" lIns="0" tIns="0" rIns="0" bIns="0" anchor="ctr">
+            <a:bodyPr wrap="square" lIns="0" tIns="0" rIns="0" bIns="0" anchor="ctr">
               <a:noAutofit/>
             </a:bodyPr>
             <a:lstStyle>
@@ -7715,7 +7715,7 @@
             <a:noFill/>
           </p:spPr>
           <p:txBody>
-            <a:bodyPr wrap="none" lIns="0" tIns="0" rIns="0" bIns="0" anchor="ctr">
+            <a:bodyPr wrap="square" lIns="0" tIns="0" rIns="0" bIns="0" anchor="ctr">
               <a:noAutofit/>
             </a:bodyPr>
             <a:lstStyle>
@@ -7761,7 +7761,7 @@
             <a:noFill/>
           </p:spPr>
           <p:txBody>
-            <a:bodyPr wrap="none" lIns="0" tIns="0" rIns="0" bIns="0" anchor="ctr">
+            <a:bodyPr wrap="square" lIns="0" tIns="0" rIns="0" bIns="0" anchor="ctr">
               <a:noAutofit/>
             </a:bodyPr>
             <a:lstStyle>
@@ -7851,7 +7851,7 @@
             <a:noFill/>
           </p:spPr>
           <p:txBody>
-            <a:bodyPr wrap="none" lIns="0" tIns="0" rIns="0" bIns="0" anchor="ctr">
+            <a:bodyPr wrap="square" lIns="0" tIns="0" rIns="0" bIns="0" anchor="ctr">
               <a:noAutofit/>
             </a:bodyPr>
             <a:lstStyle>
@@ -7897,7 +7897,7 @@
             <a:noFill/>
           </p:spPr>
           <p:txBody>
-            <a:bodyPr wrap="none" lIns="0" tIns="0" rIns="0" bIns="0" anchor="ctr">
+            <a:bodyPr wrap="square" lIns="0" tIns="0" rIns="0" bIns="0" anchor="ctr">
               <a:noAutofit/>
             </a:bodyPr>
             <a:lstStyle>
@@ -7943,7 +7943,7 @@
             <a:noFill/>
           </p:spPr>
           <p:txBody>
-            <a:bodyPr wrap="none" lIns="0" tIns="0" rIns="0" bIns="0" anchor="ctr">
+            <a:bodyPr wrap="square" lIns="0" tIns="0" rIns="0" bIns="0" anchor="ctr">
               <a:noAutofit/>
             </a:bodyPr>
             <a:lstStyle>
@@ -8033,7 +8033,7 @@
             <a:noFill/>
           </p:spPr>
           <p:txBody>
-            <a:bodyPr wrap="none" lIns="0" tIns="0" rIns="0" bIns="0" anchor="ctr">
+            <a:bodyPr wrap="square" lIns="0" tIns="0" rIns="0" bIns="0" anchor="ctr">
               <a:noAutofit/>
             </a:bodyPr>
             <a:lstStyle>
@@ -8079,7 +8079,7 @@
             <a:noFill/>
           </p:spPr>
           <p:txBody>
-            <a:bodyPr wrap="none" lIns="0" tIns="0" rIns="0" bIns="0" anchor="ctr">
+            <a:bodyPr wrap="square" lIns="0" tIns="0" rIns="0" bIns="0" anchor="ctr">
               <a:noAutofit/>
             </a:bodyPr>
             <a:lstStyle>
@@ -8125,7 +8125,7 @@
             <a:noFill/>
           </p:spPr>
           <p:txBody>
-            <a:bodyPr wrap="none" lIns="0" tIns="0" rIns="0" bIns="0" anchor="ctr">
+            <a:bodyPr wrap="square" lIns="0" tIns="0" rIns="0" bIns="0" anchor="ctr">
               <a:noAutofit/>
             </a:bodyPr>
             <a:lstStyle>
@@ -8215,7 +8215,7 @@
             <a:noFill/>
           </p:spPr>
           <p:txBody>
-            <a:bodyPr wrap="none" lIns="0" tIns="0" rIns="0" bIns="0" anchor="ctr">
+            <a:bodyPr wrap="square" lIns="0" tIns="0" rIns="0" bIns="0" anchor="ctr">
               <a:noAutofit/>
             </a:bodyPr>
             <a:lstStyle>
@@ -8261,7 +8261,7 @@
             <a:noFill/>
           </p:spPr>
           <p:txBody>
-            <a:bodyPr wrap="none" lIns="0" tIns="0" rIns="0" bIns="0" anchor="ctr">
+            <a:bodyPr wrap="square" lIns="0" tIns="0" rIns="0" bIns="0" anchor="ctr">
               <a:noAutofit/>
             </a:bodyPr>
             <a:lstStyle>
@@ -8307,7 +8307,7 @@
             <a:noFill/>
           </p:spPr>
           <p:txBody>
-            <a:bodyPr wrap="none" lIns="0" tIns="0" rIns="0" bIns="0" anchor="ctr">
+            <a:bodyPr wrap="square" lIns="0" tIns="0" rIns="0" bIns="0" anchor="ctr">
               <a:noAutofit/>
             </a:bodyPr>
             <a:lstStyle>
@@ -8397,7 +8397,7 @@
             <a:noFill/>
           </p:spPr>
           <p:txBody>
-            <a:bodyPr wrap="none" lIns="0" tIns="0" rIns="0" bIns="0" anchor="ctr">
+            <a:bodyPr wrap="square" lIns="0" tIns="0" rIns="0" bIns="0" anchor="ctr">
               <a:noAutofit/>
             </a:bodyPr>
             <a:lstStyle>
@@ -8443,7 +8443,7 @@
             <a:noFill/>
           </p:spPr>
           <p:txBody>
-            <a:bodyPr wrap="none" lIns="0" tIns="0" rIns="0" bIns="0" anchor="ctr">
+            <a:bodyPr wrap="square" lIns="0" tIns="0" rIns="0" bIns="0" anchor="ctr">
               <a:noAutofit/>
             </a:bodyPr>
             <a:lstStyle>
@@ -8489,7 +8489,7 @@
             <a:noFill/>
           </p:spPr>
           <p:txBody>
-            <a:bodyPr wrap="none" lIns="0" tIns="0" rIns="0" bIns="0" anchor="ctr">
+            <a:bodyPr wrap="square" lIns="0" tIns="0" rIns="0" bIns="0" anchor="ctr">
               <a:noAutofit/>
             </a:bodyPr>
             <a:lstStyle>
@@ -8690,7 +8690,7 @@
             <a:noFill/>
           </p:spPr>
           <p:txBody>
-            <a:bodyPr wrap="none" lIns="0" tIns="0" rIns="0" bIns="0" anchor="ctr">
+            <a:bodyPr wrap="square" lIns="0" tIns="0" rIns="0" bIns="0" anchor="ctr">
               <a:noAutofit/>
             </a:bodyPr>
             <a:lstStyle>
@@ -8788,7 +8788,7 @@
             <a:noFill/>
           </p:spPr>
           <p:txBody>
-            <a:bodyPr wrap="none" lIns="0" tIns="0" rIns="0" bIns="0" anchor="ctr">
+            <a:bodyPr wrap="square" lIns="0" tIns="0" rIns="0" bIns="0" anchor="ctr">
               <a:noAutofit/>
             </a:bodyPr>
             <a:lstStyle>
@@ -8886,7 +8886,7 @@
             <a:noFill/>
           </p:spPr>
           <p:txBody>
-            <a:bodyPr wrap="none" lIns="0" tIns="0" rIns="0" bIns="0" anchor="ctr">
+            <a:bodyPr wrap="square" lIns="0" tIns="0" rIns="0" bIns="0" anchor="ctr">
               <a:noAutofit/>
             </a:bodyPr>
             <a:lstStyle>
@@ -8984,7 +8984,7 @@
             <a:noFill/>
           </p:spPr>
           <p:txBody>
-            <a:bodyPr wrap="none" lIns="0" tIns="0" rIns="0" bIns="0" anchor="ctr">
+            <a:bodyPr wrap="square" lIns="0" tIns="0" rIns="0" bIns="0" anchor="ctr">
               <a:noAutofit/>
             </a:bodyPr>
             <a:lstStyle>
@@ -9082,7 +9082,7 @@
             <a:noFill/>
           </p:spPr>
           <p:txBody>
-            <a:bodyPr wrap="none" lIns="0" tIns="0" rIns="0" bIns="0" anchor="ctr">
+            <a:bodyPr wrap="square" lIns="0" tIns="0" rIns="0" bIns="0" anchor="ctr">
               <a:noAutofit/>
             </a:bodyPr>
             <a:lstStyle>
@@ -9128,7 +9128,7 @@
             <a:noFill/>
           </p:spPr>
           <p:txBody>
-            <a:bodyPr wrap="none" lIns="0" tIns="0" rIns="0" bIns="0" anchor="ctr">
+            <a:bodyPr wrap="square" lIns="0" tIns="0" rIns="0" bIns="0" anchor="ctr">
               <a:noAutofit/>
             </a:bodyPr>
             <a:lstStyle>
@@ -9302,7 +9302,7 @@
             <a:noFill/>
           </p:spPr>
           <p:txBody>
-            <a:bodyPr wrap="none" lIns="0" tIns="0" rIns="0" bIns="0" anchor="ctr">
+            <a:bodyPr wrap="square" lIns="0" tIns="0" rIns="0" bIns="0" anchor="ctr">
               <a:noAutofit/>
             </a:bodyPr>
             <a:lstStyle>
@@ -9370,7 +9370,7 @@
             <a:noFill/>
           </p:spPr>
           <p:txBody>
-            <a:bodyPr wrap="none" lIns="0" tIns="0" rIns="0" bIns="0" anchor="ctr">
+            <a:bodyPr wrap="square" lIns="0" tIns="0" rIns="0" bIns="0" anchor="ctr">
               <a:noAutofit/>
             </a:bodyPr>
             <a:lstStyle>
@@ -9416,7 +9416,7 @@
             <a:noFill/>
           </p:spPr>
           <p:txBody>
-            <a:bodyPr wrap="none" lIns="0" tIns="0" rIns="0" bIns="0" anchor="ctr">
+            <a:bodyPr wrap="square" lIns="0" tIns="0" rIns="0" bIns="0" anchor="ctr">
               <a:noAutofit/>
             </a:bodyPr>
             <a:lstStyle>
@@ -9462,7 +9462,7 @@
             <a:noFill/>
           </p:spPr>
           <p:txBody>
-            <a:bodyPr wrap="none" lIns="0" tIns="0" rIns="0" bIns="0" anchor="ctr">
+            <a:bodyPr wrap="square" lIns="0" tIns="0" rIns="0" bIns="0" anchor="ctr">
               <a:noAutofit/>
             </a:bodyPr>
             <a:lstStyle>
@@ -9530,7 +9530,7 @@
             <a:noFill/>
           </p:spPr>
           <p:txBody>
-            <a:bodyPr wrap="none" lIns="0" tIns="0" rIns="0" bIns="0" anchor="ctr">
+            <a:bodyPr wrap="square" lIns="0" tIns="0" rIns="0" bIns="0" anchor="ctr">
               <a:noAutofit/>
             </a:bodyPr>
             <a:lstStyle>
@@ -9576,7 +9576,7 @@
             <a:noFill/>
           </p:spPr>
           <p:txBody>
-            <a:bodyPr wrap="none" lIns="0" tIns="0" rIns="0" bIns="0" anchor="ctr">
+            <a:bodyPr wrap="square" lIns="0" tIns="0" rIns="0" bIns="0" anchor="ctr">
               <a:noAutofit/>
             </a:bodyPr>
             <a:lstStyle>
@@ -9622,7 +9622,7 @@
             <a:noFill/>
           </p:spPr>
           <p:txBody>
-            <a:bodyPr wrap="none" lIns="0" tIns="0" rIns="0" bIns="0" anchor="ctr">
+            <a:bodyPr wrap="square" lIns="0" tIns="0" rIns="0" bIns="0" anchor="ctr">
               <a:noAutofit/>
             </a:bodyPr>
             <a:lstStyle>
@@ -9690,7 +9690,7 @@
             <a:noFill/>
           </p:spPr>
           <p:txBody>
-            <a:bodyPr wrap="none" lIns="0" tIns="0" rIns="0" bIns="0" anchor="ctr">
+            <a:bodyPr wrap="square" lIns="0" tIns="0" rIns="0" bIns="0" anchor="ctr">
               <a:noAutofit/>
             </a:bodyPr>
             <a:lstStyle>
@@ -9736,7 +9736,7 @@
             <a:noFill/>
           </p:spPr>
           <p:txBody>
-            <a:bodyPr wrap="none" lIns="0" tIns="0" rIns="0" bIns="0" anchor="ctr">
+            <a:bodyPr wrap="square" lIns="0" tIns="0" rIns="0" bIns="0" anchor="ctr">
               <a:noAutofit/>
             </a:bodyPr>
             <a:lstStyle>
@@ -9782,7 +9782,7 @@
             <a:noFill/>
           </p:spPr>
           <p:txBody>
-            <a:bodyPr wrap="none" lIns="0" tIns="0" rIns="0" bIns="0" anchor="ctr">
+            <a:bodyPr wrap="square" lIns="0" tIns="0" rIns="0" bIns="0" anchor="ctr">
               <a:noAutofit/>
             </a:bodyPr>
             <a:lstStyle>
@@ -9850,7 +9850,7 @@
             <a:noFill/>
           </p:spPr>
           <p:txBody>
-            <a:bodyPr wrap="none" lIns="0" tIns="0" rIns="0" bIns="0" anchor="ctr">
+            <a:bodyPr wrap="square" lIns="0" tIns="0" rIns="0" bIns="0" anchor="ctr">
               <a:noAutofit/>
             </a:bodyPr>
             <a:lstStyle>
@@ -9896,7 +9896,7 @@
             <a:noFill/>
           </p:spPr>
           <p:txBody>
-            <a:bodyPr wrap="none" lIns="0" tIns="0" rIns="0" bIns="0" anchor="ctr">
+            <a:bodyPr wrap="square" lIns="0" tIns="0" rIns="0" bIns="0" anchor="ctr">
               <a:noAutofit/>
             </a:bodyPr>
             <a:lstStyle>
@@ -9942,7 +9942,7 @@
             <a:noFill/>
           </p:spPr>
           <p:txBody>
-            <a:bodyPr wrap="none" lIns="0" tIns="0" rIns="0" bIns="0" anchor="ctr">
+            <a:bodyPr wrap="square" lIns="0" tIns="0" rIns="0" bIns="0" anchor="ctr">
               <a:noAutofit/>
             </a:bodyPr>
             <a:lstStyle>
@@ -10138,7 +10138,7 @@
             <a:noFill/>
           </p:spPr>
           <p:txBody>
-            <a:bodyPr wrap="none" lIns="0" tIns="0" rIns="0" bIns="0" anchor="ctr">
+            <a:bodyPr wrap="square" lIns="0" tIns="0" rIns="0" bIns="0" anchor="ctr">
               <a:noAutofit/>
             </a:bodyPr>
             <a:lstStyle>
@@ -10228,7 +10228,7 @@
             <a:noFill/>
           </p:spPr>
           <p:txBody>
-            <a:bodyPr wrap="none" lIns="0" tIns="0" rIns="0" bIns="0" anchor="ctr">
+            <a:bodyPr wrap="square" lIns="0" tIns="0" rIns="0" bIns="0" anchor="ctr">
               <a:noAutofit/>
             </a:bodyPr>
             <a:lstStyle>
@@ -10318,7 +10318,7 @@
             <a:noFill/>
           </p:spPr>
           <p:txBody>
-            <a:bodyPr wrap="none" lIns="0" tIns="0" rIns="0" bIns="0" anchor="ctr">
+            <a:bodyPr wrap="square" lIns="0" tIns="0" rIns="0" bIns="0" anchor="ctr">
               <a:noAutofit/>
             </a:bodyPr>
             <a:lstStyle>
@@ -10408,7 +10408,7 @@
             <a:noFill/>
           </p:spPr>
           <p:txBody>
-            <a:bodyPr wrap="none" lIns="0" tIns="0" rIns="0" bIns="0" anchor="ctr">
+            <a:bodyPr wrap="square" lIns="0" tIns="0" rIns="0" bIns="0" anchor="ctr">
               <a:noAutofit/>
             </a:bodyPr>
             <a:lstStyle>
@@ -10454,7 +10454,7 @@
             <a:noFill/>
           </p:spPr>
           <p:txBody>
-            <a:bodyPr wrap="none" lIns="0" tIns="0" rIns="0" bIns="0" anchor="ctr">
+            <a:bodyPr wrap="square" lIns="0" tIns="0" rIns="0" bIns="0" anchor="ctr">
               <a:noAutofit/>
             </a:bodyPr>
             <a:lstStyle>
@@ -11016,7 +11016,7 @@
             <a:noFill/>
           </p:spPr>
           <p:txBody>
-            <a:bodyPr wrap="none" lIns="0" tIns="0" rIns="0" bIns="0" anchor="ctr">
+            <a:bodyPr wrap="square" lIns="0" tIns="0" rIns="0" bIns="0" anchor="ctr">
               <a:noAutofit/>
             </a:bodyPr>
             <a:lstStyle>
@@ -11062,7 +11062,7 @@
             <a:noFill/>
           </p:spPr>
           <p:txBody>
-            <a:bodyPr wrap="none" lIns="0" tIns="0" rIns="0" bIns="0" anchor="ctr">
+            <a:bodyPr wrap="square" lIns="0" tIns="0" rIns="0" bIns="0" anchor="ctr">
               <a:noAutofit/>
             </a:bodyPr>
             <a:lstStyle>
@@ -11108,7 +11108,7 @@
             <a:noFill/>
           </p:spPr>
           <p:txBody>
-            <a:bodyPr wrap="none" lIns="0" tIns="0" rIns="0" bIns="0" anchor="ctr">
+            <a:bodyPr wrap="square" lIns="0" tIns="0" rIns="0" bIns="0" anchor="ctr">
               <a:noAutofit/>
             </a:bodyPr>
             <a:lstStyle>
@@ -11154,7 +11154,7 @@
             <a:noFill/>
           </p:spPr>
           <p:txBody>
-            <a:bodyPr wrap="none" lIns="0" tIns="0" rIns="0" bIns="0" anchor="ctr">
+            <a:bodyPr wrap="square" lIns="0" tIns="0" rIns="0" bIns="0" anchor="ctr">
               <a:noAutofit/>
             </a:bodyPr>
             <a:lstStyle>
@@ -11222,7 +11222,7 @@
             <a:noFill/>
           </p:spPr>
           <p:txBody>
-            <a:bodyPr wrap="none" lIns="0" tIns="0" rIns="0" bIns="0" anchor="ctr">
+            <a:bodyPr wrap="square" lIns="0" tIns="0" rIns="0" bIns="0" anchor="ctr">
               <a:noAutofit/>
             </a:bodyPr>
             <a:lstStyle>
@@ -11290,7 +11290,7 @@
             <a:noFill/>
           </p:spPr>
           <p:txBody>
-            <a:bodyPr wrap="none" lIns="0" tIns="0" rIns="0" bIns="0" anchor="ctr">
+            <a:bodyPr wrap="square" lIns="0" tIns="0" rIns="0" bIns="0" anchor="ctr">
               <a:noAutofit/>
             </a:bodyPr>
             <a:lstStyle>
@@ -11358,7 +11358,7 @@
             <a:noFill/>
           </p:spPr>
           <p:txBody>
-            <a:bodyPr wrap="none" lIns="0" tIns="0" rIns="0" bIns="0" anchor="ctr">
+            <a:bodyPr wrap="square" lIns="0" tIns="0" rIns="0" bIns="0" anchor="ctr">
               <a:noAutofit/>
             </a:bodyPr>
             <a:lstStyle>
@@ -11426,7 +11426,7 @@
             <a:noFill/>
           </p:spPr>
           <p:txBody>
-            <a:bodyPr wrap="none" lIns="0" tIns="0" rIns="0" bIns="0" anchor="ctr">
+            <a:bodyPr wrap="square" lIns="0" tIns="0" rIns="0" bIns="0" anchor="ctr">
               <a:noAutofit/>
             </a:bodyPr>
             <a:lstStyle>
@@ -11600,7 +11600,7 @@
             <a:noFill/>
           </p:spPr>
           <p:txBody>
-            <a:bodyPr wrap="none" lIns="0" tIns="0" rIns="0" bIns="0" anchor="ctr">
+            <a:bodyPr wrap="square" lIns="0" tIns="0" rIns="0" bIns="0" anchor="ctr">
               <a:noAutofit/>
             </a:bodyPr>
             <a:lstStyle>
@@ -11717,7 +11717,7 @@
             <a:noFill/>
           </p:spPr>
           <p:txBody>
-            <a:bodyPr wrap="none" lIns="0" tIns="0" rIns="0" bIns="0" anchor="ctr">
+            <a:bodyPr wrap="square" lIns="0" tIns="0" rIns="0" bIns="0" anchor="ctr">
               <a:noAutofit/>
             </a:bodyPr>
             <a:lstStyle>
@@ -11763,7 +11763,7 @@
             <a:noFill/>
           </p:spPr>
           <p:txBody>
-            <a:bodyPr wrap="none" lIns="0" tIns="0" rIns="0" bIns="0" anchor="ctr">
+            <a:bodyPr wrap="square" lIns="0" tIns="0" rIns="0" bIns="0" anchor="ctr">
               <a:noAutofit/>
             </a:bodyPr>
             <a:lstStyle>
@@ -11880,7 +11880,7 @@
             <a:noFill/>
           </p:spPr>
           <p:txBody>
-            <a:bodyPr wrap="none" lIns="0" tIns="0" rIns="0" bIns="0" anchor="ctr">
+            <a:bodyPr wrap="square" lIns="0" tIns="0" rIns="0" bIns="0" anchor="ctr">
               <a:noAutofit/>
             </a:bodyPr>
             <a:lstStyle>
@@ -11926,7 +11926,7 @@
             <a:noFill/>
           </p:spPr>
           <p:txBody>
-            <a:bodyPr wrap="none" lIns="0" tIns="0" rIns="0" bIns="0" anchor="ctr">
+            <a:bodyPr wrap="square" lIns="0" tIns="0" rIns="0" bIns="0" anchor="ctr">
               <a:noAutofit/>
             </a:bodyPr>
             <a:lstStyle>
@@ -12043,7 +12043,7 @@
             <a:noFill/>
           </p:spPr>
           <p:txBody>
-            <a:bodyPr wrap="none" lIns="0" tIns="0" rIns="0" bIns="0" anchor="ctr">
+            <a:bodyPr wrap="square" lIns="0" tIns="0" rIns="0" bIns="0" anchor="ctr">
               <a:noAutofit/>
             </a:bodyPr>
             <a:lstStyle>
@@ -12089,7 +12089,7 @@
             <a:noFill/>
           </p:spPr>
           <p:txBody>
-            <a:bodyPr wrap="none" lIns="0" tIns="0" rIns="0" bIns="0" anchor="ctr">
+            <a:bodyPr wrap="square" lIns="0" tIns="0" rIns="0" bIns="0" anchor="ctr">
               <a:noAutofit/>
             </a:bodyPr>
             <a:lstStyle>
@@ -12588,7 +12588,7 @@
             <a:noFill/>
           </p:spPr>
           <p:txBody>
-            <a:bodyPr wrap="none" lIns="0" tIns="0" rIns="0" bIns="0" anchor="ctr">
+            <a:bodyPr wrap="square" lIns="0" tIns="0" rIns="0" bIns="0" anchor="ctr">
               <a:noAutofit/>
             </a:bodyPr>
             <a:lstStyle>
@@ -12722,7 +12722,7 @@
             <a:noFill/>
           </p:spPr>
           <p:txBody>
-            <a:bodyPr wrap="none" lIns="0" tIns="0" rIns="0" bIns="0" anchor="ctr">
+            <a:bodyPr wrap="square" lIns="0" tIns="0" rIns="0" bIns="0" anchor="ctr">
               <a:noAutofit/>
             </a:bodyPr>
             <a:lstStyle>
@@ -12812,7 +12812,7 @@
             <a:noFill/>
           </p:spPr>
           <p:txBody>
-            <a:bodyPr wrap="none" lIns="0" tIns="0" rIns="0" bIns="0" anchor="ctr">
+            <a:bodyPr wrap="square" lIns="0" tIns="0" rIns="0" bIns="0" anchor="ctr">
               <a:noAutofit/>
             </a:bodyPr>
             <a:lstStyle>
@@ -12902,7 +12902,7 @@
             <a:noFill/>
           </p:spPr>
           <p:txBody>
-            <a:bodyPr wrap="none" lIns="0" tIns="0" rIns="0" bIns="0" anchor="ctr">
+            <a:bodyPr wrap="square" lIns="0" tIns="0" rIns="0" bIns="0" anchor="ctr">
               <a:noAutofit/>
             </a:bodyPr>
             <a:lstStyle>
@@ -12992,7 +12992,7 @@
             <a:noFill/>
           </p:spPr>
           <p:txBody>
-            <a:bodyPr wrap="none" lIns="0" tIns="0" rIns="0" bIns="0" anchor="ctr">
+            <a:bodyPr wrap="square" lIns="0" tIns="0" rIns="0" bIns="0" anchor="ctr">
               <a:noAutofit/>
             </a:bodyPr>
             <a:lstStyle>
@@ -13082,7 +13082,7 @@
             <a:noFill/>
           </p:spPr>
           <p:txBody>
-            <a:bodyPr wrap="none" lIns="0" tIns="0" rIns="0" bIns="0" anchor="ctr">
+            <a:bodyPr wrap="square" lIns="0" tIns="0" rIns="0" bIns="0" anchor="ctr">
               <a:noAutofit/>
             </a:bodyPr>
             <a:lstStyle>
@@ -13172,7 +13172,7 @@
             <a:noFill/>
           </p:spPr>
           <p:txBody>
-            <a:bodyPr wrap="none" lIns="0" tIns="0" rIns="0" bIns="0" anchor="ctr">
+            <a:bodyPr wrap="square" lIns="0" tIns="0" rIns="0" bIns="0" anchor="ctr">
               <a:noAutofit/>
             </a:bodyPr>
             <a:lstStyle>
@@ -13218,7 +13218,7 @@
             <a:noFill/>
           </p:spPr>
           <p:txBody>
-            <a:bodyPr wrap="none" lIns="0" tIns="0" rIns="0" bIns="0" anchor="ctr">
+            <a:bodyPr wrap="square" lIns="0" tIns="0" rIns="0" bIns="0" anchor="ctr">
               <a:noAutofit/>
             </a:bodyPr>
             <a:lstStyle>
@@ -13414,7 +13414,7 @@
             <a:noFill/>
           </p:spPr>
           <p:txBody>
-            <a:bodyPr wrap="none" lIns="0" tIns="0" rIns="0" bIns="0" anchor="ctr">
+            <a:bodyPr wrap="square" lIns="0" tIns="0" rIns="0" bIns="0" anchor="ctr">
               <a:noAutofit/>
             </a:bodyPr>
             <a:lstStyle>
@@ -13460,7 +13460,7 @@
             <a:noFill/>
           </p:spPr>
           <p:txBody>
-            <a:bodyPr wrap="none" lIns="0" tIns="0" rIns="0" bIns="0" anchor="ctr">
+            <a:bodyPr wrap="square" lIns="0" tIns="0" rIns="0" bIns="0" anchor="ctr">
               <a:noAutofit/>
             </a:bodyPr>
             <a:lstStyle>
@@ -13506,7 +13506,7 @@
             <a:noFill/>
           </p:spPr>
           <p:txBody>
-            <a:bodyPr wrap="none" lIns="0" tIns="0" rIns="0" bIns="0" anchor="ctr">
+            <a:bodyPr wrap="square" lIns="0" tIns="0" rIns="0" bIns="0" anchor="ctr">
               <a:noAutofit/>
             </a:bodyPr>
             <a:lstStyle>
@@ -13598,7 +13598,7 @@
             <a:noFill/>
           </p:spPr>
           <p:txBody>
-            <a:bodyPr wrap="none" lIns="0" tIns="0" rIns="0" bIns="0" anchor="ctr">
+            <a:bodyPr wrap="square" lIns="0" tIns="0" rIns="0" bIns="0" anchor="ctr">
               <a:noAutofit/>
             </a:bodyPr>
             <a:lstStyle>
@@ -13644,7 +13644,7 @@
             <a:noFill/>
           </p:spPr>
           <p:txBody>
-            <a:bodyPr wrap="none" lIns="0" tIns="0" rIns="0" bIns="0" anchor="ctr">
+            <a:bodyPr wrap="square" lIns="0" tIns="0" rIns="0" bIns="0" anchor="ctr">
               <a:noAutofit/>
             </a:bodyPr>
             <a:lstStyle>
@@ -13690,7 +13690,7 @@
             <a:noFill/>
           </p:spPr>
           <p:txBody>
-            <a:bodyPr wrap="none" lIns="0" tIns="0" rIns="0" bIns="0" anchor="ctr">
+            <a:bodyPr wrap="square" lIns="0" tIns="0" rIns="0" bIns="0" anchor="ctr">
               <a:noAutofit/>
             </a:bodyPr>
             <a:lstStyle>
@@ -13782,7 +13782,7 @@
             <a:noFill/>
           </p:spPr>
           <p:txBody>
-            <a:bodyPr wrap="none" lIns="0" tIns="0" rIns="0" bIns="0" anchor="ctr">
+            <a:bodyPr wrap="square" lIns="0" tIns="0" rIns="0" bIns="0" anchor="ctr">
               <a:noAutofit/>
             </a:bodyPr>
             <a:lstStyle>
@@ -13828,7 +13828,7 @@
             <a:noFill/>
           </p:spPr>
           <p:txBody>
-            <a:bodyPr wrap="none" lIns="0" tIns="0" rIns="0" bIns="0" anchor="ctr">
+            <a:bodyPr wrap="square" lIns="0" tIns="0" rIns="0" bIns="0" anchor="ctr">
               <a:noAutofit/>
             </a:bodyPr>
             <a:lstStyle>
@@ -13874,7 +13874,7 @@
             <a:noFill/>
           </p:spPr>
           <p:txBody>
-            <a:bodyPr wrap="none" lIns="0" tIns="0" rIns="0" bIns="0" anchor="ctr">
+            <a:bodyPr wrap="square" lIns="0" tIns="0" rIns="0" bIns="0" anchor="ctr">
               <a:noAutofit/>
             </a:bodyPr>
             <a:lstStyle>
@@ -14136,7 +14136,7 @@
             <a:noFill/>
           </p:spPr>
           <p:txBody>
-            <a:bodyPr wrap="none" lIns="0" tIns="0" rIns="0" bIns="0" anchor="ctr">
+            <a:bodyPr wrap="square" lIns="0" tIns="0" rIns="0" bIns="0" anchor="ctr">
               <a:noAutofit/>
             </a:bodyPr>
             <a:lstStyle>
@@ -14182,7 +14182,7 @@
             <a:noFill/>
           </p:spPr>
           <p:txBody>
-            <a:bodyPr wrap="none" lIns="0" tIns="0" rIns="0" bIns="0" anchor="ctr">
+            <a:bodyPr wrap="square" lIns="0" tIns="0" rIns="0" bIns="0" anchor="ctr">
               <a:noAutofit/>
             </a:bodyPr>
             <a:lstStyle>
@@ -14228,7 +14228,7 @@
             <a:noFill/>
           </p:spPr>
           <p:txBody>
-            <a:bodyPr wrap="none" lIns="0" tIns="0" rIns="0" bIns="0" anchor="ctr">
+            <a:bodyPr wrap="square" lIns="0" tIns="0" rIns="0" bIns="0" anchor="ctr">
               <a:noAutofit/>
             </a:bodyPr>
             <a:lstStyle>
@@ -14274,7 +14274,7 @@
             <a:noFill/>
           </p:spPr>
           <p:txBody>
-            <a:bodyPr wrap="none" lIns="0" tIns="0" rIns="0" bIns="0" anchor="ctr">
+            <a:bodyPr wrap="square" lIns="0" tIns="0" rIns="0" bIns="0" anchor="ctr">
               <a:noAutofit/>
             </a:bodyPr>
             <a:lstStyle>
@@ -14320,7 +14320,7 @@
             <a:noFill/>
           </p:spPr>
           <p:txBody>
-            <a:bodyPr wrap="none" lIns="0" tIns="0" rIns="0" bIns="0" anchor="ctr">
+            <a:bodyPr wrap="square" lIns="0" tIns="0" rIns="0" bIns="0" anchor="ctr">
               <a:noAutofit/>
             </a:bodyPr>
             <a:lstStyle>
@@ -14366,7 +14366,7 @@
             <a:noFill/>
           </p:spPr>
           <p:txBody>
-            <a:bodyPr wrap="none" lIns="0" tIns="0" rIns="0" bIns="0" anchor="ctr">
+            <a:bodyPr wrap="square" lIns="0" tIns="0" rIns="0" bIns="0" anchor="ctr">
               <a:noAutofit/>
             </a:bodyPr>
             <a:lstStyle>
@@ -14412,7 +14412,7 @@
             <a:noFill/>
           </p:spPr>
           <p:txBody>
-            <a:bodyPr wrap="none" lIns="0" tIns="0" rIns="0" bIns="0" anchor="ctr">
+            <a:bodyPr wrap="square" lIns="0" tIns="0" rIns="0" bIns="0" anchor="ctr">
               <a:noAutofit/>
             </a:bodyPr>
             <a:lstStyle>
@@ -14458,7 +14458,7 @@
             <a:noFill/>
           </p:spPr>
           <p:txBody>
-            <a:bodyPr wrap="none" lIns="0" tIns="0" rIns="0" bIns="0" anchor="ctr">
+            <a:bodyPr wrap="square" lIns="0" tIns="0" rIns="0" bIns="0" anchor="ctr">
               <a:noAutofit/>
             </a:bodyPr>
             <a:lstStyle>
@@ -14504,7 +14504,7 @@
             <a:noFill/>
           </p:spPr>
           <p:txBody>
-            <a:bodyPr wrap="none" lIns="0" tIns="0" rIns="0" bIns="0" anchor="ctr">
+            <a:bodyPr wrap="square" lIns="0" tIns="0" rIns="0" bIns="0" anchor="ctr">
               <a:noAutofit/>
             </a:bodyPr>
             <a:lstStyle>
@@ -14550,7 +14550,7 @@
             <a:noFill/>
           </p:spPr>
           <p:txBody>
-            <a:bodyPr wrap="none" lIns="0" tIns="0" rIns="0" bIns="0" anchor="ctr">
+            <a:bodyPr wrap="square" lIns="0" tIns="0" rIns="0" bIns="0" anchor="ctr">
               <a:noAutofit/>
             </a:bodyPr>
             <a:lstStyle>
@@ -14596,7 +14596,7 @@
             <a:noFill/>
           </p:spPr>
           <p:txBody>
-            <a:bodyPr wrap="none" lIns="0" tIns="0" rIns="0" bIns="0" anchor="ctr">
+            <a:bodyPr wrap="square" lIns="0" tIns="0" rIns="0" bIns="0" anchor="ctr">
               <a:noAutofit/>
             </a:bodyPr>
             <a:lstStyle>
@@ -14642,7 +14642,7 @@
             <a:noFill/>
           </p:spPr>
           <p:txBody>
-            <a:bodyPr wrap="none" lIns="0" tIns="0" rIns="0" bIns="0" anchor="ctr">
+            <a:bodyPr wrap="square" lIns="0" tIns="0" rIns="0" bIns="0" anchor="ctr">
               <a:noAutofit/>
             </a:bodyPr>
             <a:lstStyle>
@@ -14688,7 +14688,7 @@
             <a:noFill/>
           </p:spPr>
           <p:txBody>
-            <a:bodyPr wrap="none" lIns="0" tIns="0" rIns="0" bIns="0" anchor="ctr">
+            <a:bodyPr wrap="square" lIns="0" tIns="0" rIns="0" bIns="0" anchor="ctr">
               <a:noAutofit/>
             </a:bodyPr>
             <a:lstStyle>
@@ -14734,7 +14734,7 @@
             <a:noFill/>
           </p:spPr>
           <p:txBody>
-            <a:bodyPr wrap="none" lIns="0" tIns="0" rIns="0" bIns="0" anchor="ctr">
+            <a:bodyPr wrap="square" lIns="0" tIns="0" rIns="0" bIns="0" anchor="ctr">
               <a:noAutofit/>
             </a:bodyPr>
             <a:lstStyle>
@@ -14780,7 +14780,7 @@
             <a:noFill/>
           </p:spPr>
           <p:txBody>
-            <a:bodyPr wrap="none" lIns="0" tIns="0" rIns="0" bIns="0" anchor="ctr">
+            <a:bodyPr wrap="square" lIns="0" tIns="0" rIns="0" bIns="0" anchor="ctr">
               <a:noAutofit/>
             </a:bodyPr>
             <a:lstStyle>
@@ -14826,7 +14826,7 @@
             <a:noFill/>
           </p:spPr>
           <p:txBody>
-            <a:bodyPr wrap="none" lIns="0" tIns="0" rIns="0" bIns="0" anchor="ctr">
+            <a:bodyPr wrap="square" lIns="0" tIns="0" rIns="0" bIns="0" anchor="ctr">
               <a:noAutofit/>
             </a:bodyPr>
             <a:lstStyle>
@@ -14872,7 +14872,7 @@
             <a:noFill/>
           </p:spPr>
           <p:txBody>
-            <a:bodyPr wrap="none" lIns="0" tIns="0" rIns="0" bIns="0" anchor="ctr">
+            <a:bodyPr wrap="square" lIns="0" tIns="0" rIns="0" bIns="0" anchor="ctr">
               <a:noAutofit/>
             </a:bodyPr>
             <a:lstStyle>
@@ -14918,7 +14918,7 @@
             <a:noFill/>
           </p:spPr>
           <p:txBody>
-            <a:bodyPr wrap="none" lIns="0" tIns="0" rIns="0" bIns="0" anchor="ctr">
+            <a:bodyPr wrap="square" lIns="0" tIns="0" rIns="0" bIns="0" anchor="ctr">
               <a:noAutofit/>
             </a:bodyPr>
             <a:lstStyle>
@@ -14964,7 +14964,7 @@
             <a:noFill/>
           </p:spPr>
           <p:txBody>
-            <a:bodyPr wrap="none" lIns="0" tIns="0" rIns="0" bIns="0" anchor="ctr">
+            <a:bodyPr wrap="square" lIns="0" tIns="0" rIns="0" bIns="0" anchor="ctr">
               <a:noAutofit/>
             </a:bodyPr>
             <a:lstStyle>
@@ -15010,7 +15010,7 @@
             <a:noFill/>
           </p:spPr>
           <p:txBody>
-            <a:bodyPr wrap="none" lIns="0" tIns="0" rIns="0" bIns="0" anchor="ctr">
+            <a:bodyPr wrap="square" lIns="0" tIns="0" rIns="0" bIns="0" anchor="ctr">
               <a:noAutofit/>
             </a:bodyPr>
             <a:lstStyle>
@@ -15056,7 +15056,7 @@
             <a:noFill/>
           </p:spPr>
           <p:txBody>
-            <a:bodyPr wrap="none" lIns="0" tIns="0" rIns="0" bIns="0" anchor="ctr">
+            <a:bodyPr wrap="square" lIns="0" tIns="0" rIns="0" bIns="0" anchor="ctr">
               <a:noAutofit/>
             </a:bodyPr>
             <a:lstStyle>
@@ -15102,7 +15102,7 @@
             <a:noFill/>
           </p:spPr>
           <p:txBody>
-            <a:bodyPr wrap="none" lIns="0" tIns="0" rIns="0" bIns="0" anchor="ctr">
+            <a:bodyPr wrap="square" lIns="0" tIns="0" rIns="0" bIns="0" anchor="ctr">
               <a:noAutofit/>
             </a:bodyPr>
             <a:lstStyle>
@@ -15148,7 +15148,7 @@
             <a:noFill/>
           </p:spPr>
           <p:txBody>
-            <a:bodyPr wrap="none" lIns="0" tIns="0" rIns="0" bIns="0" anchor="ctr">
+            <a:bodyPr wrap="square" lIns="0" tIns="0" rIns="0" bIns="0" anchor="ctr">
               <a:noAutofit/>
             </a:bodyPr>
             <a:lstStyle>
@@ -15194,7 +15194,7 @@
             <a:noFill/>
           </p:spPr>
           <p:txBody>
-            <a:bodyPr wrap="none" lIns="0" tIns="0" rIns="0" bIns="0" anchor="ctr">
+            <a:bodyPr wrap="square" lIns="0" tIns="0" rIns="0" bIns="0" anchor="ctr">
               <a:noAutofit/>
             </a:bodyPr>
             <a:lstStyle>
@@ -15346,7 +15346,7 @@
             <a:noFill/>
           </p:spPr>
           <p:txBody>
-            <a:bodyPr wrap="none" lIns="0" tIns="0" rIns="0" bIns="0" anchor="ctr">
+            <a:bodyPr wrap="square" lIns="0" tIns="0" rIns="0" bIns="0" anchor="ctr">
               <a:noAutofit/>
             </a:bodyPr>
             <a:lstStyle>
@@ -15480,7 +15480,7 @@
             <a:noFill/>
           </p:spPr>
           <p:txBody>
-            <a:bodyPr wrap="none" lIns="0" tIns="0" rIns="0" bIns="0" anchor="ctr">
+            <a:bodyPr wrap="square" lIns="0" tIns="0" rIns="0" bIns="0" anchor="ctr">
               <a:noAutofit/>
             </a:bodyPr>
             <a:lstStyle>
@@ -15526,7 +15526,7 @@
             <a:noFill/>
           </p:spPr>
           <p:txBody>
-            <a:bodyPr wrap="none" lIns="0" tIns="0" rIns="0" bIns="0" anchor="ctr">
+            <a:bodyPr wrap="square" lIns="0" tIns="0" rIns="0" bIns="0" anchor="ctr">
               <a:noAutofit/>
             </a:bodyPr>
             <a:lstStyle>
@@ -15572,7 +15572,7 @@
             <a:noFill/>
           </p:spPr>
           <p:txBody>
-            <a:bodyPr wrap="none" lIns="0" tIns="0" rIns="0" bIns="0" anchor="ctr">
+            <a:bodyPr wrap="square" lIns="0" tIns="0" rIns="0" bIns="0" anchor="ctr">
               <a:noAutofit/>
             </a:bodyPr>
             <a:lstStyle>
@@ -15618,7 +15618,7 @@
             <a:noFill/>
           </p:spPr>
           <p:txBody>
-            <a:bodyPr wrap="none" lIns="0" tIns="0" rIns="0" bIns="0" anchor="ctr">
+            <a:bodyPr wrap="square" lIns="0" tIns="0" rIns="0" bIns="0" anchor="ctr">
               <a:noAutofit/>
             </a:bodyPr>
             <a:lstStyle>
@@ -18645,7 +18645,7 @@
             <a:noFill/>
           </p:spPr>
           <p:txBody>
-            <a:bodyPr wrap="none" lIns="0" tIns="0" rIns="0" bIns="0" anchor="ctr">
+            <a:bodyPr wrap="square" lIns="0" tIns="0" rIns="0" bIns="0" anchor="ctr">
               <a:noAutofit/>
             </a:bodyPr>
             <a:lstStyle>
@@ -18691,7 +18691,7 @@
             <a:noFill/>
           </p:spPr>
           <p:txBody>
-            <a:bodyPr wrap="none" lIns="0" tIns="0" rIns="0" bIns="0" anchor="ctr">
+            <a:bodyPr wrap="square" lIns="0" tIns="0" rIns="0" bIns="0" anchor="ctr">
               <a:noAutofit/>
             </a:bodyPr>
             <a:lstStyle>
@@ -18737,7 +18737,7 @@
             <a:noFill/>
           </p:spPr>
           <p:txBody>
-            <a:bodyPr wrap="none" lIns="0" tIns="0" rIns="0" bIns="0" anchor="ctr">
+            <a:bodyPr wrap="square" lIns="0" tIns="0" rIns="0" bIns="0" anchor="ctr">
               <a:noAutofit/>
             </a:bodyPr>
             <a:lstStyle>
@@ -18805,7 +18805,7 @@
             <a:noFill/>
           </p:spPr>
           <p:txBody>
-            <a:bodyPr wrap="none" lIns="0" tIns="0" rIns="0" bIns="0" anchor="ctr">
+            <a:bodyPr wrap="square" lIns="0" tIns="0" rIns="0" bIns="0" anchor="ctr">
               <a:noAutofit/>
             </a:bodyPr>
             <a:lstStyle>
@@ -18851,7 +18851,7 @@
             <a:noFill/>
           </p:spPr>
           <p:txBody>
-            <a:bodyPr wrap="none" lIns="0" tIns="0" rIns="0" bIns="0" anchor="ctr">
+            <a:bodyPr wrap="square" lIns="0" tIns="0" rIns="0" bIns="0" anchor="ctr">
               <a:noAutofit/>
             </a:bodyPr>
             <a:lstStyle>
@@ -18897,7 +18897,7 @@
             <a:noFill/>
           </p:spPr>
           <p:txBody>
-            <a:bodyPr wrap="none" lIns="0" tIns="0" rIns="0" bIns="0" anchor="ctr">
+            <a:bodyPr wrap="square" lIns="0" tIns="0" rIns="0" bIns="0" anchor="ctr">
               <a:noAutofit/>
             </a:bodyPr>
             <a:lstStyle>
@@ -18965,7 +18965,7 @@
             <a:noFill/>
           </p:spPr>
           <p:txBody>
-            <a:bodyPr wrap="none" lIns="0" tIns="0" rIns="0" bIns="0" anchor="ctr">
+            <a:bodyPr wrap="square" lIns="0" tIns="0" rIns="0" bIns="0" anchor="ctr">
               <a:noAutofit/>
             </a:bodyPr>
             <a:lstStyle>
@@ -19011,7 +19011,7 @@
             <a:noFill/>
           </p:spPr>
           <p:txBody>
-            <a:bodyPr wrap="none" lIns="0" tIns="0" rIns="0" bIns="0" anchor="ctr">
+            <a:bodyPr wrap="square" lIns="0" tIns="0" rIns="0" bIns="0" anchor="ctr">
               <a:noAutofit/>
             </a:bodyPr>
             <a:lstStyle>
@@ -19057,7 +19057,7 @@
             <a:noFill/>
           </p:spPr>
           <p:txBody>
-            <a:bodyPr wrap="none" lIns="0" tIns="0" rIns="0" bIns="0" anchor="ctr">
+            <a:bodyPr wrap="square" lIns="0" tIns="0" rIns="0" bIns="0" anchor="ctr">
               <a:noAutofit/>
             </a:bodyPr>
             <a:lstStyle>
@@ -19231,7 +19231,7 @@
             <a:noFill/>
           </p:spPr>
           <p:txBody>
-            <a:bodyPr wrap="none" lIns="0" tIns="0" rIns="0" bIns="0" anchor="ctr">
+            <a:bodyPr wrap="square" lIns="0" tIns="0" rIns="0" bIns="0" anchor="ctr">
               <a:noAutofit/>
             </a:bodyPr>
             <a:lstStyle>
@@ -19277,7 +19277,7 @@
             <a:noFill/>
           </p:spPr>
           <p:txBody>
-            <a:bodyPr wrap="none" lIns="0" tIns="0" rIns="0" bIns="0" anchor="ctr">
+            <a:bodyPr wrap="square" lIns="0" tIns="0" rIns="0" bIns="0" anchor="ctr">
               <a:noAutofit/>
             </a:bodyPr>
             <a:lstStyle>
@@ -19345,7 +19345,7 @@
             <a:noFill/>
           </p:spPr>
           <p:txBody>
-            <a:bodyPr wrap="none" lIns="0" tIns="0" rIns="0" bIns="0" anchor="ctr">
+            <a:bodyPr wrap="square" lIns="0" tIns="0" rIns="0" bIns="0" anchor="ctr">
               <a:noAutofit/>
             </a:bodyPr>
             <a:lstStyle>
@@ -19413,7 +19413,7 @@
             <a:noFill/>
           </p:spPr>
           <p:txBody>
-            <a:bodyPr wrap="none" lIns="0" tIns="0" rIns="0" bIns="0" anchor="ctr">
+            <a:bodyPr wrap="square" lIns="0" tIns="0" rIns="0" bIns="0" anchor="ctr">
               <a:noAutofit/>
             </a:bodyPr>
             <a:lstStyle>
@@ -19459,7 +19459,7 @@
             <a:noFill/>
           </p:spPr>
           <p:txBody>
-            <a:bodyPr wrap="none" lIns="0" tIns="0" rIns="0" bIns="0" anchor="ctr">
+            <a:bodyPr wrap="square" lIns="0" tIns="0" rIns="0" bIns="0" anchor="ctr">
               <a:noAutofit/>
             </a:bodyPr>
             <a:lstStyle>
@@ -19527,7 +19527,7 @@
             <a:noFill/>
           </p:spPr>
           <p:txBody>
-            <a:bodyPr wrap="none" lIns="0" tIns="0" rIns="0" bIns="0" anchor="ctr">
+            <a:bodyPr wrap="square" lIns="0" tIns="0" rIns="0" bIns="0" anchor="ctr">
               <a:noAutofit/>
             </a:bodyPr>
             <a:lstStyle>
@@ -19595,7 +19595,7 @@
             <a:noFill/>
           </p:spPr>
           <p:txBody>
-            <a:bodyPr wrap="none" lIns="0" tIns="0" rIns="0" bIns="0" anchor="ctr">
+            <a:bodyPr wrap="square" lIns="0" tIns="0" rIns="0" bIns="0" anchor="ctr">
               <a:noAutofit/>
             </a:bodyPr>
             <a:lstStyle>
@@ -19641,7 +19641,7 @@
             <a:noFill/>
           </p:spPr>
           <p:txBody>
-            <a:bodyPr wrap="none" lIns="0" tIns="0" rIns="0" bIns="0" anchor="ctr">
+            <a:bodyPr wrap="square" lIns="0" tIns="0" rIns="0" bIns="0" anchor="ctr">
               <a:noAutofit/>
             </a:bodyPr>
             <a:lstStyle>
@@ -19709,7 +19709,7 @@
             <a:noFill/>
           </p:spPr>
           <p:txBody>
-            <a:bodyPr wrap="none" lIns="0" tIns="0" rIns="0" bIns="0" anchor="ctr">
+            <a:bodyPr wrap="square" lIns="0" tIns="0" rIns="0" bIns="0" anchor="ctr">
               <a:noAutofit/>
             </a:bodyPr>
             <a:lstStyle>
@@ -19777,7 +19777,7 @@
             <a:noFill/>
           </p:spPr>
           <p:txBody>
-            <a:bodyPr wrap="none" lIns="0" tIns="0" rIns="0" bIns="0" anchor="ctr">
+            <a:bodyPr wrap="square" lIns="0" tIns="0" rIns="0" bIns="0" anchor="ctr">
               <a:noAutofit/>
             </a:bodyPr>
             <a:lstStyle>
@@ -19823,7 +19823,7 @@
             <a:noFill/>
           </p:spPr>
           <p:txBody>
-            <a:bodyPr wrap="none" lIns="0" tIns="0" rIns="0" bIns="0" anchor="ctr">
+            <a:bodyPr wrap="square" lIns="0" tIns="0" rIns="0" bIns="0" anchor="ctr">
               <a:noAutofit/>
             </a:bodyPr>
             <a:lstStyle>
@@ -19891,7 +19891,7 @@
             <a:noFill/>
           </p:spPr>
           <p:txBody>
-            <a:bodyPr wrap="none" lIns="0" tIns="0" rIns="0" bIns="0" anchor="ctr">
+            <a:bodyPr wrap="square" lIns="0" tIns="0" rIns="0" bIns="0" anchor="ctr">
               <a:noAutofit/>
             </a:bodyPr>
             <a:lstStyle>

--- a/bigtree/samples/bigtree_lab_tables.pptx
+++ b/bigtree/samples/bigtree_lab_tables.pptx
@@ -650,7 +650,7 @@
           <a:p>
             <a:r>
               <a:rPr lang="ja-JP"/>
-              <a:t>2026-09-20 ｜ Bigtree Lab ｜ だいき君</a:t>
+              <a:t>2026-09-18 ｜ Bigtree Lab ｜ だいき君</a:t>
             </a:r>
           </a:p>
         </p:txBody>
@@ -3536,7 +3536,7 @@
           <a:p>
             <a:r>
               <a:rPr lang="ja-JP"/>
-              <a:t>2026-09-20 ｜ Bigtree Lab ｜ だいき君</a:t>
+              <a:t>2026-09-18 ｜ Bigtree Lab ｜ だいき君</a:t>
             </a:r>
           </a:p>
         </p:txBody>

--- a/bigtree/samples/bigtree_lab_tables.pptx
+++ b/bigtree/samples/bigtree_lab_tables.pptx
@@ -243,129 +243,129 @@
             <a:cxnLst/>
             <a:rect l="0" t="0" r="r" b="b"/>
             <a:pathLst>
-              <a:path w="41660" h="54887">
+              <a:path w="347028" h="457200">
                 <a:moveTo>
-                  <a:pt x="1000" y="3887"/>
+                  <a:pt x="8330" y="32378"/>
                 </a:moveTo>
                 <a:lnTo>
-                  <a:pt x="1000" y="13887"/>
-                </a:lnTo>
-                <a:lnTo>
-                  <a:pt x="6000" y="16774"/>
-                </a:lnTo>
-                <a:lnTo>
-                  <a:pt x="6000" y="13887"/>
-                </a:lnTo>
-                <a:lnTo>
-                  <a:pt x="6000" y="8887"/>
-                </a:lnTo>
-                <a:lnTo>
-                  <a:pt x="23321" y="18887"/>
-                </a:lnTo>
-                <a:lnTo>
-                  <a:pt x="14660" y="23887"/>
-                </a:lnTo>
-                <a:lnTo>
-                  <a:pt x="15000" y="23887"/>
-                </a:lnTo>
-                <a:lnTo>
-                  <a:pt x="32320" y="33887"/>
-                </a:lnTo>
-                <a:lnTo>
-                  <a:pt x="23660" y="38887"/>
-                </a:lnTo>
-                <a:lnTo>
-                  <a:pt x="32000" y="38887"/>
-                </a:lnTo>
-                <a:lnTo>
-                  <a:pt x="40660" y="33887"/>
-                </a:lnTo>
-                <a:lnTo>
-                  <a:pt x="23340" y="23887"/>
-                </a:lnTo>
-                <a:lnTo>
-                  <a:pt x="32000" y="18887"/>
-                </a:lnTo>
-                <a:lnTo>
-                  <a:pt x="31981" y="18887"/>
-                </a:lnTo>
-                <a:lnTo>
-                  <a:pt x="14660" y="8887"/>
-                </a:lnTo>
-                <a:lnTo>
-                  <a:pt x="6000" y="3887"/>
-                </a:lnTo>
-                <a:lnTo>
-                  <a:pt x="1000" y="1000"/>
+                  <a:pt x="8330" y="115676"/>
+                </a:lnTo>
+                <a:lnTo>
+                  <a:pt x="49980" y="139724"/>
+                </a:lnTo>
+                <a:lnTo>
+                  <a:pt x="49980" y="115676"/>
+                </a:lnTo>
+                <a:lnTo>
+                  <a:pt x="49980" y="74027"/>
+                </a:lnTo>
+                <a:lnTo>
+                  <a:pt x="194264" y="157325"/>
+                </a:lnTo>
+                <a:lnTo>
+                  <a:pt x="122117" y="198974"/>
+                </a:lnTo>
+                <a:lnTo>
+                  <a:pt x="124950" y="198974"/>
+                </a:lnTo>
+                <a:lnTo>
+                  <a:pt x="269234" y="282273"/>
+                </a:lnTo>
+                <a:lnTo>
+                  <a:pt x="197087" y="323922"/>
+                </a:lnTo>
+                <a:lnTo>
+                  <a:pt x="266560" y="323922"/>
+                </a:lnTo>
+                <a:lnTo>
+                  <a:pt x="338697" y="282273"/>
+                </a:lnTo>
+                <a:lnTo>
+                  <a:pt x="194422" y="198974"/>
+                </a:lnTo>
+                <a:lnTo>
+                  <a:pt x="266560" y="157325"/>
+                </a:lnTo>
+                <a:lnTo>
+                  <a:pt x="266401" y="157325"/>
+                </a:lnTo>
+                <a:lnTo>
+                  <a:pt x="122117" y="74027"/>
+                </a:lnTo>
+                <a:lnTo>
+                  <a:pt x="49980" y="32378"/>
+                </a:lnTo>
+                <a:lnTo>
+                  <a:pt x="8330" y="8329"/>
                 </a:lnTo>
                 <a:close/>
               </a:path>
-              <a:path w="41660" h="54887">
+              <a:path w="347028" h="457200">
                 <a:moveTo>
-                  <a:pt x="11000" y="38887"/>
+                  <a:pt x="91630" y="323922"/>
                 </a:moveTo>
                 <a:lnTo>
-                  <a:pt x="16000" y="38887"/>
-                </a:lnTo>
-                <a:lnTo>
-                  <a:pt x="17340" y="38887"/>
-                </a:lnTo>
-                <a:lnTo>
-                  <a:pt x="26000" y="33887"/>
-                </a:lnTo>
-                <a:lnTo>
-                  <a:pt x="16000" y="33887"/>
-                </a:lnTo>
-                <a:lnTo>
-                  <a:pt x="16000" y="28887"/>
-                </a:lnTo>
-                <a:lnTo>
-                  <a:pt x="11000" y="26000"/>
+                  <a:pt x="133280" y="323922"/>
+                </a:lnTo>
+                <a:lnTo>
+                  <a:pt x="144442" y="323922"/>
+                </a:lnTo>
+                <a:lnTo>
+                  <a:pt x="216580" y="282273"/>
+                </a:lnTo>
+                <a:lnTo>
+                  <a:pt x="133280" y="282273"/>
+                </a:lnTo>
+                <a:lnTo>
+                  <a:pt x="133280" y="240624"/>
+                </a:lnTo>
+                <a:lnTo>
+                  <a:pt x="91630" y="216575"/>
                 </a:lnTo>
                 <a:close/>
               </a:path>
-              <a:path w="41660" h="54887">
+              <a:path w="347028" h="457200">
                 <a:moveTo>
-                  <a:pt x="6000" y="21774"/>
+                  <a:pt x="49980" y="181373"/>
                 </a:moveTo>
                 <a:lnTo>
-                  <a:pt x="1000" y="18887"/>
-                </a:lnTo>
-                <a:lnTo>
-                  <a:pt x="1000" y="43887"/>
-                </a:lnTo>
-                <a:lnTo>
-                  <a:pt x="1000" y="48887"/>
-                </a:lnTo>
-                <a:lnTo>
-                  <a:pt x="1000" y="53887"/>
-                </a:lnTo>
-                <a:lnTo>
-                  <a:pt x="18113" y="53887"/>
-                </a:lnTo>
-                <a:lnTo>
-                  <a:pt x="21000" y="48887"/>
-                </a:lnTo>
-                <a:lnTo>
-                  <a:pt x="6000" y="48887"/>
-                </a:lnTo>
-                <a:lnTo>
-                  <a:pt x="6000" y="43887"/>
+                  <a:pt x="8330" y="157325"/>
+                </a:lnTo>
+                <a:lnTo>
+                  <a:pt x="8330" y="365571"/>
+                </a:lnTo>
+                <a:lnTo>
+                  <a:pt x="8330" y="407220"/>
+                </a:lnTo>
+                <a:lnTo>
+                  <a:pt x="8330" y="448870"/>
+                </a:lnTo>
+                <a:lnTo>
+                  <a:pt x="150881" y="448870"/>
+                </a:lnTo>
+                <a:lnTo>
+                  <a:pt x="174930" y="407220"/>
+                </a:lnTo>
+                <a:lnTo>
+                  <a:pt x="49980" y="407220"/>
+                </a:lnTo>
+                <a:lnTo>
+                  <a:pt x="49980" y="365571"/>
                 </a:lnTo>
                 <a:close/>
               </a:path>
-              <a:path w="41660" h="54887">
+              <a:path w="347028" h="457200">
                 <a:moveTo>
-                  <a:pt x="23113" y="53887"/>
+                  <a:pt x="192531" y="448870"/>
                 </a:moveTo>
                 <a:lnTo>
-                  <a:pt x="26000" y="48887"/>
-                </a:lnTo>
-                <a:lnTo>
-                  <a:pt x="23000" y="48887"/>
-                </a:lnTo>
-                <a:lnTo>
-                  <a:pt x="20113" y="53887"/>
+                  <a:pt x="216580" y="407220"/>
+                </a:lnTo>
+                <a:lnTo>
+                  <a:pt x="191590" y="407220"/>
+                </a:lnTo>
+                <a:lnTo>
+                  <a:pt x="167541" y="448870"/>
                 </a:lnTo>
                 <a:close/>
               </a:path>
@@ -768,129 +768,129 @@
             <a:cxnLst/>
             <a:rect l="0" t="0" r="r" b="b"/>
             <a:pathLst>
-              <a:path w="41660" h="54887">
+              <a:path w="3123184" h="4114800">
                 <a:moveTo>
-                  <a:pt x="1000" y="3887"/>
+                  <a:pt x="74968" y="291402"/>
                 </a:moveTo>
                 <a:lnTo>
-                  <a:pt x="1000" y="13887"/>
-                </a:lnTo>
-                <a:lnTo>
-                  <a:pt x="6000" y="16774"/>
-                </a:lnTo>
-                <a:lnTo>
-                  <a:pt x="6000" y="13887"/>
-                </a:lnTo>
-                <a:lnTo>
-                  <a:pt x="6000" y="8887"/>
-                </a:lnTo>
-                <a:lnTo>
-                  <a:pt x="23321" y="18887"/>
-                </a:lnTo>
-                <a:lnTo>
-                  <a:pt x="14660" y="23887"/>
-                </a:lnTo>
-                <a:lnTo>
-                  <a:pt x="15000" y="23887"/>
-                </a:lnTo>
-                <a:lnTo>
-                  <a:pt x="32320" y="33887"/>
-                </a:lnTo>
-                <a:lnTo>
-                  <a:pt x="23660" y="38887"/>
-                </a:lnTo>
-                <a:lnTo>
-                  <a:pt x="32000" y="38887"/>
-                </a:lnTo>
-                <a:lnTo>
-                  <a:pt x="40660" y="33887"/>
-                </a:lnTo>
-                <a:lnTo>
-                  <a:pt x="23340" y="23887"/>
-                </a:lnTo>
-                <a:lnTo>
-                  <a:pt x="32000" y="18887"/>
-                </a:lnTo>
-                <a:lnTo>
-                  <a:pt x="31981" y="18887"/>
-                </a:lnTo>
-                <a:lnTo>
-                  <a:pt x="14660" y="8887"/>
-                </a:lnTo>
-                <a:lnTo>
-                  <a:pt x="6000" y="3887"/>
-                </a:lnTo>
-                <a:lnTo>
-                  <a:pt x="1000" y="1000"/>
+                  <a:pt x="74968" y="1041088"/>
+                </a:lnTo>
+                <a:lnTo>
+                  <a:pt x="449810" y="1257522"/>
+                </a:lnTo>
+                <a:lnTo>
+                  <a:pt x="449810" y="1041088"/>
+                </a:lnTo>
+                <a:lnTo>
+                  <a:pt x="449810" y="666245"/>
+                </a:lnTo>
+                <a:lnTo>
+                  <a:pt x="1748338" y="1415931"/>
+                </a:lnTo>
+                <a:lnTo>
+                  <a:pt x="1099036" y="1790774"/>
+                </a:lnTo>
+                <a:lnTo>
+                  <a:pt x="1124526" y="1790774"/>
+                </a:lnTo>
+                <a:lnTo>
+                  <a:pt x="2423054" y="2540459"/>
+                </a:lnTo>
+                <a:lnTo>
+                  <a:pt x="1773752" y="2915302"/>
+                </a:lnTo>
+                <a:lnTo>
+                  <a:pt x="2398989" y="2915302"/>
+                </a:lnTo>
+                <a:lnTo>
+                  <a:pt x="3048215" y="2540459"/>
+                </a:lnTo>
+                <a:lnTo>
+                  <a:pt x="1749762" y="1790774"/>
+                </a:lnTo>
+                <a:lnTo>
+                  <a:pt x="2398989" y="1415931"/>
+                </a:lnTo>
+                <a:lnTo>
+                  <a:pt x="2397564" y="1415931"/>
+                </a:lnTo>
+                <a:lnTo>
+                  <a:pt x="1099036" y="666245"/>
+                </a:lnTo>
+                <a:lnTo>
+                  <a:pt x="449810" y="291402"/>
+                </a:lnTo>
+                <a:lnTo>
+                  <a:pt x="74968" y="74968"/>
                 </a:lnTo>
                 <a:close/>
               </a:path>
-              <a:path w="41660" h="54887">
+              <a:path w="3123184" h="4114800">
                 <a:moveTo>
-                  <a:pt x="11000" y="38887"/>
+                  <a:pt x="824652" y="2915302"/>
                 </a:moveTo>
                 <a:lnTo>
-                  <a:pt x="16000" y="38887"/>
-                </a:lnTo>
-                <a:lnTo>
-                  <a:pt x="17340" y="38887"/>
-                </a:lnTo>
-                <a:lnTo>
-                  <a:pt x="26000" y="33887"/>
-                </a:lnTo>
-                <a:lnTo>
-                  <a:pt x="16000" y="33887"/>
-                </a:lnTo>
-                <a:lnTo>
-                  <a:pt x="16000" y="28887"/>
-                </a:lnTo>
-                <a:lnTo>
-                  <a:pt x="11000" y="26000"/>
+                  <a:pt x="1199494" y="2915302"/>
+                </a:lnTo>
+                <a:lnTo>
+                  <a:pt x="1299952" y="2915302"/>
+                </a:lnTo>
+                <a:lnTo>
+                  <a:pt x="1949178" y="2540459"/>
+                </a:lnTo>
+                <a:lnTo>
+                  <a:pt x="1199494" y="2540459"/>
+                </a:lnTo>
+                <a:lnTo>
+                  <a:pt x="1199494" y="2165617"/>
+                </a:lnTo>
+                <a:lnTo>
+                  <a:pt x="824652" y="1949182"/>
                 </a:lnTo>
                 <a:close/>
               </a:path>
-              <a:path w="41660" h="54887">
+              <a:path w="3123184" h="4114800">
                 <a:moveTo>
-                  <a:pt x="6000" y="21774"/>
+                  <a:pt x="449810" y="1632365"/>
                 </a:moveTo>
                 <a:lnTo>
-                  <a:pt x="1000" y="18887"/>
-                </a:lnTo>
-                <a:lnTo>
-                  <a:pt x="1000" y="43887"/>
-                </a:lnTo>
-                <a:lnTo>
-                  <a:pt x="1000" y="48887"/>
-                </a:lnTo>
-                <a:lnTo>
-                  <a:pt x="1000" y="53887"/>
-                </a:lnTo>
-                <a:lnTo>
-                  <a:pt x="18113" y="53887"/>
-                </a:lnTo>
-                <a:lnTo>
-                  <a:pt x="21000" y="48887"/>
-                </a:lnTo>
-                <a:lnTo>
-                  <a:pt x="6000" y="48887"/>
-                </a:lnTo>
-                <a:lnTo>
-                  <a:pt x="6000" y="43887"/>
+                  <a:pt x="74968" y="1415931"/>
+                </a:lnTo>
+                <a:lnTo>
+                  <a:pt x="74968" y="3290145"/>
+                </a:lnTo>
+                <a:lnTo>
+                  <a:pt x="74968" y="3664988"/>
+                </a:lnTo>
+                <a:lnTo>
+                  <a:pt x="74968" y="4039831"/>
+                </a:lnTo>
+                <a:lnTo>
+                  <a:pt x="1357902" y="4039831"/>
+                </a:lnTo>
+                <a:lnTo>
+                  <a:pt x="1574336" y="3664988"/>
+                </a:lnTo>
+                <a:lnTo>
+                  <a:pt x="449810" y="3664988"/>
+                </a:lnTo>
+                <a:lnTo>
+                  <a:pt x="449810" y="3290145"/>
                 </a:lnTo>
                 <a:close/>
               </a:path>
-              <a:path w="41660" h="54887">
+              <a:path w="3123184" h="4114800">
                 <a:moveTo>
-                  <a:pt x="23113" y="53887"/>
+                  <a:pt x="1732744" y="4039831"/>
                 </a:moveTo>
                 <a:lnTo>
-                  <a:pt x="26000" y="48887"/>
-                </a:lnTo>
-                <a:lnTo>
-                  <a:pt x="23000" y="48887"/>
-                </a:lnTo>
-                <a:lnTo>
-                  <a:pt x="20113" y="53887"/>
+                  <a:pt x="1949178" y="3664988"/>
+                </a:lnTo>
+                <a:lnTo>
+                  <a:pt x="1724273" y="3664988"/>
+                </a:lnTo>
+                <a:lnTo>
+                  <a:pt x="1507839" y="4039831"/>
                 </a:lnTo>
                 <a:close/>
               </a:path>
@@ -1191,129 +1191,129 @@
             <a:cxnLst/>
             <a:rect l="0" t="0" r="r" b="b"/>
             <a:pathLst>
-              <a:path w="41660" h="54887">
+              <a:path w="3123184" h="4114800">
                 <a:moveTo>
-                  <a:pt x="1000" y="3887"/>
+                  <a:pt x="74968" y="291402"/>
                 </a:moveTo>
                 <a:lnTo>
-                  <a:pt x="1000" y="13887"/>
-                </a:lnTo>
-                <a:lnTo>
-                  <a:pt x="6000" y="16774"/>
-                </a:lnTo>
-                <a:lnTo>
-                  <a:pt x="6000" y="13887"/>
-                </a:lnTo>
-                <a:lnTo>
-                  <a:pt x="6000" y="8887"/>
-                </a:lnTo>
-                <a:lnTo>
-                  <a:pt x="23321" y="18887"/>
-                </a:lnTo>
-                <a:lnTo>
-                  <a:pt x="14660" y="23887"/>
-                </a:lnTo>
-                <a:lnTo>
-                  <a:pt x="15000" y="23887"/>
-                </a:lnTo>
-                <a:lnTo>
-                  <a:pt x="32320" y="33887"/>
-                </a:lnTo>
-                <a:lnTo>
-                  <a:pt x="23660" y="38887"/>
-                </a:lnTo>
-                <a:lnTo>
-                  <a:pt x="32000" y="38887"/>
-                </a:lnTo>
-                <a:lnTo>
-                  <a:pt x="40660" y="33887"/>
-                </a:lnTo>
-                <a:lnTo>
-                  <a:pt x="23340" y="23887"/>
-                </a:lnTo>
-                <a:lnTo>
-                  <a:pt x="32000" y="18887"/>
-                </a:lnTo>
-                <a:lnTo>
-                  <a:pt x="31981" y="18887"/>
-                </a:lnTo>
-                <a:lnTo>
-                  <a:pt x="14660" y="8887"/>
-                </a:lnTo>
-                <a:lnTo>
-                  <a:pt x="6000" y="3887"/>
-                </a:lnTo>
-                <a:lnTo>
-                  <a:pt x="1000" y="1000"/>
+                  <a:pt x="74968" y="1041088"/>
+                </a:lnTo>
+                <a:lnTo>
+                  <a:pt x="449810" y="1257522"/>
+                </a:lnTo>
+                <a:lnTo>
+                  <a:pt x="449810" y="1041088"/>
+                </a:lnTo>
+                <a:lnTo>
+                  <a:pt x="449810" y="666245"/>
+                </a:lnTo>
+                <a:lnTo>
+                  <a:pt x="1748338" y="1415931"/>
+                </a:lnTo>
+                <a:lnTo>
+                  <a:pt x="1099036" y="1790774"/>
+                </a:lnTo>
+                <a:lnTo>
+                  <a:pt x="1124526" y="1790774"/>
+                </a:lnTo>
+                <a:lnTo>
+                  <a:pt x="2423054" y="2540459"/>
+                </a:lnTo>
+                <a:lnTo>
+                  <a:pt x="1773752" y="2915302"/>
+                </a:lnTo>
+                <a:lnTo>
+                  <a:pt x="2398989" y="2915302"/>
+                </a:lnTo>
+                <a:lnTo>
+                  <a:pt x="3048215" y="2540459"/>
+                </a:lnTo>
+                <a:lnTo>
+                  <a:pt x="1749762" y="1790774"/>
+                </a:lnTo>
+                <a:lnTo>
+                  <a:pt x="2398989" y="1415931"/>
+                </a:lnTo>
+                <a:lnTo>
+                  <a:pt x="2397564" y="1415931"/>
+                </a:lnTo>
+                <a:lnTo>
+                  <a:pt x="1099036" y="666245"/>
+                </a:lnTo>
+                <a:lnTo>
+                  <a:pt x="449810" y="291402"/>
+                </a:lnTo>
+                <a:lnTo>
+                  <a:pt x="74968" y="74968"/>
                 </a:lnTo>
                 <a:close/>
               </a:path>
-              <a:path w="41660" h="54887">
+              <a:path w="3123184" h="4114800">
                 <a:moveTo>
-                  <a:pt x="11000" y="38887"/>
+                  <a:pt x="824652" y="2915302"/>
                 </a:moveTo>
                 <a:lnTo>
-                  <a:pt x="16000" y="38887"/>
-                </a:lnTo>
-                <a:lnTo>
-                  <a:pt x="17340" y="38887"/>
-                </a:lnTo>
-                <a:lnTo>
-                  <a:pt x="26000" y="33887"/>
-                </a:lnTo>
-                <a:lnTo>
-                  <a:pt x="16000" y="33887"/>
-                </a:lnTo>
-                <a:lnTo>
-                  <a:pt x="16000" y="28887"/>
-                </a:lnTo>
-                <a:lnTo>
-                  <a:pt x="11000" y="26000"/>
+                  <a:pt x="1199494" y="2915302"/>
+                </a:lnTo>
+                <a:lnTo>
+                  <a:pt x="1299952" y="2915302"/>
+                </a:lnTo>
+                <a:lnTo>
+                  <a:pt x="1949178" y="2540459"/>
+                </a:lnTo>
+                <a:lnTo>
+                  <a:pt x="1199494" y="2540459"/>
+                </a:lnTo>
+                <a:lnTo>
+                  <a:pt x="1199494" y="2165617"/>
+                </a:lnTo>
+                <a:lnTo>
+                  <a:pt x="824652" y="1949182"/>
                 </a:lnTo>
                 <a:close/>
               </a:path>
-              <a:path w="41660" h="54887">
+              <a:path w="3123184" h="4114800">
                 <a:moveTo>
-                  <a:pt x="6000" y="21774"/>
+                  <a:pt x="449810" y="1632365"/>
                 </a:moveTo>
                 <a:lnTo>
-                  <a:pt x="1000" y="18887"/>
-                </a:lnTo>
-                <a:lnTo>
-                  <a:pt x="1000" y="43887"/>
-                </a:lnTo>
-                <a:lnTo>
-                  <a:pt x="1000" y="48887"/>
-                </a:lnTo>
-                <a:lnTo>
-                  <a:pt x="1000" y="53887"/>
-                </a:lnTo>
-                <a:lnTo>
-                  <a:pt x="18113" y="53887"/>
-                </a:lnTo>
-                <a:lnTo>
-                  <a:pt x="21000" y="48887"/>
-                </a:lnTo>
-                <a:lnTo>
-                  <a:pt x="6000" y="48887"/>
-                </a:lnTo>
-                <a:lnTo>
-                  <a:pt x="6000" y="43887"/>
+                  <a:pt x="74968" y="1415931"/>
+                </a:lnTo>
+                <a:lnTo>
+                  <a:pt x="74968" y="3290145"/>
+                </a:lnTo>
+                <a:lnTo>
+                  <a:pt x="74968" y="3664988"/>
+                </a:lnTo>
+                <a:lnTo>
+                  <a:pt x="74968" y="4039831"/>
+                </a:lnTo>
+                <a:lnTo>
+                  <a:pt x="1357902" y="4039831"/>
+                </a:lnTo>
+                <a:lnTo>
+                  <a:pt x="1574336" y="3664988"/>
+                </a:lnTo>
+                <a:lnTo>
+                  <a:pt x="449810" y="3664988"/>
+                </a:lnTo>
+                <a:lnTo>
+                  <a:pt x="449810" y="3290145"/>
                 </a:lnTo>
                 <a:close/>
               </a:path>
-              <a:path w="41660" h="54887">
+              <a:path w="3123184" h="4114800">
                 <a:moveTo>
-                  <a:pt x="23113" y="53887"/>
+                  <a:pt x="1732744" y="4039831"/>
                 </a:moveTo>
                 <a:lnTo>
-                  <a:pt x="26000" y="48887"/>
-                </a:lnTo>
-                <a:lnTo>
-                  <a:pt x="23000" y="48887"/>
-                </a:lnTo>
-                <a:lnTo>
-                  <a:pt x="20113" y="53887"/>
+                  <a:pt x="1949178" y="3664988"/>
+                </a:lnTo>
+                <a:lnTo>
+                  <a:pt x="1724273" y="3664988"/>
+                </a:lnTo>
+                <a:lnTo>
+                  <a:pt x="1507839" y="4039831"/>
                 </a:lnTo>
                 <a:close/>
               </a:path>
@@ -1614,129 +1614,129 @@
             <a:cxnLst/>
             <a:rect l="0" t="0" r="r" b="b"/>
             <a:pathLst>
-              <a:path w="41660" h="54887">
+              <a:path w="3123184" h="4114800">
                 <a:moveTo>
-                  <a:pt x="1000" y="3887"/>
+                  <a:pt x="74968" y="291402"/>
                 </a:moveTo>
                 <a:lnTo>
-                  <a:pt x="1000" y="13887"/>
-                </a:lnTo>
-                <a:lnTo>
-                  <a:pt x="6000" y="16774"/>
-                </a:lnTo>
-                <a:lnTo>
-                  <a:pt x="6000" y="13887"/>
-                </a:lnTo>
-                <a:lnTo>
-                  <a:pt x="6000" y="8887"/>
-                </a:lnTo>
-                <a:lnTo>
-                  <a:pt x="23321" y="18887"/>
-                </a:lnTo>
-                <a:lnTo>
-                  <a:pt x="14660" y="23887"/>
-                </a:lnTo>
-                <a:lnTo>
-                  <a:pt x="15000" y="23887"/>
-                </a:lnTo>
-                <a:lnTo>
-                  <a:pt x="32320" y="33887"/>
-                </a:lnTo>
-                <a:lnTo>
-                  <a:pt x="23660" y="38887"/>
-                </a:lnTo>
-                <a:lnTo>
-                  <a:pt x="32000" y="38887"/>
-                </a:lnTo>
-                <a:lnTo>
-                  <a:pt x="40660" y="33887"/>
-                </a:lnTo>
-                <a:lnTo>
-                  <a:pt x="23340" y="23887"/>
-                </a:lnTo>
-                <a:lnTo>
-                  <a:pt x="32000" y="18887"/>
-                </a:lnTo>
-                <a:lnTo>
-                  <a:pt x="31981" y="18887"/>
-                </a:lnTo>
-                <a:lnTo>
-                  <a:pt x="14660" y="8887"/>
-                </a:lnTo>
-                <a:lnTo>
-                  <a:pt x="6000" y="3887"/>
-                </a:lnTo>
-                <a:lnTo>
-                  <a:pt x="1000" y="1000"/>
+                  <a:pt x="74968" y="1041088"/>
+                </a:lnTo>
+                <a:lnTo>
+                  <a:pt x="449810" y="1257522"/>
+                </a:lnTo>
+                <a:lnTo>
+                  <a:pt x="449810" y="1041088"/>
+                </a:lnTo>
+                <a:lnTo>
+                  <a:pt x="449810" y="666245"/>
+                </a:lnTo>
+                <a:lnTo>
+                  <a:pt x="1748338" y="1415931"/>
+                </a:lnTo>
+                <a:lnTo>
+                  <a:pt x="1099036" y="1790774"/>
+                </a:lnTo>
+                <a:lnTo>
+                  <a:pt x="1124526" y="1790774"/>
+                </a:lnTo>
+                <a:lnTo>
+                  <a:pt x="2423054" y="2540459"/>
+                </a:lnTo>
+                <a:lnTo>
+                  <a:pt x="1773752" y="2915302"/>
+                </a:lnTo>
+                <a:lnTo>
+                  <a:pt x="2398989" y="2915302"/>
+                </a:lnTo>
+                <a:lnTo>
+                  <a:pt x="3048215" y="2540459"/>
+                </a:lnTo>
+                <a:lnTo>
+                  <a:pt x="1749762" y="1790774"/>
+                </a:lnTo>
+                <a:lnTo>
+                  <a:pt x="2398989" y="1415931"/>
+                </a:lnTo>
+                <a:lnTo>
+                  <a:pt x="2397564" y="1415931"/>
+                </a:lnTo>
+                <a:lnTo>
+                  <a:pt x="1099036" y="666245"/>
+                </a:lnTo>
+                <a:lnTo>
+                  <a:pt x="449810" y="291402"/>
+                </a:lnTo>
+                <a:lnTo>
+                  <a:pt x="74968" y="74968"/>
                 </a:lnTo>
                 <a:close/>
               </a:path>
-              <a:path w="41660" h="54887">
+              <a:path w="3123184" h="4114800">
                 <a:moveTo>
-                  <a:pt x="11000" y="38887"/>
+                  <a:pt x="824652" y="2915302"/>
                 </a:moveTo>
                 <a:lnTo>
-                  <a:pt x="16000" y="38887"/>
-                </a:lnTo>
-                <a:lnTo>
-                  <a:pt x="17340" y="38887"/>
-                </a:lnTo>
-                <a:lnTo>
-                  <a:pt x="26000" y="33887"/>
-                </a:lnTo>
-                <a:lnTo>
-                  <a:pt x="16000" y="33887"/>
-                </a:lnTo>
-                <a:lnTo>
-                  <a:pt x="16000" y="28887"/>
-                </a:lnTo>
-                <a:lnTo>
-                  <a:pt x="11000" y="26000"/>
+                  <a:pt x="1199494" y="2915302"/>
+                </a:lnTo>
+                <a:lnTo>
+                  <a:pt x="1299952" y="2915302"/>
+                </a:lnTo>
+                <a:lnTo>
+                  <a:pt x="1949178" y="2540459"/>
+                </a:lnTo>
+                <a:lnTo>
+                  <a:pt x="1199494" y="2540459"/>
+                </a:lnTo>
+                <a:lnTo>
+                  <a:pt x="1199494" y="2165617"/>
+                </a:lnTo>
+                <a:lnTo>
+                  <a:pt x="824652" y="1949182"/>
                 </a:lnTo>
                 <a:close/>
               </a:path>
-              <a:path w="41660" h="54887">
+              <a:path w="3123184" h="4114800">
                 <a:moveTo>
-                  <a:pt x="6000" y="21774"/>
+                  <a:pt x="449810" y="1632365"/>
                 </a:moveTo>
                 <a:lnTo>
-                  <a:pt x="1000" y="18887"/>
-                </a:lnTo>
-                <a:lnTo>
-                  <a:pt x="1000" y="43887"/>
-                </a:lnTo>
-                <a:lnTo>
-                  <a:pt x="1000" y="48887"/>
-                </a:lnTo>
-                <a:lnTo>
-                  <a:pt x="1000" y="53887"/>
-                </a:lnTo>
-                <a:lnTo>
-                  <a:pt x="18113" y="53887"/>
-                </a:lnTo>
-                <a:lnTo>
-                  <a:pt x="21000" y="48887"/>
-                </a:lnTo>
-                <a:lnTo>
-                  <a:pt x="6000" y="48887"/>
-                </a:lnTo>
-                <a:lnTo>
-                  <a:pt x="6000" y="43887"/>
+                  <a:pt x="74968" y="1415931"/>
+                </a:lnTo>
+                <a:lnTo>
+                  <a:pt x="74968" y="3290145"/>
+                </a:lnTo>
+                <a:lnTo>
+                  <a:pt x="74968" y="3664988"/>
+                </a:lnTo>
+                <a:lnTo>
+                  <a:pt x="74968" y="4039831"/>
+                </a:lnTo>
+                <a:lnTo>
+                  <a:pt x="1357902" y="4039831"/>
+                </a:lnTo>
+                <a:lnTo>
+                  <a:pt x="1574336" y="3664988"/>
+                </a:lnTo>
+                <a:lnTo>
+                  <a:pt x="449810" y="3664988"/>
+                </a:lnTo>
+                <a:lnTo>
+                  <a:pt x="449810" y="3290145"/>
                 </a:lnTo>
                 <a:close/>
               </a:path>
-              <a:path w="41660" h="54887">
+              <a:path w="3123184" h="4114800">
                 <a:moveTo>
-                  <a:pt x="23113" y="53887"/>
+                  <a:pt x="1732744" y="4039831"/>
                 </a:moveTo>
                 <a:lnTo>
-                  <a:pt x="26000" y="48887"/>
-                </a:lnTo>
-                <a:lnTo>
-                  <a:pt x="23000" y="48887"/>
-                </a:lnTo>
-                <a:lnTo>
-                  <a:pt x="20113" y="53887"/>
+                  <a:pt x="1949178" y="3664988"/>
+                </a:lnTo>
+                <a:lnTo>
+                  <a:pt x="1724273" y="3664988"/>
+                </a:lnTo>
+                <a:lnTo>
+                  <a:pt x="1507839" y="4039831"/>
                 </a:lnTo>
                 <a:close/>
               </a:path>
@@ -1957,129 +1957,129 @@
             <a:cxnLst/>
             <a:rect l="0" t="0" r="r" b="b"/>
             <a:pathLst>
-              <a:path w="41660" h="54887">
+              <a:path w="3123184" h="4114800">
                 <a:moveTo>
-                  <a:pt x="1000" y="3887"/>
+                  <a:pt x="74968" y="291402"/>
                 </a:moveTo>
                 <a:lnTo>
-                  <a:pt x="1000" y="13887"/>
-                </a:lnTo>
-                <a:lnTo>
-                  <a:pt x="6000" y="16774"/>
-                </a:lnTo>
-                <a:lnTo>
-                  <a:pt x="6000" y="13887"/>
-                </a:lnTo>
-                <a:lnTo>
-                  <a:pt x="6000" y="8887"/>
-                </a:lnTo>
-                <a:lnTo>
-                  <a:pt x="23321" y="18887"/>
-                </a:lnTo>
-                <a:lnTo>
-                  <a:pt x="14660" y="23887"/>
-                </a:lnTo>
-                <a:lnTo>
-                  <a:pt x="15000" y="23887"/>
-                </a:lnTo>
-                <a:lnTo>
-                  <a:pt x="32320" y="33887"/>
-                </a:lnTo>
-                <a:lnTo>
-                  <a:pt x="23660" y="38887"/>
-                </a:lnTo>
-                <a:lnTo>
-                  <a:pt x="32000" y="38887"/>
-                </a:lnTo>
-                <a:lnTo>
-                  <a:pt x="40660" y="33887"/>
-                </a:lnTo>
-                <a:lnTo>
-                  <a:pt x="23340" y="23887"/>
-                </a:lnTo>
-                <a:lnTo>
-                  <a:pt x="32000" y="18887"/>
-                </a:lnTo>
-                <a:lnTo>
-                  <a:pt x="31981" y="18887"/>
-                </a:lnTo>
-                <a:lnTo>
-                  <a:pt x="14660" y="8887"/>
-                </a:lnTo>
-                <a:lnTo>
-                  <a:pt x="6000" y="3887"/>
-                </a:lnTo>
-                <a:lnTo>
-                  <a:pt x="1000" y="1000"/>
+                  <a:pt x="74968" y="1041088"/>
+                </a:lnTo>
+                <a:lnTo>
+                  <a:pt x="449810" y="1257522"/>
+                </a:lnTo>
+                <a:lnTo>
+                  <a:pt x="449810" y="1041088"/>
+                </a:lnTo>
+                <a:lnTo>
+                  <a:pt x="449810" y="666245"/>
+                </a:lnTo>
+                <a:lnTo>
+                  <a:pt x="1748338" y="1415931"/>
+                </a:lnTo>
+                <a:lnTo>
+                  <a:pt x="1099036" y="1790774"/>
+                </a:lnTo>
+                <a:lnTo>
+                  <a:pt x="1124526" y="1790774"/>
+                </a:lnTo>
+                <a:lnTo>
+                  <a:pt x="2423054" y="2540459"/>
+                </a:lnTo>
+                <a:lnTo>
+                  <a:pt x="1773752" y="2915302"/>
+                </a:lnTo>
+                <a:lnTo>
+                  <a:pt x="2398989" y="2915302"/>
+                </a:lnTo>
+                <a:lnTo>
+                  <a:pt x="3048215" y="2540459"/>
+                </a:lnTo>
+                <a:lnTo>
+                  <a:pt x="1749762" y="1790774"/>
+                </a:lnTo>
+                <a:lnTo>
+                  <a:pt x="2398989" y="1415931"/>
+                </a:lnTo>
+                <a:lnTo>
+                  <a:pt x="2397564" y="1415931"/>
+                </a:lnTo>
+                <a:lnTo>
+                  <a:pt x="1099036" y="666245"/>
+                </a:lnTo>
+                <a:lnTo>
+                  <a:pt x="449810" y="291402"/>
+                </a:lnTo>
+                <a:lnTo>
+                  <a:pt x="74968" y="74968"/>
                 </a:lnTo>
                 <a:close/>
               </a:path>
-              <a:path w="41660" h="54887">
+              <a:path w="3123184" h="4114800">
                 <a:moveTo>
-                  <a:pt x="11000" y="38887"/>
+                  <a:pt x="824652" y="2915302"/>
                 </a:moveTo>
                 <a:lnTo>
-                  <a:pt x="16000" y="38887"/>
-                </a:lnTo>
-                <a:lnTo>
-                  <a:pt x="17340" y="38887"/>
-                </a:lnTo>
-                <a:lnTo>
-                  <a:pt x="26000" y="33887"/>
-                </a:lnTo>
-                <a:lnTo>
-                  <a:pt x="16000" y="33887"/>
-                </a:lnTo>
-                <a:lnTo>
-                  <a:pt x="16000" y="28887"/>
-                </a:lnTo>
-                <a:lnTo>
-                  <a:pt x="11000" y="26000"/>
+                  <a:pt x="1199494" y="2915302"/>
+                </a:lnTo>
+                <a:lnTo>
+                  <a:pt x="1299952" y="2915302"/>
+                </a:lnTo>
+                <a:lnTo>
+                  <a:pt x="1949178" y="2540459"/>
+                </a:lnTo>
+                <a:lnTo>
+                  <a:pt x="1199494" y="2540459"/>
+                </a:lnTo>
+                <a:lnTo>
+                  <a:pt x="1199494" y="2165617"/>
+                </a:lnTo>
+                <a:lnTo>
+                  <a:pt x="824652" y="1949182"/>
                 </a:lnTo>
                 <a:close/>
               </a:path>
-              <a:path w="41660" h="54887">
+              <a:path w="3123184" h="4114800">
                 <a:moveTo>
-                  <a:pt x="6000" y="21774"/>
+                  <a:pt x="449810" y="1632365"/>
                 </a:moveTo>
                 <a:lnTo>
-                  <a:pt x="1000" y="18887"/>
-                </a:lnTo>
-                <a:lnTo>
-                  <a:pt x="1000" y="43887"/>
-                </a:lnTo>
-                <a:lnTo>
-                  <a:pt x="1000" y="48887"/>
-                </a:lnTo>
-                <a:lnTo>
-                  <a:pt x="1000" y="53887"/>
-                </a:lnTo>
-                <a:lnTo>
-                  <a:pt x="18113" y="53887"/>
-                </a:lnTo>
-                <a:lnTo>
-                  <a:pt x="21000" y="48887"/>
-                </a:lnTo>
-                <a:lnTo>
-                  <a:pt x="6000" y="48887"/>
-                </a:lnTo>
-                <a:lnTo>
-                  <a:pt x="6000" y="43887"/>
+                  <a:pt x="74968" y="1415931"/>
+                </a:lnTo>
+                <a:lnTo>
+                  <a:pt x="74968" y="3290145"/>
+                </a:lnTo>
+                <a:lnTo>
+                  <a:pt x="74968" y="3664988"/>
+                </a:lnTo>
+                <a:lnTo>
+                  <a:pt x="74968" y="4039831"/>
+                </a:lnTo>
+                <a:lnTo>
+                  <a:pt x="1357902" y="4039831"/>
+                </a:lnTo>
+                <a:lnTo>
+                  <a:pt x="1574336" y="3664988"/>
+                </a:lnTo>
+                <a:lnTo>
+                  <a:pt x="449810" y="3664988"/>
+                </a:lnTo>
+                <a:lnTo>
+                  <a:pt x="449810" y="3290145"/>
                 </a:lnTo>
                 <a:close/>
               </a:path>
-              <a:path w="41660" h="54887">
+              <a:path w="3123184" h="4114800">
                 <a:moveTo>
-                  <a:pt x="23113" y="53887"/>
+                  <a:pt x="1732744" y="4039831"/>
                 </a:moveTo>
                 <a:lnTo>
-                  <a:pt x="26000" y="48887"/>
-                </a:lnTo>
-                <a:lnTo>
-                  <a:pt x="23000" y="48887"/>
-                </a:lnTo>
-                <a:lnTo>
-                  <a:pt x="20113" y="53887"/>
+                  <a:pt x="1949178" y="3664988"/>
+                </a:lnTo>
+                <a:lnTo>
+                  <a:pt x="1724273" y="3664988"/>
+                </a:lnTo>
+                <a:lnTo>
+                  <a:pt x="1507839" y="4039831"/>
                 </a:lnTo>
                 <a:close/>
               </a:path>
@@ -2450,129 +2450,129 @@
             <a:cxnLst/>
             <a:rect l="0" t="0" r="r" b="b"/>
             <a:pathLst>
-              <a:path w="41660" h="54887">
+              <a:path w="192786" h="254000">
                 <a:moveTo>
-                  <a:pt x="1000" y="3887"/>
+                  <a:pt x="4627" y="17987"/>
                 </a:moveTo>
                 <a:lnTo>
-                  <a:pt x="1000" y="13887"/>
-                </a:lnTo>
-                <a:lnTo>
-                  <a:pt x="6000" y="16774"/>
-                </a:lnTo>
-                <a:lnTo>
-                  <a:pt x="6000" y="13887"/>
-                </a:lnTo>
-                <a:lnTo>
-                  <a:pt x="6000" y="8887"/>
-                </a:lnTo>
-                <a:lnTo>
-                  <a:pt x="23321" y="18887"/>
-                </a:lnTo>
-                <a:lnTo>
-                  <a:pt x="14660" y="23887"/>
-                </a:lnTo>
-                <a:lnTo>
-                  <a:pt x="15000" y="23887"/>
-                </a:lnTo>
-                <a:lnTo>
-                  <a:pt x="32320" y="33887"/>
-                </a:lnTo>
-                <a:lnTo>
-                  <a:pt x="23660" y="38887"/>
-                </a:lnTo>
-                <a:lnTo>
-                  <a:pt x="32000" y="38887"/>
-                </a:lnTo>
-                <a:lnTo>
-                  <a:pt x="40660" y="33887"/>
-                </a:lnTo>
-                <a:lnTo>
-                  <a:pt x="23340" y="23887"/>
-                </a:lnTo>
-                <a:lnTo>
-                  <a:pt x="32000" y="18887"/>
-                </a:lnTo>
-                <a:lnTo>
-                  <a:pt x="31981" y="18887"/>
-                </a:lnTo>
-                <a:lnTo>
-                  <a:pt x="14660" y="8887"/>
-                </a:lnTo>
-                <a:lnTo>
-                  <a:pt x="6000" y="3887"/>
-                </a:lnTo>
-                <a:lnTo>
-                  <a:pt x="1000" y="1000"/>
+                  <a:pt x="4627" y="64264"/>
+                </a:lnTo>
+                <a:lnTo>
+                  <a:pt x="27765" y="77624"/>
+                </a:lnTo>
+                <a:lnTo>
+                  <a:pt x="27765" y="64264"/>
+                </a:lnTo>
+                <a:lnTo>
+                  <a:pt x="27765" y="41126"/>
+                </a:lnTo>
+                <a:lnTo>
+                  <a:pt x="107920" y="87403"/>
+                </a:lnTo>
+                <a:lnTo>
+                  <a:pt x="67840" y="110541"/>
+                </a:lnTo>
+                <a:lnTo>
+                  <a:pt x="69414" y="110541"/>
+                </a:lnTo>
+                <a:lnTo>
+                  <a:pt x="149568" y="156818"/>
+                </a:lnTo>
+                <a:lnTo>
+                  <a:pt x="109489" y="179956"/>
+                </a:lnTo>
+                <a:lnTo>
+                  <a:pt x="148083" y="179956"/>
+                </a:lnTo>
+                <a:lnTo>
+                  <a:pt x="188158" y="156818"/>
+                </a:lnTo>
+                <a:lnTo>
+                  <a:pt x="108008" y="110541"/>
+                </a:lnTo>
+                <a:lnTo>
+                  <a:pt x="148083" y="87403"/>
+                </a:lnTo>
+                <a:lnTo>
+                  <a:pt x="147995" y="87403"/>
+                </a:lnTo>
+                <a:lnTo>
+                  <a:pt x="67840" y="41126"/>
+                </a:lnTo>
+                <a:lnTo>
+                  <a:pt x="27765" y="17987"/>
+                </a:lnTo>
+                <a:lnTo>
+                  <a:pt x="4627" y="4627"/>
                 </a:lnTo>
                 <a:close/>
               </a:path>
-              <a:path w="41660" h="54887">
+              <a:path w="192786" h="254000">
                 <a:moveTo>
-                  <a:pt x="11000" y="38887"/>
+                  <a:pt x="50903" y="179956"/>
                 </a:moveTo>
                 <a:lnTo>
-                  <a:pt x="16000" y="38887"/>
-                </a:lnTo>
-                <a:lnTo>
-                  <a:pt x="17340" y="38887"/>
-                </a:lnTo>
-                <a:lnTo>
-                  <a:pt x="26000" y="33887"/>
-                </a:lnTo>
-                <a:lnTo>
-                  <a:pt x="16000" y="33887"/>
-                </a:lnTo>
-                <a:lnTo>
-                  <a:pt x="16000" y="28887"/>
-                </a:lnTo>
-                <a:lnTo>
-                  <a:pt x="11000" y="26000"/>
+                  <a:pt x="74041" y="179956"/>
+                </a:lnTo>
+                <a:lnTo>
+                  <a:pt x="80242" y="179956"/>
+                </a:lnTo>
+                <a:lnTo>
+                  <a:pt x="120317" y="156818"/>
+                </a:lnTo>
+                <a:lnTo>
+                  <a:pt x="74041" y="156818"/>
+                </a:lnTo>
+                <a:lnTo>
+                  <a:pt x="74041" y="133680"/>
+                </a:lnTo>
+                <a:lnTo>
+                  <a:pt x="50903" y="120319"/>
                 </a:lnTo>
                 <a:close/>
               </a:path>
-              <a:path w="41660" h="54887">
+              <a:path w="192786" h="254000">
                 <a:moveTo>
-                  <a:pt x="6000" y="21774"/>
+                  <a:pt x="27765" y="100763"/>
                 </a:moveTo>
                 <a:lnTo>
-                  <a:pt x="1000" y="18887"/>
-                </a:lnTo>
-                <a:lnTo>
-                  <a:pt x="1000" y="43887"/>
-                </a:lnTo>
-                <a:lnTo>
-                  <a:pt x="1000" y="48887"/>
-                </a:lnTo>
-                <a:lnTo>
-                  <a:pt x="1000" y="53887"/>
-                </a:lnTo>
-                <a:lnTo>
-                  <a:pt x="18113" y="53887"/>
-                </a:lnTo>
-                <a:lnTo>
-                  <a:pt x="21000" y="48887"/>
-                </a:lnTo>
-                <a:lnTo>
-                  <a:pt x="6000" y="48887"/>
-                </a:lnTo>
-                <a:lnTo>
-                  <a:pt x="6000" y="43887"/>
+                  <a:pt x="4627" y="87403"/>
+                </a:lnTo>
+                <a:lnTo>
+                  <a:pt x="4627" y="203095"/>
+                </a:lnTo>
+                <a:lnTo>
+                  <a:pt x="4627" y="226233"/>
+                </a:lnTo>
+                <a:lnTo>
+                  <a:pt x="4627" y="249372"/>
+                </a:lnTo>
+                <a:lnTo>
+                  <a:pt x="83819" y="249372"/>
+                </a:lnTo>
+                <a:lnTo>
+                  <a:pt x="97179" y="226233"/>
+                </a:lnTo>
+                <a:lnTo>
+                  <a:pt x="27765" y="226233"/>
+                </a:lnTo>
+                <a:lnTo>
+                  <a:pt x="27765" y="203095"/>
                 </a:lnTo>
                 <a:close/>
               </a:path>
-              <a:path w="41660" h="54887">
+              <a:path w="192786" h="254000">
                 <a:moveTo>
-                  <a:pt x="23113" y="53887"/>
+                  <a:pt x="106957" y="249372"/>
                 </a:moveTo>
                 <a:lnTo>
-                  <a:pt x="26000" y="48887"/>
-                </a:lnTo>
-                <a:lnTo>
-                  <a:pt x="23000" y="48887"/>
-                </a:lnTo>
-                <a:lnTo>
-                  <a:pt x="20113" y="53887"/>
+                  <a:pt x="120317" y="226233"/>
+                </a:lnTo>
+                <a:lnTo>
+                  <a:pt x="106434" y="226233"/>
+                </a:lnTo>
+                <a:lnTo>
+                  <a:pt x="93075" y="249372"/>
                 </a:lnTo>
                 <a:close/>
               </a:path>
@@ -2864,129 +2864,129 @@
             <a:cxnLst/>
             <a:rect l="0" t="0" r="r" b="b"/>
             <a:pathLst>
-              <a:path w="41660" h="54887">
+              <a:path w="192786" h="254000">
                 <a:moveTo>
-                  <a:pt x="1000" y="3887"/>
+                  <a:pt x="4627" y="17987"/>
                 </a:moveTo>
                 <a:lnTo>
-                  <a:pt x="1000" y="13887"/>
-                </a:lnTo>
-                <a:lnTo>
-                  <a:pt x="6000" y="16774"/>
-                </a:lnTo>
-                <a:lnTo>
-                  <a:pt x="6000" y="13887"/>
-                </a:lnTo>
-                <a:lnTo>
-                  <a:pt x="6000" y="8887"/>
-                </a:lnTo>
-                <a:lnTo>
-                  <a:pt x="23321" y="18887"/>
-                </a:lnTo>
-                <a:lnTo>
-                  <a:pt x="14660" y="23887"/>
-                </a:lnTo>
-                <a:lnTo>
-                  <a:pt x="15000" y="23887"/>
-                </a:lnTo>
-                <a:lnTo>
-                  <a:pt x="32320" y="33887"/>
-                </a:lnTo>
-                <a:lnTo>
-                  <a:pt x="23660" y="38887"/>
-                </a:lnTo>
-                <a:lnTo>
-                  <a:pt x="32000" y="38887"/>
-                </a:lnTo>
-                <a:lnTo>
-                  <a:pt x="40660" y="33887"/>
-                </a:lnTo>
-                <a:lnTo>
-                  <a:pt x="23340" y="23887"/>
-                </a:lnTo>
-                <a:lnTo>
-                  <a:pt x="32000" y="18887"/>
-                </a:lnTo>
-                <a:lnTo>
-                  <a:pt x="31981" y="18887"/>
-                </a:lnTo>
-                <a:lnTo>
-                  <a:pt x="14660" y="8887"/>
-                </a:lnTo>
-                <a:lnTo>
-                  <a:pt x="6000" y="3887"/>
-                </a:lnTo>
-                <a:lnTo>
-                  <a:pt x="1000" y="1000"/>
+                  <a:pt x="4627" y="64264"/>
+                </a:lnTo>
+                <a:lnTo>
+                  <a:pt x="27765" y="77624"/>
+                </a:lnTo>
+                <a:lnTo>
+                  <a:pt x="27765" y="64264"/>
+                </a:lnTo>
+                <a:lnTo>
+                  <a:pt x="27765" y="41126"/>
+                </a:lnTo>
+                <a:lnTo>
+                  <a:pt x="107920" y="87403"/>
+                </a:lnTo>
+                <a:lnTo>
+                  <a:pt x="67840" y="110541"/>
+                </a:lnTo>
+                <a:lnTo>
+                  <a:pt x="69414" y="110541"/>
+                </a:lnTo>
+                <a:lnTo>
+                  <a:pt x="149568" y="156818"/>
+                </a:lnTo>
+                <a:lnTo>
+                  <a:pt x="109489" y="179956"/>
+                </a:lnTo>
+                <a:lnTo>
+                  <a:pt x="148083" y="179956"/>
+                </a:lnTo>
+                <a:lnTo>
+                  <a:pt x="188158" y="156818"/>
+                </a:lnTo>
+                <a:lnTo>
+                  <a:pt x="108008" y="110541"/>
+                </a:lnTo>
+                <a:lnTo>
+                  <a:pt x="148083" y="87403"/>
+                </a:lnTo>
+                <a:lnTo>
+                  <a:pt x="147995" y="87403"/>
+                </a:lnTo>
+                <a:lnTo>
+                  <a:pt x="67840" y="41126"/>
+                </a:lnTo>
+                <a:lnTo>
+                  <a:pt x="27765" y="17987"/>
+                </a:lnTo>
+                <a:lnTo>
+                  <a:pt x="4627" y="4627"/>
                 </a:lnTo>
                 <a:close/>
               </a:path>
-              <a:path w="41660" h="54887">
+              <a:path w="192786" h="254000">
                 <a:moveTo>
-                  <a:pt x="11000" y="38887"/>
+                  <a:pt x="50903" y="179956"/>
                 </a:moveTo>
                 <a:lnTo>
-                  <a:pt x="16000" y="38887"/>
-                </a:lnTo>
-                <a:lnTo>
-                  <a:pt x="17340" y="38887"/>
-                </a:lnTo>
-                <a:lnTo>
-                  <a:pt x="26000" y="33887"/>
-                </a:lnTo>
-                <a:lnTo>
-                  <a:pt x="16000" y="33887"/>
-                </a:lnTo>
-                <a:lnTo>
-                  <a:pt x="16000" y="28887"/>
-                </a:lnTo>
-                <a:lnTo>
-                  <a:pt x="11000" y="26000"/>
+                  <a:pt x="74041" y="179956"/>
+                </a:lnTo>
+                <a:lnTo>
+                  <a:pt x="80242" y="179956"/>
+                </a:lnTo>
+                <a:lnTo>
+                  <a:pt x="120317" y="156818"/>
+                </a:lnTo>
+                <a:lnTo>
+                  <a:pt x="74041" y="156818"/>
+                </a:lnTo>
+                <a:lnTo>
+                  <a:pt x="74041" y="133680"/>
+                </a:lnTo>
+                <a:lnTo>
+                  <a:pt x="50903" y="120319"/>
                 </a:lnTo>
                 <a:close/>
               </a:path>
-              <a:path w="41660" h="54887">
+              <a:path w="192786" h="254000">
                 <a:moveTo>
-                  <a:pt x="6000" y="21774"/>
+                  <a:pt x="27765" y="100763"/>
                 </a:moveTo>
                 <a:lnTo>
-                  <a:pt x="1000" y="18887"/>
-                </a:lnTo>
-                <a:lnTo>
-                  <a:pt x="1000" y="43887"/>
-                </a:lnTo>
-                <a:lnTo>
-                  <a:pt x="1000" y="48887"/>
-                </a:lnTo>
-                <a:lnTo>
-                  <a:pt x="1000" y="53887"/>
-                </a:lnTo>
-                <a:lnTo>
-                  <a:pt x="18113" y="53887"/>
-                </a:lnTo>
-                <a:lnTo>
-                  <a:pt x="21000" y="48887"/>
-                </a:lnTo>
-                <a:lnTo>
-                  <a:pt x="6000" y="48887"/>
-                </a:lnTo>
-                <a:lnTo>
-                  <a:pt x="6000" y="43887"/>
+                  <a:pt x="4627" y="87403"/>
+                </a:lnTo>
+                <a:lnTo>
+                  <a:pt x="4627" y="203095"/>
+                </a:lnTo>
+                <a:lnTo>
+                  <a:pt x="4627" y="226233"/>
+                </a:lnTo>
+                <a:lnTo>
+                  <a:pt x="4627" y="249372"/>
+                </a:lnTo>
+                <a:lnTo>
+                  <a:pt x="83819" y="249372"/>
+                </a:lnTo>
+                <a:lnTo>
+                  <a:pt x="97179" y="226233"/>
+                </a:lnTo>
+                <a:lnTo>
+                  <a:pt x="27765" y="226233"/>
+                </a:lnTo>
+                <a:lnTo>
+                  <a:pt x="27765" y="203095"/>
                 </a:lnTo>
                 <a:close/>
               </a:path>
-              <a:path w="41660" h="54887">
+              <a:path w="192786" h="254000">
                 <a:moveTo>
-                  <a:pt x="23113" y="53887"/>
+                  <a:pt x="106957" y="249372"/>
                 </a:moveTo>
                 <a:lnTo>
-                  <a:pt x="26000" y="48887"/>
-                </a:lnTo>
-                <a:lnTo>
-                  <a:pt x="23000" y="48887"/>
-                </a:lnTo>
-                <a:lnTo>
-                  <a:pt x="20113" y="53887"/>
+                  <a:pt x="120317" y="226233"/>
+                </a:lnTo>
+                <a:lnTo>
+                  <a:pt x="106434" y="226233"/>
+                </a:lnTo>
+                <a:lnTo>
+                  <a:pt x="93075" y="249372"/>
                 </a:lnTo>
                 <a:close/>
               </a:path>
@@ -17089,7 +17089,7 @@
                       </a:pPr>
                       <a:r>
                         <a:rPr lang="ja-JP" sz="1100"/>
-                        <a:t>だいき</a:t>
+                        <a:t>担当A</a:t>
                       </a:r>
                     </a:p>
                   </a:txBody>
@@ -17307,7 +17307,7 @@
                       </a:pPr>
                       <a:r>
                         <a:rPr lang="ja-JP" sz="1100"/>
-                        <a:t>だいき</a:t>
+                        <a:t>担当A</a:t>
                       </a:r>
                     </a:p>
                   </a:txBody>
@@ -17525,7 +17525,7 @@
                       </a:pPr>
                       <a:r>
                         <a:rPr lang="ja-JP" sz="1100"/>
-                        <a:t>だいき</a:t>
+                        <a:t>担当A</a:t>
                       </a:r>
                     </a:p>
                   </a:txBody>

--- a/bigtree/samples/bigtree_lab_tables.pptx
+++ b/bigtree/samples/bigtree_lab_tables.pptx
@@ -245,64 +245,62 @@
             <a:pathLst>
               <a:path w="347028" h="457200">
                 <a:moveTo>
-                  <a:pt x="8330" y="32378"/>
+                  <a:pt x="8333" y="32378"/>
                 </a:moveTo>
                 <a:lnTo>
-                  <a:pt x="8330" y="115676"/>
-                </a:lnTo>
-                <a:lnTo>
-                  <a:pt x="49980" y="139724"/>
-                </a:lnTo>
-                <a:lnTo>
-                  <a:pt x="49980" y="115676"/>
-                </a:lnTo>
-                <a:lnTo>
-                  <a:pt x="49980" y="74027"/>
-                </a:lnTo>
-                <a:lnTo>
-                  <a:pt x="194264" y="157325"/>
-                </a:lnTo>
-                <a:lnTo>
-                  <a:pt x="122117" y="198974"/>
-                </a:lnTo>
-                <a:lnTo>
-                  <a:pt x="124950" y="198974"/>
-                </a:lnTo>
-                <a:lnTo>
-                  <a:pt x="269234" y="282273"/>
+                  <a:pt x="8333" y="115676"/>
+                </a:lnTo>
+                <a:lnTo>
+                  <a:pt x="49982" y="139724"/>
+                </a:lnTo>
+                <a:lnTo>
+                  <a:pt x="49982" y="115676"/>
+                </a:lnTo>
+                <a:lnTo>
+                  <a:pt x="49982" y="74027"/>
+                </a:lnTo>
+                <a:lnTo>
+                  <a:pt x="194263" y="157325"/>
+                </a:lnTo>
+                <a:lnTo>
+                  <a:pt x="122118" y="198974"/>
+                </a:lnTo>
+                <a:lnTo>
+                  <a:pt x="124951" y="198974"/>
+                </a:lnTo>
+                <a:lnTo>
+                  <a:pt x="269232" y="282273"/>
                 </a:lnTo>
                 <a:lnTo>
                   <a:pt x="197087" y="323922"/>
                 </a:lnTo>
                 <a:lnTo>
-                  <a:pt x="266560" y="323922"/>
-                </a:lnTo>
-                <a:lnTo>
-                  <a:pt x="338697" y="282273"/>
-                </a:lnTo>
-                <a:lnTo>
-                  <a:pt x="194422" y="198974"/>
-                </a:lnTo>
-                <a:lnTo>
-                  <a:pt x="266560" y="157325"/>
-                </a:lnTo>
-                <a:lnTo>
-                  <a:pt x="266401" y="157325"/>
-                </a:lnTo>
-                <a:lnTo>
-                  <a:pt x="122117" y="74027"/>
-                </a:lnTo>
-                <a:lnTo>
-                  <a:pt x="49980" y="32378"/>
-                </a:lnTo>
-                <a:lnTo>
-                  <a:pt x="8330" y="8329"/>
+                  <a:pt x="266558" y="323922"/>
+                </a:lnTo>
+                <a:lnTo>
+                  <a:pt x="338694" y="282273"/>
+                </a:lnTo>
+                <a:lnTo>
+                  <a:pt x="194421" y="198974"/>
+                </a:lnTo>
+                <a:lnTo>
+                  <a:pt x="266558" y="157325"/>
+                </a:lnTo>
+                <a:lnTo>
+                  <a:pt x="266400" y="157325"/>
+                </a:lnTo>
+                <a:lnTo>
+                  <a:pt x="122118" y="74027"/>
+                </a:lnTo>
+                <a:lnTo>
+                  <a:pt x="49982" y="32378"/>
+                </a:lnTo>
+                <a:lnTo>
+                  <a:pt x="8333" y="8329"/>
                 </a:lnTo>
                 <a:close/>
-              </a:path>
-              <a:path w="347028" h="457200">
                 <a:moveTo>
-                  <a:pt x="91630" y="323922"/>
+                  <a:pt x="91631" y="323922"/>
                 </a:moveTo>
                 <a:lnTo>
                   <a:pt x="133280" y="323922"/>
@@ -311,7 +309,7 @@
                   <a:pt x="144442" y="323922"/>
                 </a:lnTo>
                 <a:lnTo>
-                  <a:pt x="216580" y="282273"/>
+                  <a:pt x="216579" y="282273"/>
                 </a:lnTo>
                 <a:lnTo>
                   <a:pt x="133280" y="282273"/>
@@ -320,25 +318,23 @@
                   <a:pt x="133280" y="240624"/>
                 </a:lnTo>
                 <a:lnTo>
-                  <a:pt x="91630" y="216575"/>
+                  <a:pt x="91631" y="216575"/>
                 </a:lnTo>
                 <a:close/>
-              </a:path>
-              <a:path w="347028" h="457200">
                 <a:moveTo>
-                  <a:pt x="49980" y="181373"/>
+                  <a:pt x="49982" y="181373"/>
                 </a:moveTo>
                 <a:lnTo>
-                  <a:pt x="8330" y="157325"/>
-                </a:lnTo>
-                <a:lnTo>
-                  <a:pt x="8330" y="365571"/>
-                </a:lnTo>
-                <a:lnTo>
-                  <a:pt x="8330" y="407220"/>
-                </a:lnTo>
-                <a:lnTo>
-                  <a:pt x="8330" y="448870"/>
+                  <a:pt x="8333" y="157325"/>
+                </a:lnTo>
+                <a:lnTo>
+                  <a:pt x="8333" y="365571"/>
+                </a:lnTo>
+                <a:lnTo>
+                  <a:pt x="8333" y="407220"/>
+                </a:lnTo>
+                <a:lnTo>
+                  <a:pt x="8333" y="448870"/>
                 </a:lnTo>
                 <a:lnTo>
                   <a:pt x="150881" y="448870"/>
@@ -347,22 +343,20 @@
                   <a:pt x="174930" y="407220"/>
                 </a:lnTo>
                 <a:lnTo>
-                  <a:pt x="49980" y="407220"/>
-                </a:lnTo>
-                <a:lnTo>
-                  <a:pt x="49980" y="365571"/>
+                  <a:pt x="49982" y="407220"/>
+                </a:lnTo>
+                <a:lnTo>
+                  <a:pt x="49982" y="365571"/>
                 </a:lnTo>
                 <a:close/>
-              </a:path>
-              <a:path w="347028" h="457200">
                 <a:moveTo>
                   <a:pt x="192531" y="448870"/>
                 </a:moveTo>
                 <a:lnTo>
-                  <a:pt x="216580" y="407220"/>
-                </a:lnTo>
-                <a:lnTo>
-                  <a:pt x="191590" y="407220"/>
+                  <a:pt x="216579" y="407220"/>
+                </a:lnTo>
+                <a:lnTo>
+                  <a:pt x="191589" y="407220"/>
                 </a:lnTo>
                 <a:lnTo>
                   <a:pt x="167541" y="448870"/>
@@ -770,22 +764,22 @@
             <a:pathLst>
               <a:path w="3123184" h="4114800">
                 <a:moveTo>
-                  <a:pt x="74968" y="291402"/>
+                  <a:pt x="74968" y="291406"/>
                 </a:moveTo>
                 <a:lnTo>
-                  <a:pt x="74968" y="1041088"/>
-                </a:lnTo>
-                <a:lnTo>
-                  <a:pt x="449810" y="1257522"/>
-                </a:lnTo>
-                <a:lnTo>
-                  <a:pt x="449810" y="1041088"/>
-                </a:lnTo>
-                <a:lnTo>
-                  <a:pt x="449810" y="666245"/>
-                </a:lnTo>
-                <a:lnTo>
-                  <a:pt x="1748338" y="1415931"/>
+                  <a:pt x="74968" y="1041090"/>
+                </a:lnTo>
+                <a:lnTo>
+                  <a:pt x="449810" y="1257524"/>
+                </a:lnTo>
+                <a:lnTo>
+                  <a:pt x="449810" y="1041090"/>
+                </a:lnTo>
+                <a:lnTo>
+                  <a:pt x="449810" y="666248"/>
+                </a:lnTo>
+                <a:lnTo>
+                  <a:pt x="1748338" y="1415932"/>
                 </a:lnTo>
                 <a:lnTo>
                   <a:pt x="1099036" y="1790774"/>
@@ -794,103 +788,97 @@
                   <a:pt x="1124526" y="1790774"/>
                 </a:lnTo>
                 <a:lnTo>
-                  <a:pt x="2423054" y="2540459"/>
-                </a:lnTo>
-                <a:lnTo>
-                  <a:pt x="1773752" y="2915302"/>
-                </a:lnTo>
-                <a:lnTo>
-                  <a:pt x="2398989" y="2915302"/>
-                </a:lnTo>
-                <a:lnTo>
-                  <a:pt x="3048215" y="2540459"/>
+                  <a:pt x="2423054" y="2540458"/>
+                </a:lnTo>
+                <a:lnTo>
+                  <a:pt x="1773752" y="2915301"/>
+                </a:lnTo>
+                <a:lnTo>
+                  <a:pt x="2398989" y="2915301"/>
+                </a:lnTo>
+                <a:lnTo>
+                  <a:pt x="3048215" y="2540458"/>
                 </a:lnTo>
                 <a:lnTo>
                   <a:pt x="1749762" y="1790774"/>
                 </a:lnTo>
                 <a:lnTo>
-                  <a:pt x="2398989" y="1415931"/>
-                </a:lnTo>
-                <a:lnTo>
-                  <a:pt x="2397564" y="1415931"/>
-                </a:lnTo>
-                <a:lnTo>
-                  <a:pt x="1099036" y="666245"/>
-                </a:lnTo>
-                <a:lnTo>
-                  <a:pt x="449810" y="291402"/>
-                </a:lnTo>
-                <a:lnTo>
-                  <a:pt x="74968" y="74968"/>
+                  <a:pt x="2398989" y="1415932"/>
+                </a:lnTo>
+                <a:lnTo>
+                  <a:pt x="2397564" y="1415932"/>
+                </a:lnTo>
+                <a:lnTo>
+                  <a:pt x="1099036" y="666248"/>
+                </a:lnTo>
+                <a:lnTo>
+                  <a:pt x="449810" y="291406"/>
+                </a:lnTo>
+                <a:lnTo>
+                  <a:pt x="74968" y="74972"/>
                 </a:lnTo>
                 <a:close/>
-              </a:path>
-              <a:path w="3123184" h="4114800">
                 <a:moveTo>
-                  <a:pt x="824652" y="2915302"/>
+                  <a:pt x="824652" y="2915301"/>
                 </a:moveTo>
                 <a:lnTo>
-                  <a:pt x="1199494" y="2915302"/>
-                </a:lnTo>
-                <a:lnTo>
-                  <a:pt x="1299952" y="2915302"/>
-                </a:lnTo>
-                <a:lnTo>
-                  <a:pt x="1949178" y="2540459"/>
-                </a:lnTo>
-                <a:lnTo>
-                  <a:pt x="1199494" y="2540459"/>
-                </a:lnTo>
-                <a:lnTo>
-                  <a:pt x="1199494" y="2165617"/>
-                </a:lnTo>
-                <a:lnTo>
-                  <a:pt x="824652" y="1949182"/>
+                  <a:pt x="1199494" y="2915301"/>
+                </a:lnTo>
+                <a:lnTo>
+                  <a:pt x="1299952" y="2915301"/>
+                </a:lnTo>
+                <a:lnTo>
+                  <a:pt x="1949178" y="2540458"/>
+                </a:lnTo>
+                <a:lnTo>
+                  <a:pt x="1199494" y="2540458"/>
+                </a:lnTo>
+                <a:lnTo>
+                  <a:pt x="1199494" y="2165616"/>
+                </a:lnTo>
+                <a:lnTo>
+                  <a:pt x="824652" y="1949183"/>
                 </a:lnTo>
                 <a:close/>
-              </a:path>
-              <a:path w="3123184" h="4114800">
                 <a:moveTo>
-                  <a:pt x="449810" y="1632365"/>
+                  <a:pt x="449810" y="1632366"/>
                 </a:moveTo>
                 <a:lnTo>
-                  <a:pt x="74968" y="1415931"/>
-                </a:lnTo>
-                <a:lnTo>
-                  <a:pt x="74968" y="3290145"/>
-                </a:lnTo>
-                <a:lnTo>
-                  <a:pt x="74968" y="3664988"/>
-                </a:lnTo>
-                <a:lnTo>
-                  <a:pt x="74968" y="4039831"/>
-                </a:lnTo>
-                <a:lnTo>
-                  <a:pt x="1357902" y="4039831"/>
-                </a:lnTo>
-                <a:lnTo>
-                  <a:pt x="1574336" y="3664988"/>
-                </a:lnTo>
-                <a:lnTo>
-                  <a:pt x="449810" y="3664988"/>
-                </a:lnTo>
-                <a:lnTo>
-                  <a:pt x="449810" y="3290145"/>
+                  <a:pt x="74968" y="1415932"/>
+                </a:lnTo>
+                <a:lnTo>
+                  <a:pt x="74968" y="3290143"/>
+                </a:lnTo>
+                <a:lnTo>
+                  <a:pt x="74968" y="3664985"/>
+                </a:lnTo>
+                <a:lnTo>
+                  <a:pt x="74968" y="4039827"/>
+                </a:lnTo>
+                <a:lnTo>
+                  <a:pt x="1357902" y="4039827"/>
+                </a:lnTo>
+                <a:lnTo>
+                  <a:pt x="1574336" y="3664985"/>
+                </a:lnTo>
+                <a:lnTo>
+                  <a:pt x="449810" y="3664985"/>
+                </a:lnTo>
+                <a:lnTo>
+                  <a:pt x="449810" y="3290143"/>
                 </a:lnTo>
                 <a:close/>
-              </a:path>
-              <a:path w="3123184" h="4114800">
                 <a:moveTo>
-                  <a:pt x="1732744" y="4039831"/>
+                  <a:pt x="1732744" y="4039827"/>
                 </a:moveTo>
                 <a:lnTo>
-                  <a:pt x="1949178" y="3664988"/>
-                </a:lnTo>
-                <a:lnTo>
-                  <a:pt x="1724273" y="3664988"/>
-                </a:lnTo>
-                <a:lnTo>
-                  <a:pt x="1507839" y="4039831"/>
+                  <a:pt x="1949178" y="3664985"/>
+                </a:lnTo>
+                <a:lnTo>
+                  <a:pt x="1724273" y="3664985"/>
+                </a:lnTo>
+                <a:lnTo>
+                  <a:pt x="1507839" y="4039827"/>
                 </a:lnTo>
                 <a:close/>
               </a:path>
@@ -1193,22 +1181,22 @@
             <a:pathLst>
               <a:path w="3123184" h="4114800">
                 <a:moveTo>
-                  <a:pt x="74968" y="291402"/>
+                  <a:pt x="74968" y="291406"/>
                 </a:moveTo>
                 <a:lnTo>
-                  <a:pt x="74968" y="1041088"/>
-                </a:lnTo>
-                <a:lnTo>
-                  <a:pt x="449810" y="1257522"/>
-                </a:lnTo>
-                <a:lnTo>
-                  <a:pt x="449810" y="1041088"/>
-                </a:lnTo>
-                <a:lnTo>
-                  <a:pt x="449810" y="666245"/>
-                </a:lnTo>
-                <a:lnTo>
-                  <a:pt x="1748338" y="1415931"/>
+                  <a:pt x="74968" y="1041090"/>
+                </a:lnTo>
+                <a:lnTo>
+                  <a:pt x="449810" y="1257524"/>
+                </a:lnTo>
+                <a:lnTo>
+                  <a:pt x="449810" y="1041090"/>
+                </a:lnTo>
+                <a:lnTo>
+                  <a:pt x="449810" y="666248"/>
+                </a:lnTo>
+                <a:lnTo>
+                  <a:pt x="1748338" y="1415932"/>
                 </a:lnTo>
                 <a:lnTo>
                   <a:pt x="1099036" y="1790774"/>
@@ -1217,103 +1205,97 @@
                   <a:pt x="1124526" y="1790774"/>
                 </a:lnTo>
                 <a:lnTo>
-                  <a:pt x="2423054" y="2540459"/>
-                </a:lnTo>
-                <a:lnTo>
-                  <a:pt x="1773752" y="2915302"/>
-                </a:lnTo>
-                <a:lnTo>
-                  <a:pt x="2398989" y="2915302"/>
-                </a:lnTo>
-                <a:lnTo>
-                  <a:pt x="3048215" y="2540459"/>
+                  <a:pt x="2423054" y="2540458"/>
+                </a:lnTo>
+                <a:lnTo>
+                  <a:pt x="1773752" y="2915301"/>
+                </a:lnTo>
+                <a:lnTo>
+                  <a:pt x="2398989" y="2915301"/>
+                </a:lnTo>
+                <a:lnTo>
+                  <a:pt x="3048215" y="2540458"/>
                 </a:lnTo>
                 <a:lnTo>
                   <a:pt x="1749762" y="1790774"/>
                 </a:lnTo>
                 <a:lnTo>
-                  <a:pt x="2398989" y="1415931"/>
-                </a:lnTo>
-                <a:lnTo>
-                  <a:pt x="2397564" y="1415931"/>
-                </a:lnTo>
-                <a:lnTo>
-                  <a:pt x="1099036" y="666245"/>
-                </a:lnTo>
-                <a:lnTo>
-                  <a:pt x="449810" y="291402"/>
-                </a:lnTo>
-                <a:lnTo>
-                  <a:pt x="74968" y="74968"/>
+                  <a:pt x="2398989" y="1415932"/>
+                </a:lnTo>
+                <a:lnTo>
+                  <a:pt x="2397564" y="1415932"/>
+                </a:lnTo>
+                <a:lnTo>
+                  <a:pt x="1099036" y="666248"/>
+                </a:lnTo>
+                <a:lnTo>
+                  <a:pt x="449810" y="291406"/>
+                </a:lnTo>
+                <a:lnTo>
+                  <a:pt x="74968" y="74972"/>
                 </a:lnTo>
                 <a:close/>
-              </a:path>
-              <a:path w="3123184" h="4114800">
                 <a:moveTo>
-                  <a:pt x="824652" y="2915302"/>
+                  <a:pt x="824652" y="2915301"/>
                 </a:moveTo>
                 <a:lnTo>
-                  <a:pt x="1199494" y="2915302"/>
-                </a:lnTo>
-                <a:lnTo>
-                  <a:pt x="1299952" y="2915302"/>
-                </a:lnTo>
-                <a:lnTo>
-                  <a:pt x="1949178" y="2540459"/>
-                </a:lnTo>
-                <a:lnTo>
-                  <a:pt x="1199494" y="2540459"/>
-                </a:lnTo>
-                <a:lnTo>
-                  <a:pt x="1199494" y="2165617"/>
-                </a:lnTo>
-                <a:lnTo>
-                  <a:pt x="824652" y="1949182"/>
+                  <a:pt x="1199494" y="2915301"/>
+                </a:lnTo>
+                <a:lnTo>
+                  <a:pt x="1299952" y="2915301"/>
+                </a:lnTo>
+                <a:lnTo>
+                  <a:pt x="1949178" y="2540458"/>
+                </a:lnTo>
+                <a:lnTo>
+                  <a:pt x="1199494" y="2540458"/>
+                </a:lnTo>
+                <a:lnTo>
+                  <a:pt x="1199494" y="2165616"/>
+                </a:lnTo>
+                <a:lnTo>
+                  <a:pt x="824652" y="1949183"/>
                 </a:lnTo>
                 <a:close/>
-              </a:path>
-              <a:path w="3123184" h="4114800">
                 <a:moveTo>
-                  <a:pt x="449810" y="1632365"/>
+                  <a:pt x="449810" y="1632366"/>
                 </a:moveTo>
                 <a:lnTo>
-                  <a:pt x="74968" y="1415931"/>
-                </a:lnTo>
-                <a:lnTo>
-                  <a:pt x="74968" y="3290145"/>
-                </a:lnTo>
-                <a:lnTo>
-                  <a:pt x="74968" y="3664988"/>
-                </a:lnTo>
-                <a:lnTo>
-                  <a:pt x="74968" y="4039831"/>
-                </a:lnTo>
-                <a:lnTo>
-                  <a:pt x="1357902" y="4039831"/>
-                </a:lnTo>
-                <a:lnTo>
-                  <a:pt x="1574336" y="3664988"/>
-                </a:lnTo>
-                <a:lnTo>
-                  <a:pt x="449810" y="3664988"/>
-                </a:lnTo>
-                <a:lnTo>
-                  <a:pt x="449810" y="3290145"/>
+                  <a:pt x="74968" y="1415932"/>
+                </a:lnTo>
+                <a:lnTo>
+                  <a:pt x="74968" y="3290143"/>
+                </a:lnTo>
+                <a:lnTo>
+                  <a:pt x="74968" y="3664985"/>
+                </a:lnTo>
+                <a:lnTo>
+                  <a:pt x="74968" y="4039827"/>
+                </a:lnTo>
+                <a:lnTo>
+                  <a:pt x="1357902" y="4039827"/>
+                </a:lnTo>
+                <a:lnTo>
+                  <a:pt x="1574336" y="3664985"/>
+                </a:lnTo>
+                <a:lnTo>
+                  <a:pt x="449810" y="3664985"/>
+                </a:lnTo>
+                <a:lnTo>
+                  <a:pt x="449810" y="3290143"/>
                 </a:lnTo>
                 <a:close/>
-              </a:path>
-              <a:path w="3123184" h="4114800">
                 <a:moveTo>
-                  <a:pt x="1732744" y="4039831"/>
+                  <a:pt x="1732744" y="4039827"/>
                 </a:moveTo>
                 <a:lnTo>
-                  <a:pt x="1949178" y="3664988"/>
-                </a:lnTo>
-                <a:lnTo>
-                  <a:pt x="1724273" y="3664988"/>
-                </a:lnTo>
-                <a:lnTo>
-                  <a:pt x="1507839" y="4039831"/>
+                  <a:pt x="1949178" y="3664985"/>
+                </a:lnTo>
+                <a:lnTo>
+                  <a:pt x="1724273" y="3664985"/>
+                </a:lnTo>
+                <a:lnTo>
+                  <a:pt x="1507839" y="4039827"/>
                 </a:lnTo>
                 <a:close/>
               </a:path>
@@ -1616,22 +1598,22 @@
             <a:pathLst>
               <a:path w="3123184" h="4114800">
                 <a:moveTo>
-                  <a:pt x="74968" y="291402"/>
+                  <a:pt x="74968" y="291406"/>
                 </a:moveTo>
                 <a:lnTo>
-                  <a:pt x="74968" y="1041088"/>
-                </a:lnTo>
-                <a:lnTo>
-                  <a:pt x="449810" y="1257522"/>
-                </a:lnTo>
-                <a:lnTo>
-                  <a:pt x="449810" y="1041088"/>
-                </a:lnTo>
-                <a:lnTo>
-                  <a:pt x="449810" y="666245"/>
-                </a:lnTo>
-                <a:lnTo>
-                  <a:pt x="1748338" y="1415931"/>
+                  <a:pt x="74968" y="1041090"/>
+                </a:lnTo>
+                <a:lnTo>
+                  <a:pt x="449810" y="1257524"/>
+                </a:lnTo>
+                <a:lnTo>
+                  <a:pt x="449810" y="1041090"/>
+                </a:lnTo>
+                <a:lnTo>
+                  <a:pt x="449810" y="666248"/>
+                </a:lnTo>
+                <a:lnTo>
+                  <a:pt x="1748338" y="1415932"/>
                 </a:lnTo>
                 <a:lnTo>
                   <a:pt x="1099036" y="1790774"/>
@@ -1640,103 +1622,97 @@
                   <a:pt x="1124526" y="1790774"/>
                 </a:lnTo>
                 <a:lnTo>
-                  <a:pt x="2423054" y="2540459"/>
-                </a:lnTo>
-                <a:lnTo>
-                  <a:pt x="1773752" y="2915302"/>
-                </a:lnTo>
-                <a:lnTo>
-                  <a:pt x="2398989" y="2915302"/>
-                </a:lnTo>
-                <a:lnTo>
-                  <a:pt x="3048215" y="2540459"/>
+                  <a:pt x="2423054" y="2540458"/>
+                </a:lnTo>
+                <a:lnTo>
+                  <a:pt x="1773752" y="2915301"/>
+                </a:lnTo>
+                <a:lnTo>
+                  <a:pt x="2398989" y="2915301"/>
+                </a:lnTo>
+                <a:lnTo>
+                  <a:pt x="3048215" y="2540458"/>
                 </a:lnTo>
                 <a:lnTo>
                   <a:pt x="1749762" y="1790774"/>
                 </a:lnTo>
                 <a:lnTo>
-                  <a:pt x="2398989" y="1415931"/>
-                </a:lnTo>
-                <a:lnTo>
-                  <a:pt x="2397564" y="1415931"/>
-                </a:lnTo>
-                <a:lnTo>
-                  <a:pt x="1099036" y="666245"/>
-                </a:lnTo>
-                <a:lnTo>
-                  <a:pt x="449810" y="291402"/>
-                </a:lnTo>
-                <a:lnTo>
-                  <a:pt x="74968" y="74968"/>
+                  <a:pt x="2398989" y="1415932"/>
+                </a:lnTo>
+                <a:lnTo>
+                  <a:pt x="2397564" y="1415932"/>
+                </a:lnTo>
+                <a:lnTo>
+                  <a:pt x="1099036" y="666248"/>
+                </a:lnTo>
+                <a:lnTo>
+                  <a:pt x="449810" y="291406"/>
+                </a:lnTo>
+                <a:lnTo>
+                  <a:pt x="74968" y="74972"/>
                 </a:lnTo>
                 <a:close/>
-              </a:path>
-              <a:path w="3123184" h="4114800">
                 <a:moveTo>
-                  <a:pt x="824652" y="2915302"/>
+                  <a:pt x="824652" y="2915301"/>
                 </a:moveTo>
                 <a:lnTo>
-                  <a:pt x="1199494" y="2915302"/>
-                </a:lnTo>
-                <a:lnTo>
-                  <a:pt x="1299952" y="2915302"/>
-                </a:lnTo>
-                <a:lnTo>
-                  <a:pt x="1949178" y="2540459"/>
-                </a:lnTo>
-                <a:lnTo>
-                  <a:pt x="1199494" y="2540459"/>
-                </a:lnTo>
-                <a:lnTo>
-                  <a:pt x="1199494" y="2165617"/>
-                </a:lnTo>
-                <a:lnTo>
-                  <a:pt x="824652" y="1949182"/>
+                  <a:pt x="1199494" y="2915301"/>
+                </a:lnTo>
+                <a:lnTo>
+                  <a:pt x="1299952" y="2915301"/>
+                </a:lnTo>
+                <a:lnTo>
+                  <a:pt x="1949178" y="2540458"/>
+                </a:lnTo>
+                <a:lnTo>
+                  <a:pt x="1199494" y="2540458"/>
+                </a:lnTo>
+                <a:lnTo>
+                  <a:pt x="1199494" y="2165616"/>
+                </a:lnTo>
+                <a:lnTo>
+                  <a:pt x="824652" y="1949183"/>
                 </a:lnTo>
                 <a:close/>
-              </a:path>
-              <a:path w="3123184" h="4114800">
                 <a:moveTo>
-                  <a:pt x="449810" y="1632365"/>
+                  <a:pt x="449810" y="1632366"/>
                 </a:moveTo>
                 <a:lnTo>
-                  <a:pt x="74968" y="1415931"/>
-                </a:lnTo>
-                <a:lnTo>
-                  <a:pt x="74968" y="3290145"/>
-                </a:lnTo>
-                <a:lnTo>
-                  <a:pt x="74968" y="3664988"/>
-                </a:lnTo>
-                <a:lnTo>
-                  <a:pt x="74968" y="4039831"/>
-                </a:lnTo>
-                <a:lnTo>
-                  <a:pt x="1357902" y="4039831"/>
-                </a:lnTo>
-                <a:lnTo>
-                  <a:pt x="1574336" y="3664988"/>
-                </a:lnTo>
-                <a:lnTo>
-                  <a:pt x="449810" y="3664988"/>
-                </a:lnTo>
-                <a:lnTo>
-                  <a:pt x="449810" y="3290145"/>
+                  <a:pt x="74968" y="1415932"/>
+                </a:lnTo>
+                <a:lnTo>
+                  <a:pt x="74968" y="3290143"/>
+                </a:lnTo>
+                <a:lnTo>
+                  <a:pt x="74968" y="3664985"/>
+                </a:lnTo>
+                <a:lnTo>
+                  <a:pt x="74968" y="4039827"/>
+                </a:lnTo>
+                <a:lnTo>
+                  <a:pt x="1357902" y="4039827"/>
+                </a:lnTo>
+                <a:lnTo>
+                  <a:pt x="1574336" y="3664985"/>
+                </a:lnTo>
+                <a:lnTo>
+                  <a:pt x="449810" y="3664985"/>
+                </a:lnTo>
+                <a:lnTo>
+                  <a:pt x="449810" y="3290143"/>
                 </a:lnTo>
                 <a:close/>
-              </a:path>
-              <a:path w="3123184" h="4114800">
                 <a:moveTo>
-                  <a:pt x="1732744" y="4039831"/>
+                  <a:pt x="1732744" y="4039827"/>
                 </a:moveTo>
                 <a:lnTo>
-                  <a:pt x="1949178" y="3664988"/>
-                </a:lnTo>
-                <a:lnTo>
-                  <a:pt x="1724273" y="3664988"/>
-                </a:lnTo>
-                <a:lnTo>
-                  <a:pt x="1507839" y="4039831"/>
+                  <a:pt x="1949178" y="3664985"/>
+                </a:lnTo>
+                <a:lnTo>
+                  <a:pt x="1724273" y="3664985"/>
+                </a:lnTo>
+                <a:lnTo>
+                  <a:pt x="1507839" y="4039827"/>
                 </a:lnTo>
                 <a:close/>
               </a:path>
@@ -1959,22 +1935,22 @@
             <a:pathLst>
               <a:path w="3123184" h="4114800">
                 <a:moveTo>
-                  <a:pt x="74968" y="291402"/>
+                  <a:pt x="74968" y="291406"/>
                 </a:moveTo>
                 <a:lnTo>
-                  <a:pt x="74968" y="1041088"/>
-                </a:lnTo>
-                <a:lnTo>
-                  <a:pt x="449810" y="1257522"/>
-                </a:lnTo>
-                <a:lnTo>
-                  <a:pt x="449810" y="1041088"/>
-                </a:lnTo>
-                <a:lnTo>
-                  <a:pt x="449810" y="666245"/>
-                </a:lnTo>
-                <a:lnTo>
-                  <a:pt x="1748338" y="1415931"/>
+                  <a:pt x="74968" y="1041090"/>
+                </a:lnTo>
+                <a:lnTo>
+                  <a:pt x="449810" y="1257524"/>
+                </a:lnTo>
+                <a:lnTo>
+                  <a:pt x="449810" y="1041090"/>
+                </a:lnTo>
+                <a:lnTo>
+                  <a:pt x="449810" y="666248"/>
+                </a:lnTo>
+                <a:lnTo>
+                  <a:pt x="1748338" y="1415932"/>
                 </a:lnTo>
                 <a:lnTo>
                   <a:pt x="1099036" y="1790774"/>
@@ -1983,103 +1959,97 @@
                   <a:pt x="1124526" y="1790774"/>
                 </a:lnTo>
                 <a:lnTo>
-                  <a:pt x="2423054" y="2540459"/>
-                </a:lnTo>
-                <a:lnTo>
-                  <a:pt x="1773752" y="2915302"/>
-                </a:lnTo>
-                <a:lnTo>
-                  <a:pt x="2398989" y="2915302"/>
-                </a:lnTo>
-                <a:lnTo>
-                  <a:pt x="3048215" y="2540459"/>
+                  <a:pt x="2423054" y="2540458"/>
+                </a:lnTo>
+                <a:lnTo>
+                  <a:pt x="1773752" y="2915301"/>
+                </a:lnTo>
+                <a:lnTo>
+                  <a:pt x="2398989" y="2915301"/>
+                </a:lnTo>
+                <a:lnTo>
+                  <a:pt x="3048215" y="2540458"/>
                 </a:lnTo>
                 <a:lnTo>
                   <a:pt x="1749762" y="1790774"/>
                 </a:lnTo>
                 <a:lnTo>
-                  <a:pt x="2398989" y="1415931"/>
-                </a:lnTo>
-                <a:lnTo>
-                  <a:pt x="2397564" y="1415931"/>
-                </a:lnTo>
-                <a:lnTo>
-                  <a:pt x="1099036" y="666245"/>
-                </a:lnTo>
-                <a:lnTo>
-                  <a:pt x="449810" y="291402"/>
-                </a:lnTo>
-                <a:lnTo>
-                  <a:pt x="74968" y="74968"/>
+                  <a:pt x="2398989" y="1415932"/>
+                </a:lnTo>
+                <a:lnTo>
+                  <a:pt x="2397564" y="1415932"/>
+                </a:lnTo>
+                <a:lnTo>
+                  <a:pt x="1099036" y="666248"/>
+                </a:lnTo>
+                <a:lnTo>
+                  <a:pt x="449810" y="291406"/>
+                </a:lnTo>
+                <a:lnTo>
+                  <a:pt x="74968" y="74972"/>
                 </a:lnTo>
                 <a:close/>
-              </a:path>
-              <a:path w="3123184" h="4114800">
                 <a:moveTo>
-                  <a:pt x="824652" y="2915302"/>
+                  <a:pt x="824652" y="2915301"/>
                 </a:moveTo>
                 <a:lnTo>
-                  <a:pt x="1199494" y="2915302"/>
-                </a:lnTo>
-                <a:lnTo>
-                  <a:pt x="1299952" y="2915302"/>
-                </a:lnTo>
-                <a:lnTo>
-                  <a:pt x="1949178" y="2540459"/>
-                </a:lnTo>
-                <a:lnTo>
-                  <a:pt x="1199494" y="2540459"/>
-                </a:lnTo>
-                <a:lnTo>
-                  <a:pt x="1199494" y="2165617"/>
-                </a:lnTo>
-                <a:lnTo>
-                  <a:pt x="824652" y="1949182"/>
+                  <a:pt x="1199494" y="2915301"/>
+                </a:lnTo>
+                <a:lnTo>
+                  <a:pt x="1299952" y="2915301"/>
+                </a:lnTo>
+                <a:lnTo>
+                  <a:pt x="1949178" y="2540458"/>
+                </a:lnTo>
+                <a:lnTo>
+                  <a:pt x="1199494" y="2540458"/>
+                </a:lnTo>
+                <a:lnTo>
+                  <a:pt x="1199494" y="2165616"/>
+                </a:lnTo>
+                <a:lnTo>
+                  <a:pt x="824652" y="1949183"/>
                 </a:lnTo>
                 <a:close/>
-              </a:path>
-              <a:path w="3123184" h="4114800">
                 <a:moveTo>
-                  <a:pt x="449810" y="1632365"/>
+                  <a:pt x="449810" y="1632366"/>
                 </a:moveTo>
                 <a:lnTo>
-                  <a:pt x="74968" y="1415931"/>
-                </a:lnTo>
-                <a:lnTo>
-                  <a:pt x="74968" y="3290145"/>
-                </a:lnTo>
-                <a:lnTo>
-                  <a:pt x="74968" y="3664988"/>
-                </a:lnTo>
-                <a:lnTo>
-                  <a:pt x="74968" y="4039831"/>
-                </a:lnTo>
-                <a:lnTo>
-                  <a:pt x="1357902" y="4039831"/>
-                </a:lnTo>
-                <a:lnTo>
-                  <a:pt x="1574336" y="3664988"/>
-                </a:lnTo>
-                <a:lnTo>
-                  <a:pt x="449810" y="3664988"/>
-                </a:lnTo>
-                <a:lnTo>
-                  <a:pt x="449810" y="3290145"/>
+                  <a:pt x="74968" y="1415932"/>
+                </a:lnTo>
+                <a:lnTo>
+                  <a:pt x="74968" y="3290143"/>
+                </a:lnTo>
+                <a:lnTo>
+                  <a:pt x="74968" y="3664985"/>
+                </a:lnTo>
+                <a:lnTo>
+                  <a:pt x="74968" y="4039827"/>
+                </a:lnTo>
+                <a:lnTo>
+                  <a:pt x="1357902" y="4039827"/>
+                </a:lnTo>
+                <a:lnTo>
+                  <a:pt x="1574336" y="3664985"/>
+                </a:lnTo>
+                <a:lnTo>
+                  <a:pt x="449810" y="3664985"/>
+                </a:lnTo>
+                <a:lnTo>
+                  <a:pt x="449810" y="3290143"/>
                 </a:lnTo>
                 <a:close/>
-              </a:path>
-              <a:path w="3123184" h="4114800">
                 <a:moveTo>
-                  <a:pt x="1732744" y="4039831"/>
+                  <a:pt x="1732744" y="4039827"/>
                 </a:moveTo>
                 <a:lnTo>
-                  <a:pt x="1949178" y="3664988"/>
-                </a:lnTo>
-                <a:lnTo>
-                  <a:pt x="1724273" y="3664988"/>
-                </a:lnTo>
-                <a:lnTo>
-                  <a:pt x="1507839" y="4039831"/>
+                  <a:pt x="1949178" y="3664985"/>
+                </a:lnTo>
+                <a:lnTo>
+                  <a:pt x="1724273" y="3664985"/>
+                </a:lnTo>
+                <a:lnTo>
+                  <a:pt x="1507839" y="4039827"/>
                 </a:lnTo>
                 <a:close/>
               </a:path>
@@ -2452,19 +2422,19 @@
             <a:pathLst>
               <a:path w="192786" h="254000">
                 <a:moveTo>
-                  <a:pt x="4627" y="17987"/>
+                  <a:pt x="4627" y="17989"/>
                 </a:moveTo>
                 <a:lnTo>
-                  <a:pt x="4627" y="64264"/>
-                </a:lnTo>
-                <a:lnTo>
-                  <a:pt x="27765" y="77624"/>
-                </a:lnTo>
-                <a:lnTo>
-                  <a:pt x="27765" y="64264"/>
-                </a:lnTo>
-                <a:lnTo>
-                  <a:pt x="27765" y="41126"/>
+                  <a:pt x="4627" y="64265"/>
+                </a:lnTo>
+                <a:lnTo>
+                  <a:pt x="27765" y="77625"/>
+                </a:lnTo>
+                <a:lnTo>
+                  <a:pt x="27765" y="64265"/>
+                </a:lnTo>
+                <a:lnTo>
+                  <a:pt x="27765" y="41127"/>
                 </a:lnTo>
                 <a:lnTo>
                   <a:pt x="107920" y="87403"/>
@@ -2476,16 +2446,16 @@
                   <a:pt x="69414" y="110541"/>
                 </a:lnTo>
                 <a:lnTo>
-                  <a:pt x="149568" y="156818"/>
-                </a:lnTo>
-                <a:lnTo>
-                  <a:pt x="109489" y="179956"/>
-                </a:lnTo>
-                <a:lnTo>
-                  <a:pt x="148083" y="179956"/>
-                </a:lnTo>
-                <a:lnTo>
-                  <a:pt x="188158" y="156818"/>
+                  <a:pt x="149568" y="156817"/>
+                </a:lnTo>
+                <a:lnTo>
+                  <a:pt x="109489" y="179955"/>
+                </a:lnTo>
+                <a:lnTo>
+                  <a:pt x="148083" y="179955"/>
+                </a:lnTo>
+                <a:lnTo>
+                  <a:pt x="188158" y="156817"/>
                 </a:lnTo>
                 <a:lnTo>
                   <a:pt x="108008" y="110541"/>
@@ -2497,41 +2467,37 @@
                   <a:pt x="147995" y="87403"/>
                 </a:lnTo>
                 <a:lnTo>
-                  <a:pt x="67840" y="41126"/>
-                </a:lnTo>
-                <a:lnTo>
-                  <a:pt x="27765" y="17987"/>
-                </a:lnTo>
-                <a:lnTo>
-                  <a:pt x="4627" y="4627"/>
+                  <a:pt x="67840" y="41127"/>
+                </a:lnTo>
+                <a:lnTo>
+                  <a:pt x="27765" y="17989"/>
+                </a:lnTo>
+                <a:lnTo>
+                  <a:pt x="4627" y="4629"/>
                 </a:lnTo>
                 <a:close/>
-              </a:path>
-              <a:path w="192786" h="254000">
                 <a:moveTo>
-                  <a:pt x="50903" y="179956"/>
+                  <a:pt x="50903" y="179955"/>
                 </a:moveTo>
                 <a:lnTo>
-                  <a:pt x="74041" y="179956"/>
-                </a:lnTo>
-                <a:lnTo>
-                  <a:pt x="80242" y="179956"/>
-                </a:lnTo>
-                <a:lnTo>
-                  <a:pt x="120317" y="156818"/>
-                </a:lnTo>
-                <a:lnTo>
-                  <a:pt x="74041" y="156818"/>
-                </a:lnTo>
-                <a:lnTo>
-                  <a:pt x="74041" y="133680"/>
-                </a:lnTo>
-                <a:lnTo>
-                  <a:pt x="50903" y="120319"/>
+                  <a:pt x="74041" y="179955"/>
+                </a:lnTo>
+                <a:lnTo>
+                  <a:pt x="80242" y="179955"/>
+                </a:lnTo>
+                <a:lnTo>
+                  <a:pt x="120317" y="156817"/>
+                </a:lnTo>
+                <a:lnTo>
+                  <a:pt x="74041" y="156817"/>
+                </a:lnTo>
+                <a:lnTo>
+                  <a:pt x="74041" y="133679"/>
+                </a:lnTo>
+                <a:lnTo>
+                  <a:pt x="50903" y="120320"/>
                 </a:lnTo>
                 <a:close/>
-              </a:path>
-              <a:path w="192786" h="254000">
                 <a:moveTo>
                   <a:pt x="27765" y="100763"/>
                 </a:moveTo>
@@ -2539,40 +2505,38 @@
                   <a:pt x="4627" y="87403"/>
                 </a:lnTo>
                 <a:lnTo>
-                  <a:pt x="4627" y="203095"/>
-                </a:lnTo>
-                <a:lnTo>
-                  <a:pt x="4627" y="226233"/>
-                </a:lnTo>
-                <a:lnTo>
-                  <a:pt x="4627" y="249372"/>
-                </a:lnTo>
-                <a:lnTo>
-                  <a:pt x="83819" y="249372"/>
-                </a:lnTo>
-                <a:lnTo>
-                  <a:pt x="97179" y="226233"/>
-                </a:lnTo>
-                <a:lnTo>
-                  <a:pt x="27765" y="226233"/>
-                </a:lnTo>
-                <a:lnTo>
-                  <a:pt x="27765" y="203095"/>
+                  <a:pt x="4627" y="203094"/>
+                </a:lnTo>
+                <a:lnTo>
+                  <a:pt x="4627" y="226232"/>
+                </a:lnTo>
+                <a:lnTo>
+                  <a:pt x="4627" y="249370"/>
+                </a:lnTo>
+                <a:lnTo>
+                  <a:pt x="83819" y="249370"/>
+                </a:lnTo>
+                <a:lnTo>
+                  <a:pt x="97179" y="226232"/>
+                </a:lnTo>
+                <a:lnTo>
+                  <a:pt x="27765" y="226232"/>
+                </a:lnTo>
+                <a:lnTo>
+                  <a:pt x="27765" y="203094"/>
                 </a:lnTo>
                 <a:close/>
-              </a:path>
-              <a:path w="192786" h="254000">
                 <a:moveTo>
-                  <a:pt x="106957" y="249372"/>
+                  <a:pt x="106957" y="249370"/>
                 </a:moveTo>
                 <a:lnTo>
-                  <a:pt x="120317" y="226233"/>
-                </a:lnTo>
-                <a:lnTo>
-                  <a:pt x="106434" y="226233"/>
-                </a:lnTo>
-                <a:lnTo>
-                  <a:pt x="93075" y="249372"/>
+                  <a:pt x="120317" y="226232"/>
+                </a:lnTo>
+                <a:lnTo>
+                  <a:pt x="106434" y="226232"/>
+                </a:lnTo>
+                <a:lnTo>
+                  <a:pt x="93075" y="249370"/>
                 </a:lnTo>
                 <a:close/>
               </a:path>
@@ -2866,19 +2830,19 @@
             <a:pathLst>
               <a:path w="192786" h="254000">
                 <a:moveTo>
-                  <a:pt x="4627" y="17987"/>
+                  <a:pt x="4627" y="17989"/>
                 </a:moveTo>
                 <a:lnTo>
-                  <a:pt x="4627" y="64264"/>
-                </a:lnTo>
-                <a:lnTo>
-                  <a:pt x="27765" y="77624"/>
-                </a:lnTo>
-                <a:lnTo>
-                  <a:pt x="27765" y="64264"/>
-                </a:lnTo>
-                <a:lnTo>
-                  <a:pt x="27765" y="41126"/>
+                  <a:pt x="4627" y="64265"/>
+                </a:lnTo>
+                <a:lnTo>
+                  <a:pt x="27765" y="77625"/>
+                </a:lnTo>
+                <a:lnTo>
+                  <a:pt x="27765" y="64265"/>
+                </a:lnTo>
+                <a:lnTo>
+                  <a:pt x="27765" y="41127"/>
                 </a:lnTo>
                 <a:lnTo>
                   <a:pt x="107920" y="87403"/>
@@ -2890,16 +2854,16 @@
                   <a:pt x="69414" y="110541"/>
                 </a:lnTo>
                 <a:lnTo>
-                  <a:pt x="149568" y="156818"/>
-                </a:lnTo>
-                <a:lnTo>
-                  <a:pt x="109489" y="179956"/>
-                </a:lnTo>
-                <a:lnTo>
-                  <a:pt x="148083" y="179956"/>
-                </a:lnTo>
-                <a:lnTo>
-                  <a:pt x="188158" y="156818"/>
+                  <a:pt x="149568" y="156817"/>
+                </a:lnTo>
+                <a:lnTo>
+                  <a:pt x="109489" y="179955"/>
+                </a:lnTo>
+                <a:lnTo>
+                  <a:pt x="148083" y="179955"/>
+                </a:lnTo>
+                <a:lnTo>
+                  <a:pt x="188158" y="156817"/>
                 </a:lnTo>
                 <a:lnTo>
                   <a:pt x="108008" y="110541"/>
@@ -2911,41 +2875,37 @@
                   <a:pt x="147995" y="87403"/>
                 </a:lnTo>
                 <a:lnTo>
-                  <a:pt x="67840" y="41126"/>
-                </a:lnTo>
-                <a:lnTo>
-                  <a:pt x="27765" y="17987"/>
-                </a:lnTo>
-                <a:lnTo>
-                  <a:pt x="4627" y="4627"/>
+                  <a:pt x="67840" y="41127"/>
+                </a:lnTo>
+                <a:lnTo>
+                  <a:pt x="27765" y="17989"/>
+                </a:lnTo>
+                <a:lnTo>
+                  <a:pt x="4627" y="4629"/>
                 </a:lnTo>
                 <a:close/>
-              </a:path>
-              <a:path w="192786" h="254000">
                 <a:moveTo>
-                  <a:pt x="50903" y="179956"/>
+                  <a:pt x="50903" y="179955"/>
                 </a:moveTo>
                 <a:lnTo>
-                  <a:pt x="74041" y="179956"/>
-                </a:lnTo>
-                <a:lnTo>
-                  <a:pt x="80242" y="179956"/>
-                </a:lnTo>
-                <a:lnTo>
-                  <a:pt x="120317" y="156818"/>
-                </a:lnTo>
-                <a:lnTo>
-                  <a:pt x="74041" y="156818"/>
-                </a:lnTo>
-                <a:lnTo>
-                  <a:pt x="74041" y="133680"/>
-                </a:lnTo>
-                <a:lnTo>
-                  <a:pt x="50903" y="120319"/>
+                  <a:pt x="74041" y="179955"/>
+                </a:lnTo>
+                <a:lnTo>
+                  <a:pt x="80242" y="179955"/>
+                </a:lnTo>
+                <a:lnTo>
+                  <a:pt x="120317" y="156817"/>
+                </a:lnTo>
+                <a:lnTo>
+                  <a:pt x="74041" y="156817"/>
+                </a:lnTo>
+                <a:lnTo>
+                  <a:pt x="74041" y="133679"/>
+                </a:lnTo>
+                <a:lnTo>
+                  <a:pt x="50903" y="120320"/>
                 </a:lnTo>
                 <a:close/>
-              </a:path>
-              <a:path w="192786" h="254000">
                 <a:moveTo>
                   <a:pt x="27765" y="100763"/>
                 </a:moveTo>
@@ -2953,40 +2913,38 @@
                   <a:pt x="4627" y="87403"/>
                 </a:lnTo>
                 <a:lnTo>
-                  <a:pt x="4627" y="203095"/>
-                </a:lnTo>
-                <a:lnTo>
-                  <a:pt x="4627" y="226233"/>
-                </a:lnTo>
-                <a:lnTo>
-                  <a:pt x="4627" y="249372"/>
-                </a:lnTo>
-                <a:lnTo>
-                  <a:pt x="83819" y="249372"/>
-                </a:lnTo>
-                <a:lnTo>
-                  <a:pt x="97179" y="226233"/>
-                </a:lnTo>
-                <a:lnTo>
-                  <a:pt x="27765" y="226233"/>
-                </a:lnTo>
-                <a:lnTo>
-                  <a:pt x="27765" y="203095"/>
+                  <a:pt x="4627" y="203094"/>
+                </a:lnTo>
+                <a:lnTo>
+                  <a:pt x="4627" y="226232"/>
+                </a:lnTo>
+                <a:lnTo>
+                  <a:pt x="4627" y="249370"/>
+                </a:lnTo>
+                <a:lnTo>
+                  <a:pt x="83819" y="249370"/>
+                </a:lnTo>
+                <a:lnTo>
+                  <a:pt x="97179" y="226232"/>
+                </a:lnTo>
+                <a:lnTo>
+                  <a:pt x="27765" y="226232"/>
+                </a:lnTo>
+                <a:lnTo>
+                  <a:pt x="27765" y="203094"/>
                 </a:lnTo>
                 <a:close/>
-              </a:path>
-              <a:path w="192786" h="254000">
                 <a:moveTo>
-                  <a:pt x="106957" y="249372"/>
+                  <a:pt x="106957" y="249370"/>
                 </a:moveTo>
                 <a:lnTo>
-                  <a:pt x="120317" y="226233"/>
-                </a:lnTo>
-                <a:lnTo>
-                  <a:pt x="106434" y="226233"/>
-                </a:lnTo>
-                <a:lnTo>
-                  <a:pt x="93075" y="249372"/>
+                  <a:pt x="120317" y="226232"/>
+                </a:lnTo>
+                <a:lnTo>
+                  <a:pt x="106434" y="226232"/>
+                </a:lnTo>
+                <a:lnTo>
+                  <a:pt x="93075" y="249370"/>
                 </a:lnTo>
                 <a:close/>
               </a:path>

--- a/bigtree/samples/bigtree_lab_tables.pptx
+++ b/bigtree/samples/bigtree_lab_tables.pptx
@@ -9054,7 +9054,7 @@
                 <a:buNone/>
                 <a:defRPr sz="1400" b="0">
                   <a:solidFill>
-                    <a:schemeClr val="bg1"/>
+                    <a:schemeClr val="tx1"/>
                   </a:solidFill>
                   <a:latin typeface="+mn-lt"/>
                   <a:ea typeface="+mn-ea"/>

--- a/bigtree/samples/bigtree_lab_tables.pptx
+++ b/bigtree/samples/bigtree_lab_tables.pptx
@@ -26,6 +26,9 @@
     <p:sldId id="412" r:id="rIdOrg12"/>
     <p:sldId id="413" r:id="rIdOrg13"/>
     <p:sldId id="414" r:id="rIdOrg14"/>
+    <p:sldId id="415" r:id="rIdOrg15"/>
+    <p:sldId id="416" r:id="rIdOrg16"/>
+    <p:sldId id="417" r:id="rIdOrg17"/>
     <p:sldId id="451" r:id="rIdStruct1"/>
     <p:sldId id="452" r:id="rIdStruct2"/>
     <p:sldId id="501" r:id="rIdTbl1"/>
@@ -13926,35 +13929,57 @@
           <a:p>
             <a:r>
               <a:rPr lang="ja-JP"/>
-              <a:t>目次</a:t>
+              <a:t>申込経路の入れ替わり</a:t>
+            </a:r>
+          </a:p>
+        </p:txBody>
+      </p:sp>
+      <p:sp>
+        <p:nvSpPr>
+          <p:cNvPr id="3" name="Lead"/>
+          <p:cNvSpPr>
+            <a:spLocks noGrp="1"/>
+          </p:cNvSpPr>
+          <p:nvPr>
+            <p:ph type="body" idx="13" sz="quarter"/>
+          </p:nvPr>
+        </p:nvSpPr>
+        <p:spPr/>
+        <p:txBody>
+          <a:bodyPr/>
+          <a:lstStyle/>
+          <a:p>
+            <a:r>
+              <a:rPr lang="ja-JP"/>
+              <a:t>2023年にオンラインが紙を上回った</a:t>
             </a:r>
           </a:p>
         </p:txBody>
       </p:sp>
       <p:grpSp>
         <p:nvGrpSpPr>
-          <p:cNvPr id="33" name="organism/O-S1 目次"/>
+          <p:cNvPr id="16" name="organism/O-B24 逆転（2つの推移の交差）"/>
           <p:cNvGrpSpPr/>
           <p:nvPr/>
         </p:nvGrpSpPr>
         <p:grpSpPr>
           <a:xfrm>
-            <a:off x="457200" y="965200"/>
-            <a:ext cx="8229600" cy="3657600"/>
-            <a:chOff x="457200" y="965200"/>
-            <a:chExt cx="8229600" cy="3657600"/>
+            <a:off x="457200" y="1527175"/>
+            <a:ext cx="8229600" cy="2940050"/>
+            <a:chOff x="457200" y="1527175"/>
+            <a:chExt cx="8229600" cy="2940050"/>
           </a:xfrm>
         </p:grpSpPr>
         <p:sp>
           <p:nvSpPr>
-            <p:cNvPr id="3" name="Rule_01"/>
+            <p:cNvPr id="4" name="Axis"/>
             <p:cNvSpPr/>
             <p:nvPr/>
           </p:nvSpPr>
           <p:spPr>
             <a:xfrm>
-              <a:off x="457200" y="965200"/>
-              <a:ext cx="3962400" cy="12700"/>
+              <a:off x="457200" y="3889375"/>
+              <a:ext cx="6731000" cy="12700"/>
             </a:xfrm>
             <a:prstGeom prst="rect">
               <a:avLst/>
@@ -13969,14 +13994,14 @@
         </p:sp>
         <p:sp>
           <p:nvSpPr>
-            <p:cNvPr id="4" name="Rule_02"/>
+            <p:cNvPr id="5" name="Drop_交点"/>
             <p:cNvSpPr/>
             <p:nvPr/>
           </p:nvSpPr>
           <p:spPr>
             <a:xfrm>
-              <a:off x="4724400" y="965200"/>
-              <a:ext cx="3962400" cy="12700"/>
+              <a:off x="4081399" y="2861500"/>
+              <a:ext cx="12700" cy="1027874"/>
             </a:xfrm>
             <a:prstGeom prst="rect">
               <a:avLst/>
@@ -13991,20 +14016,106 @@
         </p:sp>
         <p:sp>
           <p:nvSpPr>
-            <p:cNvPr id="5" name="Rule_03"/>
+            <p:cNvPr id="6" name="Line_旧"/>
             <p:cNvSpPr/>
             <p:nvPr/>
           </p:nvSpPr>
           <p:spPr>
             <a:xfrm>
-              <a:off x="457200" y="2235200"/>
-              <a:ext cx="3962400" cy="12700"/>
-            </a:xfrm>
-            <a:prstGeom prst="rect">
+              <a:off x="457200" y="1976755"/>
+              <a:ext cx="6731000" cy="1577340"/>
+            </a:xfrm>
+            <a:custGeom>
+              <a:avLst/>
+              <a:gdLst/>
+              <a:ahLst/>
+              <a:cxnLst/>
+              <a:rect l="0" t="0" r="r" b="b"/>
+              <a:pathLst>
+                <a:path w="6731000" h="1577340" fill="none">
+                  <a:moveTo>
+                    <a:pt x="0" y="0"/>
+                  </a:moveTo>
+                  <a:lnTo>
+                    <a:pt x="1649095" y="154305"/>
+                  </a:lnTo>
+                  <a:lnTo>
+                    <a:pt x="4193413" y="994410"/>
+                  </a:lnTo>
+                  <a:lnTo>
+                    <a:pt x="6731000" y="1577340"/>
+                  </a:lnTo>
+                </a:path>
+              </a:pathLst>
+            </a:custGeom>
+            <a:noFill/>
+            <a:ln w="25400" cap="flat">
+              <a:solidFill>
+                <a:schemeClr val="accent3"/>
+              </a:solidFill>
+              <a:miter lim="800000"/>
+            </a:ln>
+          </p:spPr>
+        </p:sp>
+        <p:sp>
+          <p:nvSpPr>
+            <p:cNvPr id="7" name="Line_新"/>
+            <p:cNvSpPr/>
+            <p:nvPr/>
+          </p:nvSpPr>
+          <p:spPr>
+            <a:xfrm>
+              <a:off x="457200" y="1908175"/>
+              <a:ext cx="6731000" cy="1628775"/>
+            </a:xfrm>
+            <a:custGeom>
+              <a:avLst/>
+              <a:gdLst/>
+              <a:ahLst/>
+              <a:cxnLst/>
+              <a:rect l="0" t="0" r="r" b="b"/>
+              <a:pathLst>
+                <a:path w="6731000" h="1628775" fill="none">
+                  <a:moveTo>
+                    <a:pt x="0" y="1628775"/>
+                  </a:moveTo>
+                  <a:lnTo>
+                    <a:pt x="2160651" y="1337310"/>
+                  </a:lnTo>
+                  <a:lnTo>
+                    <a:pt x="4570349" y="582930"/>
+                  </a:lnTo>
+                  <a:lnTo>
+                    <a:pt x="6731000" y="0"/>
+                  </a:lnTo>
+                </a:path>
+              </a:pathLst>
+            </a:custGeom>
+            <a:noFill/>
+            <a:ln w="31750" cap="flat">
+              <a:solidFill>
+                <a:schemeClr val="accent1"/>
+              </a:solidFill>
+              <a:miter lim="800000"/>
+            </a:ln>
+          </p:spPr>
+        </p:sp>
+        <p:sp>
+          <p:nvSpPr>
+            <p:cNvPr id="8" name="Dot_交点"/>
+            <p:cNvSpPr/>
+            <p:nvPr/>
+          </p:nvSpPr>
+          <p:spPr>
+            <a:xfrm>
+              <a:off x="4030599" y="2728150"/>
+              <a:ext cx="114300" cy="114300"/>
+            </a:xfrm>
+            <a:prstGeom prst="ellipse">
               <a:avLst/>
             </a:prstGeom>
             <a:solidFill>
-              <a:schemeClr val="accent5"/>
+              <a:schemeClr val="accent6"/>
             </a:solidFill>
             <a:ln>
               <a:noFill/>
@@ -14013,80 +14124,60 @@
         </p:sp>
         <p:sp>
           <p:nvSpPr>
-            <p:cNvPr id="6" name="Rule_04"/>
-            <p:cNvSpPr/>
-            <p:nvPr/>
-          </p:nvSpPr>
-          <p:spPr>
-            <a:xfrm>
-              <a:off x="4724400" y="2235200"/>
-              <a:ext cx="3962400" cy="12700"/>
-            </a:xfrm>
-            <a:prstGeom prst="rect">
-              <a:avLst/>
-            </a:prstGeom>
-            <a:solidFill>
-              <a:schemeClr val="accent5"/>
-            </a:solidFill>
-            <a:ln>
-              <a:noFill/>
-            </a:ln>
-          </p:spPr>
-        </p:sp>
-        <p:sp>
-          <p:nvSpPr>
-            <p:cNvPr id="7" name="Rule_05"/>
-            <p:cNvSpPr/>
-            <p:nvPr/>
-          </p:nvSpPr>
-          <p:spPr>
-            <a:xfrm>
-              <a:off x="457200" y="3505200"/>
-              <a:ext cx="3962400" cy="12700"/>
-            </a:xfrm>
-            <a:prstGeom prst="rect">
-              <a:avLst/>
-            </a:prstGeom>
-            <a:solidFill>
-              <a:schemeClr val="accent5"/>
-            </a:solidFill>
-            <a:ln>
-              <a:noFill/>
-            </a:ln>
-          </p:spPr>
-        </p:sp>
-        <p:sp>
-          <p:nvSpPr>
-            <p:cNvPr id="8" name="Rule_06"/>
-            <p:cNvSpPr/>
-            <p:nvPr/>
-          </p:nvSpPr>
-          <p:spPr>
-            <a:xfrm>
-              <a:off x="4724400" y="3505200"/>
-              <a:ext cx="3962400" cy="12700"/>
-            </a:xfrm>
-            <a:prstGeom prst="rect">
-              <a:avLst/>
-            </a:prstGeom>
-            <a:solidFill>
-              <a:schemeClr val="accent5"/>
-            </a:solidFill>
-            <a:ln>
-              <a:noFill/>
-            </a:ln>
-          </p:spPr>
-        </p:sp>
-        <p:sp>
-          <p:nvSpPr>
-            <p:cNvPr id="9" name="No_01"/>
+            <p:cNvPr id="9" name="Label_交点"/>
             <p:cNvSpPr txBox="1"/>
             <p:nvPr/>
           </p:nvSpPr>
           <p:spPr>
             <a:xfrm>
-              <a:off x="457200" y="1117600"/>
-              <a:ext cx="381000" cy="247650"/>
+              <a:off x="3389249" y="2277300"/>
+              <a:ext cx="1397000" cy="196850"/>
+            </a:xfrm>
+            <a:prstGeom prst="rect">
+              <a:avLst/>
+            </a:prstGeom>
+            <a:noFill/>
+          </p:spPr>
+          <p:txBody>
+            <a:bodyPr wrap="square" lIns="0" tIns="0" rIns="0" bIns="0" anchor="ctr">
+              <a:noAutofit/>
+            </a:bodyPr>
+            <a:lstStyle>
+              <a:lvl1pPr marL="0" indent="0" algn="ctr">
+                <a:lnSpc>
+                  <a:spcPts val="1540"/>
+                </a:lnSpc>
+                <a:spcBef>
+                  <a:spcPts val="0"/>
+                </a:spcBef>
+                <a:buNone/>
+                <a:defRPr sz="1100" b="0">
+                  <a:solidFill>
+                    <a:schemeClr val="accent6"/>
+                  </a:solidFill>
+                  <a:latin typeface="+mn-lt"/>
+                  <a:ea typeface="+mn-ea"/>
+                </a:defRPr>
+              </a:lvl1pPr>
+            </a:lstStyle>
+            <a:p>
+              <a:r>
+                <a:rPr lang="ja-JP"/>
+                <a:t>2023年に逆転</a:t>
+              </a:r>
+            </a:p>
+          </p:txBody>
+        </p:sp>
+        <p:sp>
+          <p:nvSpPr>
+            <p:cNvPr id="10" name="Label_旧"/>
+            <p:cNvSpPr txBox="1"/>
+            <p:nvPr/>
+          </p:nvSpPr>
+          <p:spPr>
+            <a:xfrm>
+              <a:off x="457200" y="1640205"/>
+              <a:ext cx="2032000" cy="247650"/>
             </a:xfrm>
             <a:prstGeom prst="rect">
               <a:avLst/>
@@ -14099,6 +14190,52 @@
             </a:bodyPr>
             <a:lstStyle>
               <a:lvl1pPr marL="0" indent="0" algn="l">
+                <a:lnSpc>
+                  <a:spcPts val="1960"/>
+                </a:lnSpc>
+                <a:spcBef>
+                  <a:spcPts val="0"/>
+                </a:spcBef>
+                <a:buNone/>
+                <a:defRPr sz="1400" b="0">
+                  <a:solidFill>
+                    <a:schemeClr val="tx2"/>
+                  </a:solidFill>
+                  <a:latin typeface="+mn-lt"/>
+                  <a:ea typeface="+mn-ea"/>
+                </a:defRPr>
+              </a:lvl1pPr>
+            </a:lstStyle>
+            <a:p>
+              <a:r>
+                <a:rPr lang="ja-JP"/>
+                <a:t>紙の申込書</a:t>
+              </a:r>
+            </a:p>
+          </p:txBody>
+        </p:sp>
+        <p:sp>
+          <p:nvSpPr>
+            <p:cNvPr id="11" name="Label_新"/>
+            <p:cNvSpPr txBox="1"/>
+            <p:nvPr/>
+          </p:nvSpPr>
+          <p:spPr>
+            <a:xfrm>
+              <a:off x="5156200" y="1571625"/>
+              <a:ext cx="2032000" cy="247650"/>
+            </a:xfrm>
+            <a:prstGeom prst="rect">
+              <a:avLst/>
+            </a:prstGeom>
+            <a:noFill/>
+          </p:spPr>
+          <p:txBody>
+            <a:bodyPr wrap="square" lIns="0" tIns="0" rIns="0" bIns="0" anchor="ctr">
+              <a:noAutofit/>
+            </a:bodyPr>
+            <a:lstStyle>
+              <a:lvl1pPr marL="0" indent="0" algn="r">
                 <a:lnSpc>
                   <a:spcPts val="1960"/>
                 </a:lnSpc>
@@ -14118,21 +14255,21 @@
             <a:p>
               <a:r>
                 <a:rPr lang="ja-JP"/>
-                <a:t>01</a:t>
+                <a:t>オンライン申込</a:t>
               </a:r>
             </a:p>
           </p:txBody>
         </p:sp>
         <p:sp>
           <p:nvSpPr>
-            <p:cNvPr id="10" name="No_02"/>
+            <p:cNvPr id="12" name="Axis_始"/>
             <p:cNvSpPr txBox="1"/>
             <p:nvPr/>
           </p:nvSpPr>
           <p:spPr>
             <a:xfrm>
-              <a:off x="4724400" y="1117600"/>
-              <a:ext cx="381000" cy="247650"/>
+              <a:off x="457200" y="3965575"/>
+              <a:ext cx="1270000" cy="139700"/>
             </a:xfrm>
             <a:prstGeom prst="rect">
               <a:avLst/>
@@ -14146,15 +14283,15 @@
             <a:lstStyle>
               <a:lvl1pPr marL="0" indent="0" algn="l">
                 <a:lnSpc>
-                  <a:spcPts val="1960"/>
+                  <a:spcPts val="1080"/>
                 </a:lnSpc>
                 <a:spcBef>
                   <a:spcPts val="0"/>
                 </a:spcBef>
                 <a:buNone/>
-                <a:defRPr sz="1400" b="0">
+                <a:defRPr sz="900" b="0">
                   <a:solidFill>
-                    <a:schemeClr val="accent1"/>
+                    <a:schemeClr val="tx2"/>
                   </a:solidFill>
                   <a:latin typeface="+mn-lt"/>
                   <a:ea typeface="+mn-ea"/>
@@ -14164,21 +14301,21 @@
             <a:p>
               <a:r>
                 <a:rPr lang="ja-JP"/>
-                <a:t>02</a:t>
+                <a:t>2021年</a:t>
               </a:r>
             </a:p>
           </p:txBody>
         </p:sp>
         <p:sp>
           <p:nvSpPr>
-            <p:cNvPr id="11" name="No_03"/>
+            <p:cNvPr id="13" name="Axis_交点"/>
             <p:cNvSpPr txBox="1"/>
             <p:nvPr/>
           </p:nvSpPr>
           <p:spPr>
             <a:xfrm>
-              <a:off x="457200" y="2387600"/>
-              <a:ext cx="381000" cy="247650"/>
+              <a:off x="3452749" y="3965575"/>
+              <a:ext cx="1270000" cy="139700"/>
             </a:xfrm>
             <a:prstGeom prst="rect">
               <a:avLst/>
@@ -14190,17 +14327,17 @@
               <a:noAutofit/>
             </a:bodyPr>
             <a:lstStyle>
-              <a:lvl1pPr marL="0" indent="0" algn="l">
+              <a:lvl1pPr marL="0" indent="0" algn="ctr">
                 <a:lnSpc>
-                  <a:spcPts val="1960"/>
+                  <a:spcPts val="1080"/>
                 </a:lnSpc>
                 <a:spcBef>
                   <a:spcPts val="0"/>
                 </a:spcBef>
                 <a:buNone/>
-                <a:defRPr sz="1400" b="0">
+                <a:defRPr sz="900" b="0">
                   <a:solidFill>
-                    <a:schemeClr val="accent1"/>
+                    <a:schemeClr val="accent6"/>
                   </a:solidFill>
                   <a:latin typeface="+mn-lt"/>
                   <a:ea typeface="+mn-ea"/>
@@ -14210,21 +14347,21 @@
             <a:p>
               <a:r>
                 <a:rPr lang="ja-JP"/>
-                <a:t>03</a:t>
+                <a:t>2023年</a:t>
               </a:r>
             </a:p>
           </p:txBody>
         </p:sp>
         <p:sp>
           <p:nvSpPr>
-            <p:cNvPr id="12" name="No_04"/>
+            <p:cNvPr id="14" name="Axis_終"/>
             <p:cNvSpPr txBox="1"/>
             <p:nvPr/>
           </p:nvSpPr>
           <p:spPr>
             <a:xfrm>
-              <a:off x="4724400" y="2387600"/>
-              <a:ext cx="381000" cy="247650"/>
+              <a:off x="5918200" y="3965575"/>
+              <a:ext cx="1270000" cy="139700"/>
             </a:xfrm>
             <a:prstGeom prst="rect">
               <a:avLst/>
@@ -14236,17 +14373,17 @@
               <a:noAutofit/>
             </a:bodyPr>
             <a:lstStyle>
-              <a:lvl1pPr marL="0" indent="0" algn="l">
+              <a:lvl1pPr marL="0" indent="0" algn="r">
                 <a:lnSpc>
-                  <a:spcPts val="1960"/>
+                  <a:spcPts val="1080"/>
                 </a:lnSpc>
                 <a:spcBef>
                   <a:spcPts val="0"/>
                 </a:spcBef>
                 <a:buNone/>
-                <a:defRPr sz="1400" b="0">
+                <a:defRPr sz="900" b="0">
                   <a:solidFill>
-                    <a:schemeClr val="accent1"/>
+                    <a:schemeClr val="tx2"/>
                   </a:solidFill>
                   <a:latin typeface="+mn-lt"/>
                   <a:ea typeface="+mn-ea"/>
@@ -14256,389 +14393,21 @@
             <a:p>
               <a:r>
                 <a:rPr lang="ja-JP"/>
-                <a:t>04</a:t>
+                <a:t>2025年</a:t>
               </a:r>
             </a:p>
           </p:txBody>
         </p:sp>
         <p:sp>
           <p:nvSpPr>
-            <p:cNvPr id="13" name="No_05"/>
+            <p:cNvPr id="15" name="Note"/>
             <p:cNvSpPr txBox="1"/>
             <p:nvPr/>
           </p:nvSpPr>
           <p:spPr>
             <a:xfrm>
-              <a:off x="457200" y="3657600"/>
-              <a:ext cx="381000" cy="247650"/>
-            </a:xfrm>
-            <a:prstGeom prst="rect">
-              <a:avLst/>
-            </a:prstGeom>
-            <a:noFill/>
-          </p:spPr>
-          <p:txBody>
-            <a:bodyPr wrap="square" lIns="0" tIns="0" rIns="0" bIns="0" anchor="ctr">
-              <a:noAutofit/>
-            </a:bodyPr>
-            <a:lstStyle>
-              <a:lvl1pPr marL="0" indent="0" algn="l">
-                <a:lnSpc>
-                  <a:spcPts val="1960"/>
-                </a:lnSpc>
-                <a:spcBef>
-                  <a:spcPts val="0"/>
-                </a:spcBef>
-                <a:buNone/>
-                <a:defRPr sz="1400" b="0">
-                  <a:solidFill>
-                    <a:schemeClr val="accent1"/>
-                  </a:solidFill>
-                  <a:latin typeface="+mn-lt"/>
-                  <a:ea typeface="+mn-ea"/>
-                </a:defRPr>
-              </a:lvl1pPr>
-            </a:lstStyle>
-            <a:p>
-              <a:r>
-                <a:rPr lang="ja-JP"/>
-                <a:t>05</a:t>
-              </a:r>
-            </a:p>
-          </p:txBody>
-        </p:sp>
-        <p:sp>
-          <p:nvSpPr>
-            <p:cNvPr id="14" name="No_06"/>
-            <p:cNvSpPr txBox="1"/>
-            <p:nvPr/>
-          </p:nvSpPr>
-          <p:spPr>
-            <a:xfrm>
-              <a:off x="4724400" y="3657600"/>
-              <a:ext cx="381000" cy="247650"/>
-            </a:xfrm>
-            <a:prstGeom prst="rect">
-              <a:avLst/>
-            </a:prstGeom>
-            <a:noFill/>
-          </p:spPr>
-          <p:txBody>
-            <a:bodyPr wrap="square" lIns="0" tIns="0" rIns="0" bIns="0" anchor="ctr">
-              <a:noAutofit/>
-            </a:bodyPr>
-            <a:lstStyle>
-              <a:lvl1pPr marL="0" indent="0" algn="l">
-                <a:lnSpc>
-                  <a:spcPts val="1960"/>
-                </a:lnSpc>
-                <a:spcBef>
-                  <a:spcPts val="0"/>
-                </a:spcBef>
-                <a:buNone/>
-                <a:defRPr sz="1400" b="0">
-                  <a:solidFill>
-                    <a:schemeClr val="accent1"/>
-                  </a:solidFill>
-                  <a:latin typeface="+mn-lt"/>
-                  <a:ea typeface="+mn-ea"/>
-                </a:defRPr>
-              </a:lvl1pPr>
-            </a:lstStyle>
-            <a:p>
-              <a:r>
-                <a:rPr lang="ja-JP"/>
-                <a:t>06</a:t>
-              </a:r>
-            </a:p>
-          </p:txBody>
-        </p:sp>
-        <p:sp>
-          <p:nvSpPr>
-            <p:cNvPr id="15" name="Title_01"/>
-            <p:cNvSpPr txBox="1"/>
-            <p:nvPr/>
-          </p:nvSpPr>
-          <p:spPr>
-            <a:xfrm>
-              <a:off x="914400" y="1079500"/>
-              <a:ext cx="2946400" cy="298450"/>
-            </a:xfrm>
-            <a:prstGeom prst="rect">
-              <a:avLst/>
-            </a:prstGeom>
-            <a:noFill/>
-          </p:spPr>
-          <p:txBody>
-            <a:bodyPr wrap="square" lIns="0" tIns="0" rIns="0" bIns="0" anchor="ctr">
-              <a:noAutofit/>
-            </a:bodyPr>
-            <a:lstStyle>
-              <a:lvl1pPr marL="0" indent="0" algn="l">
-                <a:lnSpc>
-                  <a:spcPts val="2340"/>
-                </a:lnSpc>
-                <a:spcBef>
-                  <a:spcPts val="0"/>
-                </a:spcBef>
-                <a:buNone/>
-                <a:defRPr sz="1800" b="1">
-                  <a:solidFill>
-                    <a:schemeClr val="tx1"/>
-                  </a:solidFill>
-                  <a:latin typeface="+mn-lt"/>
-                  <a:ea typeface="+mn-ea"/>
-                </a:defRPr>
-              </a:lvl1pPr>
-            </a:lstStyle>
-            <a:p>
-              <a:r>
-                <a:rPr lang="ja-JP"/>
-                <a:t>今月の読まれ方</a:t>
-              </a:r>
-            </a:p>
-          </p:txBody>
-        </p:sp>
-        <p:sp>
-          <p:nvSpPr>
-            <p:cNvPr id="16" name="Title_02"/>
-            <p:cNvSpPr txBox="1"/>
-            <p:nvPr/>
-          </p:nvSpPr>
-          <p:spPr>
-            <a:xfrm>
-              <a:off x="5181600" y="1079500"/>
-              <a:ext cx="2946400" cy="298450"/>
-            </a:xfrm>
-            <a:prstGeom prst="rect">
-              <a:avLst/>
-            </a:prstGeom>
-            <a:noFill/>
-          </p:spPr>
-          <p:txBody>
-            <a:bodyPr wrap="square" lIns="0" tIns="0" rIns="0" bIns="0" anchor="ctr">
-              <a:noAutofit/>
-            </a:bodyPr>
-            <a:lstStyle>
-              <a:lvl1pPr marL="0" indent="0" algn="l">
-                <a:lnSpc>
-                  <a:spcPts val="2340"/>
-                </a:lnSpc>
-                <a:spcBef>
-                  <a:spcPts val="0"/>
-                </a:spcBef>
-                <a:buNone/>
-                <a:defRPr sz="1800" b="1">
-                  <a:solidFill>
-                    <a:schemeClr val="tx1"/>
-                  </a:solidFill>
-                  <a:latin typeface="+mn-lt"/>
-                  <a:ea typeface="+mn-ea"/>
-                </a:defRPr>
-              </a:lvl1pPr>
-            </a:lstStyle>
-            <a:p>
-              <a:r>
-                <a:rPr lang="ja-JP"/>
-                <a:t>記事ごとの成績</a:t>
-              </a:r>
-            </a:p>
-          </p:txBody>
-        </p:sp>
-        <p:sp>
-          <p:nvSpPr>
-            <p:cNvPr id="17" name="Title_03"/>
-            <p:cNvSpPr txBox="1"/>
-            <p:nvPr/>
-          </p:nvSpPr>
-          <p:spPr>
-            <a:xfrm>
-              <a:off x="914400" y="2349500"/>
-              <a:ext cx="2946400" cy="298450"/>
-            </a:xfrm>
-            <a:prstGeom prst="rect">
-              <a:avLst/>
-            </a:prstGeom>
-            <a:noFill/>
-          </p:spPr>
-          <p:txBody>
-            <a:bodyPr wrap="square" lIns="0" tIns="0" rIns="0" bIns="0" anchor="ctr">
-              <a:noAutofit/>
-            </a:bodyPr>
-            <a:lstStyle>
-              <a:lvl1pPr marL="0" indent="0" algn="l">
-                <a:lnSpc>
-                  <a:spcPts val="2340"/>
-                </a:lnSpc>
-                <a:spcBef>
-                  <a:spcPts val="0"/>
-                </a:spcBef>
-                <a:buNone/>
-                <a:defRPr sz="1800" b="1">
-                  <a:solidFill>
-                    <a:schemeClr val="tx1"/>
-                  </a:solidFill>
-                  <a:latin typeface="+mn-lt"/>
-                  <a:ea typeface="+mn-ea"/>
-                </a:defRPr>
-              </a:lvl1pPr>
-            </a:lstStyle>
-            <a:p>
-              <a:r>
-                <a:rPr lang="ja-JP"/>
-                <a:t>流入元の変化</a:t>
-              </a:r>
-            </a:p>
-          </p:txBody>
-        </p:sp>
-        <p:sp>
-          <p:nvSpPr>
-            <p:cNvPr id="18" name="Title_04"/>
-            <p:cNvSpPr txBox="1"/>
-            <p:nvPr/>
-          </p:nvSpPr>
-          <p:spPr>
-            <a:xfrm>
-              <a:off x="5181600" y="2349500"/>
-              <a:ext cx="2946400" cy="298450"/>
-            </a:xfrm>
-            <a:prstGeom prst="rect">
-              <a:avLst/>
-            </a:prstGeom>
-            <a:noFill/>
-          </p:spPr>
-          <p:txBody>
-            <a:bodyPr wrap="square" lIns="0" tIns="0" rIns="0" bIns="0" anchor="ctr">
-              <a:noAutofit/>
-            </a:bodyPr>
-            <a:lstStyle>
-              <a:lvl1pPr marL="0" indent="0" algn="l">
-                <a:lnSpc>
-                  <a:spcPts val="2340"/>
-                </a:lnSpc>
-                <a:spcBef>
-                  <a:spcPts val="0"/>
-                </a:spcBef>
-                <a:buNone/>
-                <a:defRPr sz="1800" b="1">
-                  <a:solidFill>
-                    <a:schemeClr val="tx1"/>
-                  </a:solidFill>
-                  <a:latin typeface="+mn-lt"/>
-                  <a:ea typeface="+mn-ea"/>
-                </a:defRPr>
-              </a:lvl1pPr>
-            </a:lstStyle>
-            <a:p>
-              <a:r>
-                <a:rPr lang="ja-JP"/>
-                <a:t>うまくいった型</a:t>
-              </a:r>
-            </a:p>
-          </p:txBody>
-        </p:sp>
-        <p:sp>
-          <p:nvSpPr>
-            <p:cNvPr id="19" name="Title_05"/>
-            <p:cNvSpPr txBox="1"/>
-            <p:nvPr/>
-          </p:nvSpPr>
-          <p:spPr>
-            <a:xfrm>
-              <a:off x="914400" y="3619500"/>
-              <a:ext cx="2946400" cy="298450"/>
-            </a:xfrm>
-            <a:prstGeom prst="rect">
-              <a:avLst/>
-            </a:prstGeom>
-            <a:noFill/>
-          </p:spPr>
-          <p:txBody>
-            <a:bodyPr wrap="square" lIns="0" tIns="0" rIns="0" bIns="0" anchor="ctr">
-              <a:noAutofit/>
-            </a:bodyPr>
-            <a:lstStyle>
-              <a:lvl1pPr marL="0" indent="0" algn="l">
-                <a:lnSpc>
-                  <a:spcPts val="2340"/>
-                </a:lnSpc>
-                <a:spcBef>
-                  <a:spcPts val="0"/>
-                </a:spcBef>
-                <a:buNone/>
-                <a:defRPr sz="1800" b="1">
-                  <a:solidFill>
-                    <a:schemeClr val="tx1"/>
-                  </a:solidFill>
-                  <a:latin typeface="+mn-lt"/>
-                  <a:ea typeface="+mn-ea"/>
-                </a:defRPr>
-              </a:lvl1pPr>
-            </a:lstStyle>
-            <a:p>
-              <a:r>
-                <a:rPr lang="ja-JP"/>
-                <a:t>次の一手</a:t>
-              </a:r>
-            </a:p>
-          </p:txBody>
-        </p:sp>
-        <p:sp>
-          <p:nvSpPr>
-            <p:cNvPr id="20" name="Title_06"/>
-            <p:cNvSpPr txBox="1"/>
-            <p:nvPr/>
-          </p:nvSpPr>
-          <p:spPr>
-            <a:xfrm>
-              <a:off x="5181600" y="3619500"/>
-              <a:ext cx="2946400" cy="298450"/>
-            </a:xfrm>
-            <a:prstGeom prst="rect">
-              <a:avLst/>
-            </a:prstGeom>
-            <a:noFill/>
-          </p:spPr>
-          <p:txBody>
-            <a:bodyPr wrap="square" lIns="0" tIns="0" rIns="0" bIns="0" anchor="ctr">
-              <a:noAutofit/>
-            </a:bodyPr>
-            <a:lstStyle>
-              <a:lvl1pPr marL="0" indent="0" algn="l">
-                <a:lnSpc>
-                  <a:spcPts val="2340"/>
-                </a:lnSpc>
-                <a:spcBef>
-                  <a:spcPts val="0"/>
-                </a:spcBef>
-                <a:buNone/>
-                <a:defRPr sz="1800" b="1">
-                  <a:solidFill>
-                    <a:schemeClr val="tx1"/>
-                  </a:solidFill>
-                  <a:latin typeface="+mn-lt"/>
-                  <a:ea typeface="+mn-ea"/>
-                </a:defRPr>
-              </a:lvl1pPr>
-            </a:lstStyle>
-            <a:p>
-              <a:r>
-                <a:rPr lang="ja-JP"/>
-                <a:t>付録</a:t>
-              </a:r>
-            </a:p>
-          </p:txBody>
-        </p:sp>
-        <p:sp>
-          <p:nvSpPr>
-            <p:cNvPr id="21" name="Sub_01"/>
-            <p:cNvSpPr txBox="1"/>
-            <p:nvPr/>
-          </p:nvSpPr>
-          <p:spPr>
-            <a:xfrm>
-              <a:off x="914400" y="1409700"/>
-              <a:ext cx="2946400" cy="196850"/>
+              <a:off x="457200" y="4219575"/>
+              <a:ext cx="6985000" cy="196850"/>
             </a:xfrm>
             <a:prstGeom prst="rect">
               <a:avLst/>
@@ -14670,521 +14439,15 @@
             <a:p>
               <a:r>
                 <a:rPr lang="ja-JP"/>
-                <a:t>PV・スキ・フォロワー</a:t>
+                <a:t>※ 各年の実数があるなら折れ線グラフで作る。これは数字が無く「逆転した」ことだけを言う図</a:t>
               </a:r>
             </a:p>
           </p:txBody>
         </p:sp>
-        <p:sp>
-          <p:nvSpPr>
-            <p:cNvPr id="22" name="Sub_02"/>
-            <p:cNvSpPr txBox="1"/>
-            <p:nvPr/>
-          </p:nvSpPr>
-          <p:spPr>
-            <a:xfrm>
-              <a:off x="5181600" y="1409700"/>
-              <a:ext cx="2946400" cy="196850"/>
-            </a:xfrm>
-            <a:prstGeom prst="rect">
-              <a:avLst/>
-            </a:prstGeom>
-            <a:noFill/>
-          </p:spPr>
-          <p:txBody>
-            <a:bodyPr wrap="square" lIns="0" tIns="0" rIns="0" bIns="0" anchor="ctr">
-              <a:noAutofit/>
-            </a:bodyPr>
-            <a:lstStyle>
-              <a:lvl1pPr marL="0" indent="0" algn="l">
-                <a:lnSpc>
-                  <a:spcPts val="1540"/>
-                </a:lnSpc>
-                <a:spcBef>
-                  <a:spcPts val="0"/>
-                </a:spcBef>
-                <a:buNone/>
-                <a:defRPr sz="1100" b="0">
-                  <a:solidFill>
-                    <a:schemeClr val="tx2"/>
-                  </a:solidFill>
-                  <a:latin typeface="+mn-lt"/>
-                  <a:ea typeface="+mn-ea"/>
-                </a:defRPr>
-              </a:lvl1pPr>
-            </a:lstStyle>
-            <a:p>
-              <a:r>
-                <a:rPr lang="ja-JP"/>
-                <a:t>連載 #1〜#4 の比較</a:t>
-              </a:r>
-            </a:p>
-          </p:txBody>
-        </p:sp>
-        <p:sp>
-          <p:nvSpPr>
-            <p:cNvPr id="23" name="Sub_03"/>
-            <p:cNvSpPr txBox="1"/>
-            <p:nvPr/>
-          </p:nvSpPr>
-          <p:spPr>
-            <a:xfrm>
-              <a:off x="914400" y="2679700"/>
-              <a:ext cx="2946400" cy="196850"/>
-            </a:xfrm>
-            <a:prstGeom prst="rect">
-              <a:avLst/>
-            </a:prstGeom>
-            <a:noFill/>
-          </p:spPr>
-          <p:txBody>
-            <a:bodyPr wrap="square" lIns="0" tIns="0" rIns="0" bIns="0" anchor="ctr">
-              <a:noAutofit/>
-            </a:bodyPr>
-            <a:lstStyle>
-              <a:lvl1pPr marL="0" indent="0" algn="l">
-                <a:lnSpc>
-                  <a:spcPts val="1540"/>
-                </a:lnSpc>
-                <a:spcBef>
-                  <a:spcPts val="0"/>
-                </a:spcBef>
-                <a:buNone/>
-                <a:defRPr sz="1100" b="0">
-                  <a:solidFill>
-                    <a:schemeClr val="tx2"/>
-                  </a:solidFill>
-                  <a:latin typeface="+mn-lt"/>
-                  <a:ea typeface="+mn-ea"/>
-                </a:defRPr>
-              </a:lvl1pPr>
-            </a:lstStyle>
-            <a:p>
-              <a:r>
-                <a:rPr lang="ja-JP"/>
-                <a:t>検索が全体の 58%</a:t>
-              </a:r>
-            </a:p>
-          </p:txBody>
-        </p:sp>
-        <p:sp>
-          <p:nvSpPr>
-            <p:cNvPr id="24" name="Sub_04"/>
-            <p:cNvSpPr txBox="1"/>
-            <p:nvPr/>
-          </p:nvSpPr>
-          <p:spPr>
-            <a:xfrm>
-              <a:off x="5181600" y="2679700"/>
-              <a:ext cx="2946400" cy="196850"/>
-            </a:xfrm>
-            <a:prstGeom prst="rect">
-              <a:avLst/>
-            </a:prstGeom>
-            <a:noFill/>
-          </p:spPr>
-          <p:txBody>
-            <a:bodyPr wrap="square" lIns="0" tIns="0" rIns="0" bIns="0" anchor="ctr">
-              <a:noAutofit/>
-            </a:bodyPr>
-            <a:lstStyle>
-              <a:lvl1pPr marL="0" indent="0" algn="l">
-                <a:lnSpc>
-                  <a:spcPts val="1540"/>
-                </a:lnSpc>
-                <a:spcBef>
-                  <a:spcPts val="0"/>
-                </a:spcBef>
-                <a:buNone/>
-                <a:defRPr sz="1100" b="0">
-                  <a:solidFill>
-                    <a:schemeClr val="tx2"/>
-                  </a:solidFill>
-                  <a:latin typeface="+mn-lt"/>
-                  <a:ea typeface="+mn-ea"/>
-                </a:defRPr>
-              </a:lvl1pPr>
-            </a:lstStyle>
-            <a:p>
-              <a:r>
-                <a:rPr lang="ja-JP"/>
-                <a:t>一次情報 × 図解</a:t>
-              </a:r>
-            </a:p>
-          </p:txBody>
-        </p:sp>
-        <p:sp>
-          <p:nvSpPr>
-            <p:cNvPr id="25" name="Sub_05"/>
-            <p:cNvSpPr txBox="1"/>
-            <p:nvPr/>
-          </p:nvSpPr>
-          <p:spPr>
-            <a:xfrm>
-              <a:off x="914400" y="3949700"/>
-              <a:ext cx="2946400" cy="196850"/>
-            </a:xfrm>
-            <a:prstGeom prst="rect">
-              <a:avLst/>
-            </a:prstGeom>
-            <a:noFill/>
-          </p:spPr>
-          <p:txBody>
-            <a:bodyPr wrap="square" lIns="0" tIns="0" rIns="0" bIns="0" anchor="ctr">
-              <a:noAutofit/>
-            </a:bodyPr>
-            <a:lstStyle>
-              <a:lvl1pPr marL="0" indent="0" algn="l">
-                <a:lnSpc>
-                  <a:spcPts val="1540"/>
-                </a:lnSpc>
-                <a:spcBef>
-                  <a:spcPts val="0"/>
-                </a:spcBef>
-                <a:buNone/>
-                <a:defRPr sz="1100" b="0">
-                  <a:solidFill>
-                    <a:schemeClr val="tx2"/>
-                  </a:solidFill>
-                  <a:latin typeface="+mn-lt"/>
-                  <a:ea typeface="+mn-ea"/>
-                </a:defRPr>
-              </a:lvl1pPr>
-            </a:lstStyle>
-            <a:p>
-              <a:r>
-                <a:rPr lang="ja-JP"/>
-                <a:t>連載 #5 のテーマ</a:t>
-              </a:r>
-            </a:p>
-          </p:txBody>
-        </p:sp>
-        <p:sp>
-          <p:nvSpPr>
-            <p:cNvPr id="26" name="Sub_06"/>
-            <p:cNvSpPr txBox="1"/>
-            <p:nvPr/>
-          </p:nvSpPr>
-          <p:spPr>
-            <a:xfrm>
-              <a:off x="5181600" y="3949700"/>
-              <a:ext cx="2946400" cy="196850"/>
-            </a:xfrm>
-            <a:prstGeom prst="rect">
-              <a:avLst/>
-            </a:prstGeom>
-            <a:noFill/>
-          </p:spPr>
-          <p:txBody>
-            <a:bodyPr wrap="square" lIns="0" tIns="0" rIns="0" bIns="0" anchor="ctr">
-              <a:noAutofit/>
-            </a:bodyPr>
-            <a:lstStyle>
-              <a:lvl1pPr marL="0" indent="0" algn="l">
-                <a:lnSpc>
-                  <a:spcPts val="1540"/>
-                </a:lnSpc>
-                <a:spcBef>
-                  <a:spcPts val="0"/>
-                </a:spcBef>
-                <a:buNone/>
-                <a:defRPr sz="1100" b="0">
-                  <a:solidFill>
-                    <a:schemeClr val="tx2"/>
-                  </a:solidFill>
-                  <a:latin typeface="+mn-lt"/>
-                  <a:ea typeface="+mn-ea"/>
-                </a:defRPr>
-              </a:lvl1pPr>
-            </a:lstStyle>
-            <a:p>
-              <a:r>
-                <a:rPr lang="ja-JP"/>
-                <a:t>数値の定義と出典</a:t>
-              </a:r>
-            </a:p>
-          </p:txBody>
-        </p:sp>
-        <p:sp>
-          <p:nvSpPr>
-            <p:cNvPr id="27" name="Page_01"/>
-            <p:cNvSpPr txBox="1"/>
-            <p:nvPr/>
-          </p:nvSpPr>
-          <p:spPr>
-            <a:xfrm>
-              <a:off x="4038600" y="1117600"/>
-              <a:ext cx="381000" cy="247650"/>
-            </a:xfrm>
-            <a:prstGeom prst="rect">
-              <a:avLst/>
-            </a:prstGeom>
-            <a:noFill/>
-          </p:spPr>
-          <p:txBody>
-            <a:bodyPr wrap="square" lIns="0" tIns="0" rIns="0" bIns="0" anchor="ctr">
-              <a:noAutofit/>
-            </a:bodyPr>
-            <a:lstStyle>
-              <a:lvl1pPr marL="0" indent="0" algn="r">
-                <a:lnSpc>
-                  <a:spcPts val="1960"/>
-                </a:lnSpc>
-                <a:spcBef>
-                  <a:spcPts val="0"/>
-                </a:spcBef>
-                <a:buNone/>
-                <a:defRPr sz="1400" b="0">
-                  <a:solidFill>
-                    <a:schemeClr val="tx2"/>
-                  </a:solidFill>
-                  <a:latin typeface="+mn-lt"/>
-                  <a:ea typeface="+mn-ea"/>
-                </a:defRPr>
-              </a:lvl1pPr>
-            </a:lstStyle>
-            <a:p>
-              <a:r>
-                <a:rPr lang="ja-JP"/>
-                <a:t>2</a:t>
-              </a:r>
-            </a:p>
-          </p:txBody>
-        </p:sp>
-        <p:sp>
-          <p:nvSpPr>
-            <p:cNvPr id="28" name="Page_02"/>
-            <p:cNvSpPr txBox="1"/>
-            <p:nvPr/>
-          </p:nvSpPr>
-          <p:spPr>
-            <a:xfrm>
-              <a:off x="8305800" y="1117600"/>
-              <a:ext cx="381000" cy="247650"/>
-            </a:xfrm>
-            <a:prstGeom prst="rect">
-              <a:avLst/>
-            </a:prstGeom>
-            <a:noFill/>
-          </p:spPr>
-          <p:txBody>
-            <a:bodyPr wrap="square" lIns="0" tIns="0" rIns="0" bIns="0" anchor="ctr">
-              <a:noAutofit/>
-            </a:bodyPr>
-            <a:lstStyle>
-              <a:lvl1pPr marL="0" indent="0" algn="r">
-                <a:lnSpc>
-                  <a:spcPts val="1960"/>
-                </a:lnSpc>
-                <a:spcBef>
-                  <a:spcPts val="0"/>
-                </a:spcBef>
-                <a:buNone/>
-                <a:defRPr sz="1400" b="0">
-                  <a:solidFill>
-                    <a:schemeClr val="tx2"/>
-                  </a:solidFill>
-                  <a:latin typeface="+mn-lt"/>
-                  <a:ea typeface="+mn-ea"/>
-                </a:defRPr>
-              </a:lvl1pPr>
-            </a:lstStyle>
-            <a:p>
-              <a:r>
-                <a:rPr lang="ja-JP"/>
-                <a:t>6</a:t>
-              </a:r>
-            </a:p>
-          </p:txBody>
-        </p:sp>
-        <p:sp>
-          <p:nvSpPr>
-            <p:cNvPr id="29" name="Page_03"/>
-            <p:cNvSpPr txBox="1"/>
-            <p:nvPr/>
-          </p:nvSpPr>
-          <p:spPr>
-            <a:xfrm>
-              <a:off x="4038600" y="2387600"/>
-              <a:ext cx="381000" cy="247650"/>
-            </a:xfrm>
-            <a:prstGeom prst="rect">
-              <a:avLst/>
-            </a:prstGeom>
-            <a:noFill/>
-          </p:spPr>
-          <p:txBody>
-            <a:bodyPr wrap="square" lIns="0" tIns="0" rIns="0" bIns="0" anchor="ctr">
-              <a:noAutofit/>
-            </a:bodyPr>
-            <a:lstStyle>
-              <a:lvl1pPr marL="0" indent="0" algn="r">
-                <a:lnSpc>
-                  <a:spcPts val="1960"/>
-                </a:lnSpc>
-                <a:spcBef>
-                  <a:spcPts val="0"/>
-                </a:spcBef>
-                <a:buNone/>
-                <a:defRPr sz="1400" b="0">
-                  <a:solidFill>
-                    <a:schemeClr val="tx2"/>
-                  </a:solidFill>
-                  <a:latin typeface="+mn-lt"/>
-                  <a:ea typeface="+mn-ea"/>
-                </a:defRPr>
-              </a:lvl1pPr>
-            </a:lstStyle>
-            <a:p>
-              <a:r>
-                <a:rPr lang="ja-JP"/>
-                <a:t>9</a:t>
-              </a:r>
-            </a:p>
-          </p:txBody>
-        </p:sp>
-        <p:sp>
-          <p:nvSpPr>
-            <p:cNvPr id="30" name="Page_04"/>
-            <p:cNvSpPr txBox="1"/>
-            <p:nvPr/>
-          </p:nvSpPr>
-          <p:spPr>
-            <a:xfrm>
-              <a:off x="8305800" y="2387600"/>
-              <a:ext cx="381000" cy="247650"/>
-            </a:xfrm>
-            <a:prstGeom prst="rect">
-              <a:avLst/>
-            </a:prstGeom>
-            <a:noFill/>
-          </p:spPr>
-          <p:txBody>
-            <a:bodyPr wrap="square" lIns="0" tIns="0" rIns="0" bIns="0" anchor="ctr">
-              <a:noAutofit/>
-            </a:bodyPr>
-            <a:lstStyle>
-              <a:lvl1pPr marL="0" indent="0" algn="r">
-                <a:lnSpc>
-                  <a:spcPts val="1960"/>
-                </a:lnSpc>
-                <a:spcBef>
-                  <a:spcPts val="0"/>
-                </a:spcBef>
-                <a:buNone/>
-                <a:defRPr sz="1400" b="0">
-                  <a:solidFill>
-                    <a:schemeClr val="tx2"/>
-                  </a:solidFill>
-                  <a:latin typeface="+mn-lt"/>
-                  <a:ea typeface="+mn-ea"/>
-                </a:defRPr>
-              </a:lvl1pPr>
-            </a:lstStyle>
-            <a:p>
-              <a:r>
-                <a:rPr lang="ja-JP"/>
-                <a:t>12</a:t>
-              </a:r>
-            </a:p>
-          </p:txBody>
-        </p:sp>
-        <p:sp>
-          <p:nvSpPr>
-            <p:cNvPr id="31" name="Page_05"/>
-            <p:cNvSpPr txBox="1"/>
-            <p:nvPr/>
-          </p:nvSpPr>
-          <p:spPr>
-            <a:xfrm>
-              <a:off x="4038600" y="3657600"/>
-              <a:ext cx="381000" cy="247650"/>
-            </a:xfrm>
-            <a:prstGeom prst="rect">
-              <a:avLst/>
-            </a:prstGeom>
-            <a:noFill/>
-          </p:spPr>
-          <p:txBody>
-            <a:bodyPr wrap="square" lIns="0" tIns="0" rIns="0" bIns="0" anchor="ctr">
-              <a:noAutofit/>
-            </a:bodyPr>
-            <a:lstStyle>
-              <a:lvl1pPr marL="0" indent="0" algn="r">
-                <a:lnSpc>
-                  <a:spcPts val="1960"/>
-                </a:lnSpc>
-                <a:spcBef>
-                  <a:spcPts val="0"/>
-                </a:spcBef>
-                <a:buNone/>
-                <a:defRPr sz="1400" b="0">
-                  <a:solidFill>
-                    <a:schemeClr val="tx2"/>
-                  </a:solidFill>
-                  <a:latin typeface="+mn-lt"/>
-                  <a:ea typeface="+mn-ea"/>
-                </a:defRPr>
-              </a:lvl1pPr>
-            </a:lstStyle>
-            <a:p>
-              <a:r>
-                <a:rPr lang="ja-JP"/>
-                <a:t>15</a:t>
-              </a:r>
-            </a:p>
-          </p:txBody>
-        </p:sp>
-        <p:sp>
-          <p:nvSpPr>
-            <p:cNvPr id="32" name="Page_06"/>
-            <p:cNvSpPr txBox="1"/>
-            <p:nvPr/>
-          </p:nvSpPr>
-          <p:spPr>
-            <a:xfrm>
-              <a:off x="8305800" y="3657600"/>
-              <a:ext cx="381000" cy="247650"/>
-            </a:xfrm>
-            <a:prstGeom prst="rect">
-              <a:avLst/>
-            </a:prstGeom>
-            <a:noFill/>
-          </p:spPr>
-          <p:txBody>
-            <a:bodyPr wrap="square" lIns="0" tIns="0" rIns="0" bIns="0" anchor="ctr">
-              <a:noAutofit/>
-            </a:bodyPr>
-            <a:lstStyle>
-              <a:lvl1pPr marL="0" indent="0" algn="r">
-                <a:lnSpc>
-                  <a:spcPts val="1960"/>
-                </a:lnSpc>
-                <a:spcBef>
-                  <a:spcPts val="0"/>
-                </a:spcBef>
-                <a:buNone/>
-                <a:defRPr sz="1400" b="0">
-                  <a:solidFill>
-                    <a:schemeClr val="tx2"/>
-                  </a:solidFill>
-                  <a:latin typeface="+mn-lt"/>
-                  <a:ea typeface="+mn-ea"/>
-                </a:defRPr>
-              </a:lvl1pPr>
-            </a:lstStyle>
-            <a:p>
-              <a:r>
-                <a:rPr lang="ja-JP"/>
-                <a:t>18</a:t>
-              </a:r>
-            </a:p>
-          </p:txBody>
-        </p:sp>
       </p:grpSp>
       <p:sp>
         <p:nvSpPr>
-          <p:cNvPr id="34" name="SlideNumber"/>
+          <p:cNvPr id="17" name="SlideNumber"/>
           <p:cNvSpPr>
             <a:spLocks noGrp="1"/>
           </p:cNvSpPr>
@@ -15246,41 +14509,63 @@
           <a:p>
             <a:r>
               <a:rPr lang="ja-JP"/>
-              <a:t>9月の記録</a:t>
+              <a:t>打ち手が頭打ちになった理由</a:t>
+            </a:r>
+          </a:p>
+        </p:txBody>
+      </p:sp>
+      <p:sp>
+        <p:nvSpPr>
+          <p:cNvPr id="3" name="Lead"/>
+          <p:cNvSpPr>
+            <a:spLocks noGrp="1"/>
+          </p:cNvSpPr>
+          <p:nvPr>
+            <p:ph type="body" idx="13" sz="quarter"/>
+          </p:nvPr>
+        </p:nvSpPr>
+        <p:spPr/>
+        <p:txBody>
+          <a:bodyPr/>
+          <a:lstStyle/>
+          <a:p>
+            <a:r>
+              <a:rPr lang="ja-JP"/>
+              <a:t>対応を速くしても、1日の上限は動かない</a:t>
             </a:r>
           </a:p>
         </p:txBody>
       </p:sp>
       <p:grpSp>
         <p:nvGrpSpPr>
-          <p:cNvPr id="13" name="organism/O-S2 写真ギャラリー"/>
+          <p:cNvPr id="33" name="organism/O-B25 壁（進行が止まる）"/>
           <p:cNvGrpSpPr/>
           <p:nvPr/>
         </p:nvGrpSpPr>
         <p:grpSpPr>
           <a:xfrm>
-            <a:off x="457200" y="965200"/>
-            <a:ext cx="8229600" cy="3657600"/>
-            <a:chOff x="457200" y="965200"/>
-            <a:chExt cx="8229600" cy="3657600"/>
+            <a:off x="457200" y="1600200"/>
+            <a:ext cx="8229600" cy="2794000"/>
+            <a:chOff x="457200" y="1600200"/>
+            <a:chExt cx="8229600" cy="2794000"/>
           </a:xfrm>
         </p:grpSpPr>
         <p:sp>
           <p:nvSpPr>
-            <p:cNvPr id="3" name="Photo_1"/>
+            <p:cNvPr id="4" name="Pill_1"/>
             <p:cNvSpPr/>
             <p:nvPr/>
           </p:nvSpPr>
           <p:spPr>
             <a:xfrm>
-              <a:off x="457200" y="965200"/>
-              <a:ext cx="4038600" cy="3657600"/>
+              <a:off x="457200" y="2057400"/>
+              <a:ext cx="2667000" cy="482600"/>
             </a:xfrm>
             <a:prstGeom prst="rect">
               <a:avLst/>
             </a:prstGeom>
             <a:solidFill>
-              <a:schemeClr val="accent5"/>
+              <a:schemeClr val="bg2"/>
             </a:solidFill>
             <a:ln>
               <a:noFill/>
@@ -15289,14 +14574,450 @@
         </p:sp>
         <p:sp>
           <p:nvSpPr>
-            <p:cNvPr id="4" name="Caption_1"/>
+            <p:cNvPr id="5" name="PillText_1"/>
             <p:cNvSpPr txBox="1"/>
             <p:nvPr/>
           </p:nvSpPr>
           <p:spPr>
             <a:xfrm>
-              <a:off x="609600" y="4318000"/>
-              <a:ext cx="2540000" cy="196850"/>
+              <a:off x="609600" y="2174875"/>
+              <a:ext cx="2159000" cy="247650"/>
+            </a:xfrm>
+            <a:prstGeom prst="rect">
+              <a:avLst/>
+            </a:prstGeom>
+            <a:noFill/>
+          </p:spPr>
+          <p:txBody>
+            <a:bodyPr wrap="square" lIns="0" tIns="0" rIns="0" bIns="0" anchor="ctr">
+              <a:noAutofit/>
+            </a:bodyPr>
+            <a:lstStyle>
+              <a:lvl1pPr marL="0" indent="0" algn="l">
+                <a:lnSpc>
+                  <a:spcPts val="1960"/>
+                </a:lnSpc>
+                <a:spcBef>
+                  <a:spcPts val="0"/>
+                </a:spcBef>
+                <a:buNone/>
+                <a:defRPr sz="1400" b="0">
+                  <a:solidFill>
+                    <a:schemeClr val="tx1"/>
+                  </a:solidFill>
+                  <a:latin typeface="+mn-lt"/>
+                  <a:ea typeface="+mn-ea"/>
+                </a:defRPr>
+              </a:lvl1pPr>
+            </a:lstStyle>
+            <a:p>
+              <a:r>
+                <a:rPr lang="ja-JP"/>
+                <a:t>問い合わせの自動返信</a:t>
+              </a:r>
+            </a:p>
+          </p:txBody>
+        </p:sp>
+        <p:sp>
+          <p:nvSpPr>
+            <p:cNvPr id="6" name="Arrow_1"/>
+            <p:cNvSpPr txBox="1"/>
+            <p:nvPr/>
+          </p:nvSpPr>
+          <p:spPr>
+            <a:xfrm>
+              <a:off x="3378200" y="2149475"/>
+              <a:ext cx="381000" cy="298450"/>
+            </a:xfrm>
+            <a:prstGeom prst="rect">
+              <a:avLst/>
+            </a:prstGeom>
+            <a:noFill/>
+          </p:spPr>
+          <p:txBody>
+            <a:bodyPr wrap="square" lIns="0" tIns="0" rIns="0" bIns="0" anchor="ctr">
+              <a:noAutofit/>
+            </a:bodyPr>
+            <a:lstStyle>
+              <a:lvl1pPr marL="0" indent="0" algn="ctr">
+                <a:lnSpc>
+                  <a:spcPts val="2340"/>
+                </a:lnSpc>
+                <a:spcBef>
+                  <a:spcPts val="0"/>
+                </a:spcBef>
+                <a:buNone/>
+                <a:defRPr sz="1800" b="1">
+                  <a:solidFill>
+                    <a:schemeClr val="accent1"/>
+                  </a:solidFill>
+                  <a:latin typeface="+mn-lt"/>
+                  <a:ea typeface="+mn-ea"/>
+                </a:defRPr>
+              </a:lvl1pPr>
+            </a:lstStyle>
+            <a:p>
+              <a:r>
+                <a:rPr lang="ja-JP"/>
+                <a:t>→</a:t>
+              </a:r>
+            </a:p>
+          </p:txBody>
+        </p:sp>
+        <p:sp>
+          <p:nvSpPr>
+            <p:cNvPr id="7" name="Pill_2"/>
+            <p:cNvSpPr/>
+            <p:nvPr/>
+          </p:nvSpPr>
+          <p:spPr>
+            <a:xfrm>
+              <a:off x="457200" y="2755900"/>
+              <a:ext cx="2667000" cy="482600"/>
+            </a:xfrm>
+            <a:prstGeom prst="rect">
+              <a:avLst/>
+            </a:prstGeom>
+            <a:solidFill>
+              <a:schemeClr val="bg2"/>
+            </a:solidFill>
+            <a:ln>
+              <a:noFill/>
+            </a:ln>
+          </p:spPr>
+        </p:sp>
+        <p:sp>
+          <p:nvSpPr>
+            <p:cNvPr id="8" name="PillText_2"/>
+            <p:cNvSpPr txBox="1"/>
+            <p:nvPr/>
+          </p:nvSpPr>
+          <p:spPr>
+            <a:xfrm>
+              <a:off x="609600" y="2873375"/>
+              <a:ext cx="2159000" cy="247650"/>
+            </a:xfrm>
+            <a:prstGeom prst="rect">
+              <a:avLst/>
+            </a:prstGeom>
+            <a:noFill/>
+          </p:spPr>
+          <p:txBody>
+            <a:bodyPr wrap="square" lIns="0" tIns="0" rIns="0" bIns="0" anchor="ctr">
+              <a:noAutofit/>
+            </a:bodyPr>
+            <a:lstStyle>
+              <a:lvl1pPr marL="0" indent="0" algn="l">
+                <a:lnSpc>
+                  <a:spcPts val="1960"/>
+                </a:lnSpc>
+                <a:spcBef>
+                  <a:spcPts val="0"/>
+                </a:spcBef>
+                <a:buNone/>
+                <a:defRPr sz="1400" b="0">
+                  <a:solidFill>
+                    <a:schemeClr val="tx1"/>
+                  </a:solidFill>
+                  <a:latin typeface="+mn-lt"/>
+                  <a:ea typeface="+mn-ea"/>
+                </a:defRPr>
+              </a:lvl1pPr>
+            </a:lstStyle>
+            <a:p>
+              <a:r>
+                <a:rPr lang="ja-JP"/>
+                <a:t>テンプレートの整備</a:t>
+              </a:r>
+            </a:p>
+          </p:txBody>
+        </p:sp>
+        <p:sp>
+          <p:nvSpPr>
+            <p:cNvPr id="9" name="Arrow_2"/>
+            <p:cNvSpPr txBox="1"/>
+            <p:nvPr/>
+          </p:nvSpPr>
+          <p:spPr>
+            <a:xfrm>
+              <a:off x="3378200" y="2847975"/>
+              <a:ext cx="381000" cy="298450"/>
+            </a:xfrm>
+            <a:prstGeom prst="rect">
+              <a:avLst/>
+            </a:prstGeom>
+            <a:noFill/>
+          </p:spPr>
+          <p:txBody>
+            <a:bodyPr wrap="square" lIns="0" tIns="0" rIns="0" bIns="0" anchor="ctr">
+              <a:noAutofit/>
+            </a:bodyPr>
+            <a:lstStyle>
+              <a:lvl1pPr marL="0" indent="0" algn="ctr">
+                <a:lnSpc>
+                  <a:spcPts val="2340"/>
+                </a:lnSpc>
+                <a:spcBef>
+                  <a:spcPts val="0"/>
+                </a:spcBef>
+                <a:buNone/>
+                <a:defRPr sz="1800" b="1">
+                  <a:solidFill>
+                    <a:schemeClr val="accent1"/>
+                  </a:solidFill>
+                  <a:latin typeface="+mn-lt"/>
+                  <a:ea typeface="+mn-ea"/>
+                </a:defRPr>
+              </a:lvl1pPr>
+            </a:lstStyle>
+            <a:p>
+              <a:r>
+                <a:rPr lang="ja-JP"/>
+                <a:t>→</a:t>
+              </a:r>
+            </a:p>
+          </p:txBody>
+        </p:sp>
+        <p:sp>
+          <p:nvSpPr>
+            <p:cNvPr id="10" name="Pill_3"/>
+            <p:cNvSpPr/>
+            <p:nvPr/>
+          </p:nvSpPr>
+          <p:spPr>
+            <a:xfrm>
+              <a:off x="457200" y="3454400"/>
+              <a:ext cx="2667000" cy="482600"/>
+            </a:xfrm>
+            <a:prstGeom prst="rect">
+              <a:avLst/>
+            </a:prstGeom>
+            <a:solidFill>
+              <a:schemeClr val="bg2"/>
+            </a:solidFill>
+            <a:ln>
+              <a:noFill/>
+            </a:ln>
+          </p:spPr>
+        </p:sp>
+        <p:sp>
+          <p:nvSpPr>
+            <p:cNvPr id="11" name="PillText_3"/>
+            <p:cNvSpPr txBox="1"/>
+            <p:nvPr/>
+          </p:nvSpPr>
+          <p:spPr>
+            <a:xfrm>
+              <a:off x="609600" y="3571875"/>
+              <a:ext cx="2159000" cy="247650"/>
+            </a:xfrm>
+            <a:prstGeom prst="rect">
+              <a:avLst/>
+            </a:prstGeom>
+            <a:noFill/>
+          </p:spPr>
+          <p:txBody>
+            <a:bodyPr wrap="square" lIns="0" tIns="0" rIns="0" bIns="0" anchor="ctr">
+              <a:noAutofit/>
+            </a:bodyPr>
+            <a:lstStyle>
+              <a:lvl1pPr marL="0" indent="0" algn="l">
+                <a:lnSpc>
+                  <a:spcPts val="1960"/>
+                </a:lnSpc>
+                <a:spcBef>
+                  <a:spcPts val="0"/>
+                </a:spcBef>
+                <a:buNone/>
+                <a:defRPr sz="1400" b="0">
+                  <a:solidFill>
+                    <a:schemeClr val="tx1"/>
+                  </a:solidFill>
+                  <a:latin typeface="+mn-lt"/>
+                  <a:ea typeface="+mn-ea"/>
+                </a:defRPr>
+              </a:lvl1pPr>
+            </a:lstStyle>
+            <a:p>
+              <a:r>
+                <a:rPr lang="ja-JP"/>
+                <a:t>担当者を増やす</a:t>
+              </a:r>
+            </a:p>
+          </p:txBody>
+        </p:sp>
+        <p:sp>
+          <p:nvSpPr>
+            <p:cNvPr id="12" name="Arrow_3"/>
+            <p:cNvSpPr txBox="1"/>
+            <p:nvPr/>
+          </p:nvSpPr>
+          <p:spPr>
+            <a:xfrm>
+              <a:off x="3378200" y="3546475"/>
+              <a:ext cx="381000" cy="298450"/>
+            </a:xfrm>
+            <a:prstGeom prst="rect">
+              <a:avLst/>
+            </a:prstGeom>
+            <a:noFill/>
+          </p:spPr>
+          <p:txBody>
+            <a:bodyPr wrap="square" lIns="0" tIns="0" rIns="0" bIns="0" anchor="ctr">
+              <a:noAutofit/>
+            </a:bodyPr>
+            <a:lstStyle>
+              <a:lvl1pPr marL="0" indent="0" algn="ctr">
+                <a:lnSpc>
+                  <a:spcPts val="2340"/>
+                </a:lnSpc>
+                <a:spcBef>
+                  <a:spcPts val="0"/>
+                </a:spcBef>
+                <a:buNone/>
+                <a:defRPr sz="1800" b="1">
+                  <a:solidFill>
+                    <a:schemeClr val="accent1"/>
+                  </a:solidFill>
+                  <a:latin typeface="+mn-lt"/>
+                  <a:ea typeface="+mn-ea"/>
+                </a:defRPr>
+              </a:lvl1pPr>
+            </a:lstStyle>
+            <a:p>
+              <a:r>
+                <a:rPr lang="ja-JP"/>
+                <a:t>→</a:t>
+              </a:r>
+            </a:p>
+          </p:txBody>
+        </p:sp>
+        <p:sp>
+          <p:nvSpPr>
+            <p:cNvPr id="13" name="WallLabel"/>
+            <p:cNvSpPr txBox="1"/>
+            <p:nvPr/>
+          </p:nvSpPr>
+          <p:spPr>
+            <a:xfrm>
+              <a:off x="4013200" y="1733550"/>
+              <a:ext cx="1905000" cy="247650"/>
+            </a:xfrm>
+            <a:prstGeom prst="rect">
+              <a:avLst/>
+            </a:prstGeom>
+            <a:noFill/>
+          </p:spPr>
+          <p:txBody>
+            <a:bodyPr wrap="square" lIns="0" tIns="0" rIns="0" bIns="0" anchor="ctr">
+              <a:noAutofit/>
+            </a:bodyPr>
+            <a:lstStyle>
+              <a:lvl1pPr marL="0" indent="0" algn="l">
+                <a:lnSpc>
+                  <a:spcPts val="1960"/>
+                </a:lnSpc>
+                <a:spcBef>
+                  <a:spcPts val="0"/>
+                </a:spcBef>
+                <a:buNone/>
+                <a:defRPr sz="1400" b="0">
+                  <a:solidFill>
+                    <a:schemeClr val="tx2"/>
+                  </a:solidFill>
+                  <a:latin typeface="+mn-lt"/>
+                  <a:ea typeface="+mn-ea"/>
+                </a:defRPr>
+              </a:lvl1pPr>
+            </a:lstStyle>
+            <a:p>
+              <a:r>
+                <a:rPr lang="ja-JP"/>
+                <a:t>1日の対応件数の上限</a:t>
+              </a:r>
+            </a:p>
+          </p:txBody>
+        </p:sp>
+        <p:sp>
+          <p:nvSpPr>
+            <p:cNvPr id="14" name="Beyond_card"/>
+            <p:cNvSpPr/>
+            <p:nvPr/>
+          </p:nvSpPr>
+          <p:spPr>
+            <a:xfrm>
+              <a:off x="5283200" y="2489200"/>
+              <a:ext cx="2667000" cy="1016000"/>
+            </a:xfrm>
+            <a:prstGeom prst="rect">
+              <a:avLst/>
+            </a:prstGeom>
+            <a:solidFill>
+              <a:schemeClr val="bg2">
+                <a:alpha val="45000"/>
+              </a:schemeClr>
+            </a:solidFill>
+            <a:ln>
+              <a:noFill/>
+            </a:ln>
+          </p:spPr>
+        </p:sp>
+        <p:sp>
+          <p:nvSpPr>
+            <p:cNvPr id="15" name="Beyond"/>
+            <p:cNvSpPr txBox="1"/>
+            <p:nvPr/>
+          </p:nvSpPr>
+          <p:spPr>
+            <a:xfrm>
+              <a:off x="5435600" y="2873375"/>
+              <a:ext cx="2362200" cy="247650"/>
+            </a:xfrm>
+            <a:prstGeom prst="rect">
+              <a:avLst/>
+            </a:prstGeom>
+            <a:noFill/>
+          </p:spPr>
+          <p:txBody>
+            <a:bodyPr wrap="square" lIns="0" tIns="0" rIns="0" bIns="0" anchor="ctr">
+              <a:noAutofit/>
+            </a:bodyPr>
+            <a:lstStyle>
+              <a:lvl1pPr marL="0" indent="0" algn="l">
+                <a:lnSpc>
+                  <a:spcPts val="1960"/>
+                </a:lnSpc>
+                <a:spcBef>
+                  <a:spcPts val="0"/>
+                </a:spcBef>
+                <a:buNone/>
+                <a:defRPr sz="1400" b="0">
+                  <a:solidFill>
+                    <a:schemeClr val="tx2"/>
+                  </a:solidFill>
+                  <a:latin typeface="+mn-lt"/>
+                  <a:ea typeface="+mn-ea"/>
+                </a:defRPr>
+              </a:lvl1pPr>
+            </a:lstStyle>
+            <a:p>
+              <a:r>
+                <a:rPr lang="ja-JP"/>
+                <a:t>問い合わせを減らす</a:t>
+              </a:r>
+            </a:p>
+          </p:txBody>
+        </p:sp>
+        <p:sp>
+          <p:nvSpPr>
+            <p:cNvPr id="16" name="Note"/>
+            <p:cNvSpPr txBox="1"/>
+            <p:nvPr/>
+          </p:nvSpPr>
+          <p:spPr>
+            <a:xfrm>
+              <a:off x="457200" y="4140200"/>
+              <a:ext cx="5715000" cy="196850"/>
             </a:xfrm>
             <a:prstGeom prst="rect">
               <a:avLst/>
@@ -15328,21 +15049,21 @@
             <a:p>
               <a:r>
                 <a:rPr lang="ja-JP"/>
-                <a:t>写真1（差し替え）</a:t>
+                <a:t>※ 壁の向こう側は薄く見せる（届かなかった対象）</a:t>
               </a:r>
             </a:p>
           </p:txBody>
         </p:sp>
         <p:sp>
           <p:nvSpPr>
-            <p:cNvPr id="5" name="Photo_2"/>
+            <p:cNvPr id="17" name="Brick_1a"/>
             <p:cNvSpPr/>
             <p:nvPr/>
           </p:nvSpPr>
           <p:spPr>
             <a:xfrm>
-              <a:off x="4800600" y="965200"/>
-              <a:ext cx="1866900" cy="1752600"/>
+              <a:off x="4013200" y="2057400"/>
+              <a:ext cx="532130" cy="212725"/>
             </a:xfrm>
             <a:prstGeom prst="rect">
               <a:avLst/>
@@ -15357,14 +15078,14 @@
         </p:sp>
         <p:sp>
           <p:nvSpPr>
-            <p:cNvPr id="6" name="Photo_3"/>
+            <p:cNvPr id="18" name="Brick_1b"/>
             <p:cNvSpPr/>
             <p:nvPr/>
           </p:nvSpPr>
           <p:spPr>
             <a:xfrm>
-              <a:off x="6819900" y="965200"/>
-              <a:ext cx="1866900" cy="1752600"/>
+              <a:off x="4583430" y="2057400"/>
+              <a:ext cx="318770" cy="212725"/>
             </a:xfrm>
             <a:prstGeom prst="rect">
               <a:avLst/>
@@ -15379,14 +15100,14 @@
         </p:sp>
         <p:sp>
           <p:nvSpPr>
-            <p:cNvPr id="7" name="Photo_4"/>
+            <p:cNvPr id="19" name="Brick_2a"/>
             <p:cNvSpPr/>
             <p:nvPr/>
           </p:nvSpPr>
           <p:spPr>
             <a:xfrm>
-              <a:off x="4800600" y="2870200"/>
-              <a:ext cx="1866900" cy="1752600"/>
+              <a:off x="4013200" y="2295525"/>
+              <a:ext cx="318770" cy="212725"/>
             </a:xfrm>
             <a:prstGeom prst="rect">
               <a:avLst/>
@@ -15401,14 +15122,14 @@
         </p:sp>
         <p:sp>
           <p:nvSpPr>
-            <p:cNvPr id="8" name="Photo_5"/>
+            <p:cNvPr id="20" name="Brick_2b"/>
             <p:cNvSpPr/>
             <p:nvPr/>
           </p:nvSpPr>
           <p:spPr>
             <a:xfrm>
-              <a:off x="6819900" y="2870200"/>
-              <a:ext cx="1866900" cy="1752600"/>
+              <a:off x="4370070" y="2295525"/>
+              <a:ext cx="532130" cy="212725"/>
             </a:xfrm>
             <a:prstGeom prst="rect">
               <a:avLst/>
@@ -15423,14 +15144,562 @@
         </p:sp>
         <p:sp>
           <p:nvSpPr>
-            <p:cNvPr id="9" name="Caption_2"/>
+            <p:cNvPr id="21" name="Brick_3a"/>
+            <p:cNvSpPr/>
+            <p:nvPr/>
+          </p:nvSpPr>
+          <p:spPr>
+            <a:xfrm>
+              <a:off x="4013200" y="2533650"/>
+              <a:ext cx="532130" cy="212725"/>
+            </a:xfrm>
+            <a:prstGeom prst="rect">
+              <a:avLst/>
+            </a:prstGeom>
+            <a:solidFill>
+              <a:schemeClr val="accent5"/>
+            </a:solidFill>
+            <a:ln>
+              <a:noFill/>
+            </a:ln>
+          </p:spPr>
+        </p:sp>
+        <p:sp>
+          <p:nvSpPr>
+            <p:cNvPr id="22" name="Brick_3b"/>
+            <p:cNvSpPr/>
+            <p:nvPr/>
+          </p:nvSpPr>
+          <p:spPr>
+            <a:xfrm>
+              <a:off x="4583430" y="2533650"/>
+              <a:ext cx="318770" cy="212725"/>
+            </a:xfrm>
+            <a:prstGeom prst="rect">
+              <a:avLst/>
+            </a:prstGeom>
+            <a:solidFill>
+              <a:schemeClr val="accent5"/>
+            </a:solidFill>
+            <a:ln>
+              <a:noFill/>
+            </a:ln>
+          </p:spPr>
+        </p:sp>
+        <p:sp>
+          <p:nvSpPr>
+            <p:cNvPr id="23" name="Brick_4a"/>
+            <p:cNvSpPr/>
+            <p:nvPr/>
+          </p:nvSpPr>
+          <p:spPr>
+            <a:xfrm>
+              <a:off x="4013200" y="2771775"/>
+              <a:ext cx="318770" cy="212725"/>
+            </a:xfrm>
+            <a:prstGeom prst="rect">
+              <a:avLst/>
+            </a:prstGeom>
+            <a:solidFill>
+              <a:schemeClr val="accent5"/>
+            </a:solidFill>
+            <a:ln>
+              <a:noFill/>
+            </a:ln>
+          </p:spPr>
+        </p:sp>
+        <p:sp>
+          <p:nvSpPr>
+            <p:cNvPr id="24" name="Brick_4b"/>
+            <p:cNvSpPr/>
+            <p:nvPr/>
+          </p:nvSpPr>
+          <p:spPr>
+            <a:xfrm>
+              <a:off x="4370070" y="2771775"/>
+              <a:ext cx="532130" cy="212725"/>
+            </a:xfrm>
+            <a:prstGeom prst="rect">
+              <a:avLst/>
+            </a:prstGeom>
+            <a:solidFill>
+              <a:schemeClr val="accent5"/>
+            </a:solidFill>
+            <a:ln>
+              <a:noFill/>
+            </a:ln>
+          </p:spPr>
+        </p:sp>
+        <p:sp>
+          <p:nvSpPr>
+            <p:cNvPr id="25" name="Brick_5a"/>
+            <p:cNvSpPr/>
+            <p:nvPr/>
+          </p:nvSpPr>
+          <p:spPr>
+            <a:xfrm>
+              <a:off x="4013200" y="3009900"/>
+              <a:ext cx="532130" cy="212725"/>
+            </a:xfrm>
+            <a:prstGeom prst="rect">
+              <a:avLst/>
+            </a:prstGeom>
+            <a:solidFill>
+              <a:schemeClr val="accent5"/>
+            </a:solidFill>
+            <a:ln>
+              <a:noFill/>
+            </a:ln>
+          </p:spPr>
+        </p:sp>
+        <p:sp>
+          <p:nvSpPr>
+            <p:cNvPr id="26" name="Brick_5b"/>
+            <p:cNvSpPr/>
+            <p:nvPr/>
+          </p:nvSpPr>
+          <p:spPr>
+            <a:xfrm>
+              <a:off x="4583430" y="3009900"/>
+              <a:ext cx="318770" cy="212725"/>
+            </a:xfrm>
+            <a:prstGeom prst="rect">
+              <a:avLst/>
+            </a:prstGeom>
+            <a:solidFill>
+              <a:schemeClr val="accent5"/>
+            </a:solidFill>
+            <a:ln>
+              <a:noFill/>
+            </a:ln>
+          </p:spPr>
+        </p:sp>
+        <p:sp>
+          <p:nvSpPr>
+            <p:cNvPr id="27" name="Brick_6a"/>
+            <p:cNvSpPr/>
+            <p:nvPr/>
+          </p:nvSpPr>
+          <p:spPr>
+            <a:xfrm>
+              <a:off x="4013200" y="3248025"/>
+              <a:ext cx="318770" cy="212725"/>
+            </a:xfrm>
+            <a:prstGeom prst="rect">
+              <a:avLst/>
+            </a:prstGeom>
+            <a:solidFill>
+              <a:schemeClr val="accent5"/>
+            </a:solidFill>
+            <a:ln>
+              <a:noFill/>
+            </a:ln>
+          </p:spPr>
+        </p:sp>
+        <p:sp>
+          <p:nvSpPr>
+            <p:cNvPr id="28" name="Brick_6b"/>
+            <p:cNvSpPr/>
+            <p:nvPr/>
+          </p:nvSpPr>
+          <p:spPr>
+            <a:xfrm>
+              <a:off x="4370070" y="3248025"/>
+              <a:ext cx="532130" cy="212725"/>
+            </a:xfrm>
+            <a:prstGeom prst="rect">
+              <a:avLst/>
+            </a:prstGeom>
+            <a:solidFill>
+              <a:schemeClr val="accent5"/>
+            </a:solidFill>
+            <a:ln>
+              <a:noFill/>
+            </a:ln>
+          </p:spPr>
+        </p:sp>
+        <p:sp>
+          <p:nvSpPr>
+            <p:cNvPr id="29" name="Brick_7a"/>
+            <p:cNvSpPr/>
+            <p:nvPr/>
+          </p:nvSpPr>
+          <p:spPr>
+            <a:xfrm>
+              <a:off x="4013200" y="3486150"/>
+              <a:ext cx="532130" cy="212725"/>
+            </a:xfrm>
+            <a:prstGeom prst="rect">
+              <a:avLst/>
+            </a:prstGeom>
+            <a:solidFill>
+              <a:schemeClr val="accent5"/>
+            </a:solidFill>
+            <a:ln>
+              <a:noFill/>
+            </a:ln>
+          </p:spPr>
+        </p:sp>
+        <p:sp>
+          <p:nvSpPr>
+            <p:cNvPr id="30" name="Brick_7b"/>
+            <p:cNvSpPr/>
+            <p:nvPr/>
+          </p:nvSpPr>
+          <p:spPr>
+            <a:xfrm>
+              <a:off x="4583430" y="3486150"/>
+              <a:ext cx="318770" cy="212725"/>
+            </a:xfrm>
+            <a:prstGeom prst="rect">
+              <a:avLst/>
+            </a:prstGeom>
+            <a:solidFill>
+              <a:schemeClr val="accent5"/>
+            </a:solidFill>
+            <a:ln>
+              <a:noFill/>
+            </a:ln>
+          </p:spPr>
+        </p:sp>
+        <p:sp>
+          <p:nvSpPr>
+            <p:cNvPr id="31" name="Brick_8a"/>
+            <p:cNvSpPr/>
+            <p:nvPr/>
+          </p:nvSpPr>
+          <p:spPr>
+            <a:xfrm>
+              <a:off x="4013200" y="3724275"/>
+              <a:ext cx="318770" cy="212725"/>
+            </a:xfrm>
+            <a:prstGeom prst="rect">
+              <a:avLst/>
+            </a:prstGeom>
+            <a:solidFill>
+              <a:schemeClr val="accent5"/>
+            </a:solidFill>
+            <a:ln>
+              <a:noFill/>
+            </a:ln>
+          </p:spPr>
+        </p:sp>
+        <p:sp>
+          <p:nvSpPr>
+            <p:cNvPr id="32" name="Brick_8b"/>
+            <p:cNvSpPr/>
+            <p:nvPr/>
+          </p:nvSpPr>
+          <p:spPr>
+            <a:xfrm>
+              <a:off x="4370070" y="3724275"/>
+              <a:ext cx="532130" cy="212725"/>
+            </a:xfrm>
+            <a:prstGeom prst="rect">
+              <a:avLst/>
+            </a:prstGeom>
+            <a:solidFill>
+              <a:schemeClr val="accent5"/>
+            </a:solidFill>
+            <a:ln>
+              <a:noFill/>
+            </a:ln>
+          </p:spPr>
+        </p:sp>
+      </p:grpSp>
+      <p:sp>
+        <p:nvSpPr>
+          <p:cNvPr id="34" name="SlideNumber"/>
+          <p:cNvSpPr>
+            <a:spLocks noGrp="1"/>
+          </p:cNvSpPr>
+          <p:nvPr>
+            <p:ph type="sldNum" idx="12" sz="quarter"/>
+          </p:nvPr>
+        </p:nvSpPr>
+        <p:spPr/>
+        <p:txBody>
+          <a:bodyPr/>
+          <a:lstStyle/>
+          <a:p>
+            <a:fld id="{B6F15528-21DE-4FAA-801E-634DDDAF4B2B}" type="slidenum">
+              <a:rPr lang="ja-JP"/>
+              <a:t>‹#›</a:t>
+            </a:fld>
+          </a:p>
+        </p:txBody>
+      </p:sp>
+    </p:spTree>
+  </p:cSld>
+  <p:clrMapOvr>
+    <a:masterClrMapping/>
+  </p:clrMapOvr>
+</p:sld>
+</file>
+
+<file path=ppt/slides/slide24.xml><?xml version="1.0" encoding="utf-8"?>
+<p:sld xmlns:a="http://schemas.openxmlformats.org/drawingml/2006/main" xmlns:r="http://schemas.openxmlformats.org/officeDocument/2006/relationships" xmlns:p="http://schemas.openxmlformats.org/presentationml/2006/main">
+  <p:cSld>
+    <p:spTree>
+      <p:nvGrpSpPr>
+        <p:cNvPr id="1" name=""/>
+        <p:cNvGrpSpPr/>
+        <p:nvPr/>
+      </p:nvGrpSpPr>
+      <p:grpSpPr>
+        <a:xfrm>
+          <a:off x="0" y="0"/>
+          <a:ext cx="0" cy="0"/>
+          <a:chOff x="0" y="0"/>
+          <a:chExt cx="0" cy="0"/>
+        </a:xfrm>
+      </p:grpSpPr>
+      <p:sp>
+        <p:nvSpPr>
+          <p:cNvPr id="2" name="Title"/>
+          <p:cNvSpPr>
+            <a:spLocks noGrp="1"/>
+          </p:cNvSpPr>
+          <p:nvPr>
+            <p:ph type="title"/>
+          </p:nvPr>
+        </p:nvSpPr>
+        <p:spPr/>
+        <p:txBody>
+          <a:bodyPr/>
+          <a:lstStyle/>
+          <a:p>
+            <a:r>
+              <a:rPr lang="ja-JP"/>
+              <a:t>運用ルールが回らなくなった</a:t>
+            </a:r>
+          </a:p>
+        </p:txBody>
+      </p:sp>
+      <p:sp>
+        <p:nvSpPr>
+          <p:cNvPr id="3" name="Lead"/>
+          <p:cNvSpPr>
+            <a:spLocks noGrp="1"/>
+          </p:cNvSpPr>
+          <p:nvPr>
+            <p:ph type="body" idx="13" sz="quarter"/>
+          </p:nvPr>
+        </p:nvSpPr>
+        <p:spPr/>
+        <p:txBody>
+          <a:bodyPr/>
+          <a:lstStyle/>
+          <a:p>
+            <a:r>
+              <a:rPr lang="ja-JP"/>
+              <a:t>足し続けた結果、誰も全体を把握できない</a:t>
+            </a:r>
+          </a:p>
+        </p:txBody>
+      </p:sp>
+      <p:grpSp>
+        <p:nvGrpSpPr>
+          <p:cNvPr id="13" name="organism/O-B26 積層（積み上がって破綻）"/>
+          <p:cNvGrpSpPr/>
+          <p:nvPr/>
+        </p:nvGrpSpPr>
+        <p:grpSpPr>
+          <a:xfrm>
+            <a:off x="457200" y="1600200"/>
+            <a:ext cx="8229600" cy="2794000"/>
+            <a:chOff x="457200" y="1600200"/>
+            <a:chExt cx="8229600" cy="2794000"/>
+          </a:xfrm>
+        </p:grpSpPr>
+        <p:sp>
+          <p:nvSpPr>
+            <p:cNvPr id="4" name="Slab_1"/>
+            <p:cNvSpPr/>
+            <p:nvPr/>
+          </p:nvSpPr>
+          <p:spPr>
+            <a:xfrm>
+              <a:off x="457200" y="3670300"/>
+              <a:ext cx="1905000" cy="215900"/>
+            </a:xfrm>
+            <a:prstGeom prst="rect">
+              <a:avLst/>
+            </a:prstGeom>
+            <a:solidFill>
+              <a:schemeClr val="accent5"/>
+            </a:solidFill>
+            <a:ln>
+              <a:noFill/>
+            </a:ln>
+          </p:spPr>
+        </p:sp>
+        <p:sp>
+          <p:nvSpPr>
+            <p:cNvPr id="5" name="Slab_2"/>
+            <p:cNvSpPr/>
+            <p:nvPr/>
+          </p:nvSpPr>
+          <p:spPr>
+            <a:xfrm>
+              <a:off x="469900" y="3378200"/>
+              <a:ext cx="1905000" cy="215900"/>
+            </a:xfrm>
+            <a:prstGeom prst="rect">
+              <a:avLst/>
+            </a:prstGeom>
+            <a:solidFill>
+              <a:schemeClr val="accent5"/>
+            </a:solidFill>
+            <a:ln>
+              <a:noFill/>
+            </a:ln>
+          </p:spPr>
+        </p:sp>
+        <p:sp>
+          <p:nvSpPr>
+            <p:cNvPr id="6" name="Slab_3"/>
+            <p:cNvSpPr/>
+            <p:nvPr/>
+          </p:nvSpPr>
+          <p:spPr>
+            <a:xfrm>
+              <a:off x="495300" y="3086100"/>
+              <a:ext cx="1905000" cy="215900"/>
+            </a:xfrm>
+            <a:prstGeom prst="rect">
+              <a:avLst/>
+            </a:prstGeom>
+            <a:solidFill>
+              <a:schemeClr val="accent5"/>
+            </a:solidFill>
+            <a:ln>
+              <a:noFill/>
+            </a:ln>
+          </p:spPr>
+        </p:sp>
+        <p:sp>
+          <p:nvSpPr>
+            <p:cNvPr id="7" name="Slab_4"/>
+            <p:cNvSpPr/>
+            <p:nvPr/>
+          </p:nvSpPr>
+          <p:spPr>
+            <a:xfrm>
+              <a:off x="546100" y="2794000"/>
+              <a:ext cx="1905000" cy="215900"/>
+            </a:xfrm>
+            <a:prstGeom prst="rect">
+              <a:avLst/>
+            </a:prstGeom>
+            <a:solidFill>
+              <a:schemeClr val="accent5"/>
+            </a:solidFill>
+            <a:ln>
+              <a:noFill/>
+            </a:ln>
+          </p:spPr>
+        </p:sp>
+        <p:sp>
+          <p:nvSpPr>
+            <p:cNvPr id="8" name="Slab_5"/>
+            <p:cNvSpPr/>
+            <p:nvPr/>
+          </p:nvSpPr>
+          <p:spPr>
+            <a:xfrm>
+              <a:off x="622300" y="2501900"/>
+              <a:ext cx="1905000" cy="215900"/>
+            </a:xfrm>
+            <a:prstGeom prst="rect">
+              <a:avLst/>
+            </a:prstGeom>
+            <a:solidFill>
+              <a:schemeClr val="accent5"/>
+            </a:solidFill>
+            <a:ln>
+              <a:noFill/>
+            </a:ln>
+          </p:spPr>
+        </p:sp>
+        <p:sp>
+          <p:nvSpPr>
+            <p:cNvPr id="9" name="Slab_6"/>
+            <p:cNvSpPr/>
+            <p:nvPr/>
+          </p:nvSpPr>
+          <p:spPr>
+            <a:xfrm rot="240000">
+              <a:off x="701358" y="2275967"/>
+              <a:ext cx="1905000" cy="215900"/>
+            </a:xfrm>
+            <a:prstGeom prst="rect">
+              <a:avLst/>
+            </a:prstGeom>
+            <a:solidFill>
+              <a:schemeClr val="accent5"/>
+            </a:solidFill>
+            <a:ln>
+              <a:noFill/>
+            </a:ln>
+          </p:spPr>
+        </p:sp>
+        <p:sp>
+          <p:nvSpPr>
+            <p:cNvPr id="10" name="StackLabel"/>
             <p:cNvSpPr txBox="1"/>
             <p:nvPr/>
           </p:nvSpPr>
           <p:spPr>
             <a:xfrm>
-              <a:off x="4927600" y="2463800"/>
-              <a:ext cx="1612900" cy="196850"/>
+              <a:off x="457200" y="1885950"/>
+              <a:ext cx="2921000" cy="247650"/>
+            </a:xfrm>
+            <a:prstGeom prst="rect">
+              <a:avLst/>
+            </a:prstGeom>
+            <a:noFill/>
+          </p:spPr>
+          <p:txBody>
+            <a:bodyPr wrap="square" lIns="0" tIns="0" rIns="0" bIns="0" anchor="ctr">
+              <a:noAutofit/>
+            </a:bodyPr>
+            <a:lstStyle>
+              <a:lvl1pPr marL="0" indent="0" algn="l">
+                <a:lnSpc>
+                  <a:spcPts val="1960"/>
+                </a:lnSpc>
+                <a:spcBef>
+                  <a:spcPts val="0"/>
+                </a:spcBef>
+                <a:buNone/>
+                <a:defRPr sz="1400" b="0">
+                  <a:solidFill>
+                    <a:schemeClr val="tx1"/>
+                  </a:solidFill>
+                  <a:latin typeface="+mn-lt"/>
+                  <a:ea typeface="+mn-ea"/>
+                </a:defRPr>
+              </a:lvl1pPr>
+            </a:lstStyle>
+            <a:p>
+              <a:r>
+                <a:rPr lang="ja-JP"/>
+                <a:t>増え続ける運用ルール</a:t>
+              </a:r>
+            </a:p>
+          </p:txBody>
+        </p:sp>
+        <p:sp>
+          <p:nvSpPr>
+            <p:cNvPr id="11" name="StackNote"/>
+            <p:cNvSpPr txBox="1"/>
+            <p:nvPr/>
+          </p:nvSpPr>
+          <p:spPr>
+            <a:xfrm>
+              <a:off x="2997200" y="2949575"/>
+              <a:ext cx="2540000" cy="196850"/>
             </a:xfrm>
             <a:prstGeom prst="rect">
               <a:avLst/>
@@ -15462,21 +15731,21 @@
             <a:p>
               <a:r>
                 <a:rPr lang="ja-JP"/>
-                <a:t>写真2</a:t>
+                <a:t>書いても書いても終わらない</a:t>
               </a:r>
             </a:p>
           </p:txBody>
         </p:sp>
         <p:sp>
           <p:nvSpPr>
-            <p:cNvPr id="10" name="Caption_3"/>
+            <p:cNvPr id="12" name="Note"/>
             <p:cNvSpPr txBox="1"/>
             <p:nvPr/>
           </p:nvSpPr>
           <p:spPr>
             <a:xfrm>
-              <a:off x="6946900" y="2463800"/>
-              <a:ext cx="1612900" cy="196850"/>
+              <a:off x="457200" y="4140200"/>
+              <a:ext cx="5715000" cy="196850"/>
             </a:xfrm>
             <a:prstGeom prst="rect">
               <a:avLst/>
@@ -15508,99 +15777,7 @@
             <a:p>
               <a:r>
                 <a:rPr lang="ja-JP"/>
-                <a:t>写真3</a:t>
-              </a:r>
-            </a:p>
-          </p:txBody>
-        </p:sp>
-        <p:sp>
-          <p:nvSpPr>
-            <p:cNvPr id="11" name="Caption_4"/>
-            <p:cNvSpPr txBox="1"/>
-            <p:nvPr/>
-          </p:nvSpPr>
-          <p:spPr>
-            <a:xfrm>
-              <a:off x="4927600" y="4368800"/>
-              <a:ext cx="1612900" cy="196850"/>
-            </a:xfrm>
-            <a:prstGeom prst="rect">
-              <a:avLst/>
-            </a:prstGeom>
-            <a:noFill/>
-          </p:spPr>
-          <p:txBody>
-            <a:bodyPr wrap="square" lIns="0" tIns="0" rIns="0" bIns="0" anchor="ctr">
-              <a:noAutofit/>
-            </a:bodyPr>
-            <a:lstStyle>
-              <a:lvl1pPr marL="0" indent="0" algn="l">
-                <a:lnSpc>
-                  <a:spcPts val="1540"/>
-                </a:lnSpc>
-                <a:spcBef>
-                  <a:spcPts val="0"/>
-                </a:spcBef>
-                <a:buNone/>
-                <a:defRPr sz="1100" b="0">
-                  <a:solidFill>
-                    <a:schemeClr val="tx2"/>
-                  </a:solidFill>
-                  <a:latin typeface="+mn-lt"/>
-                  <a:ea typeface="+mn-ea"/>
-                </a:defRPr>
-              </a:lvl1pPr>
-            </a:lstStyle>
-            <a:p>
-              <a:r>
-                <a:rPr lang="ja-JP"/>
-                <a:t>写真4</a:t>
-              </a:r>
-            </a:p>
-          </p:txBody>
-        </p:sp>
-        <p:sp>
-          <p:nvSpPr>
-            <p:cNvPr id="12" name="Caption_5"/>
-            <p:cNvSpPr txBox="1"/>
-            <p:nvPr/>
-          </p:nvSpPr>
-          <p:spPr>
-            <a:xfrm>
-              <a:off x="6946900" y="4368800"/>
-              <a:ext cx="1612900" cy="196850"/>
-            </a:xfrm>
-            <a:prstGeom prst="rect">
-              <a:avLst/>
-            </a:prstGeom>
-            <a:noFill/>
-          </p:spPr>
-          <p:txBody>
-            <a:bodyPr wrap="square" lIns="0" tIns="0" rIns="0" bIns="0" anchor="ctr">
-              <a:noAutofit/>
-            </a:bodyPr>
-            <a:lstStyle>
-              <a:lvl1pPr marL="0" indent="0" algn="l">
-                <a:lnSpc>
-                  <a:spcPts val="1540"/>
-                </a:lnSpc>
-                <a:spcBef>
-                  <a:spcPts val="0"/>
-                </a:spcBef>
-                <a:buNone/>
-                <a:defRPr sz="1100" b="0">
-                  <a:solidFill>
-                    <a:schemeClr val="tx2"/>
-                  </a:solidFill>
-                  <a:latin typeface="+mn-lt"/>
-                  <a:ea typeface="+mn-ea"/>
-                </a:defRPr>
-              </a:lvl1pPr>
-            </a:lstStyle>
-            <a:p>
-              <a:r>
-                <a:rPr lang="ja-JP"/>
-                <a:t>写真5</a:t>
+                <a:t>※ 矩形の中は空にする（傾いた面の文字は読めない）</a:t>
               </a:r>
             </a:p>
           </p:txBody>
@@ -15636,7 +15813,1751 @@
 </p:sld>
 </file>
 
-<file path=ppt/slides/slide24.xml><?xml version="1.0" encoding="utf-8"?>
+<file path=ppt/slides/slide25.xml><?xml version="1.0" encoding="utf-8"?>
+<p:sld xmlns:a="http://schemas.openxmlformats.org/drawingml/2006/main" xmlns:r="http://schemas.openxmlformats.org/officeDocument/2006/relationships" xmlns:p="http://schemas.openxmlformats.org/presentationml/2006/main">
+  <p:cSld>
+    <p:spTree>
+      <p:nvGrpSpPr>
+        <p:cNvPr id="1" name=""/>
+        <p:cNvGrpSpPr/>
+        <p:nvPr/>
+      </p:nvGrpSpPr>
+      <p:grpSpPr>
+        <a:xfrm>
+          <a:off x="0" y="0"/>
+          <a:ext cx="0" cy="0"/>
+          <a:chOff x="0" y="0"/>
+          <a:chExt cx="0" cy="0"/>
+        </a:xfrm>
+      </p:grpSpPr>
+      <p:sp>
+        <p:nvSpPr>
+          <p:cNvPr id="2" name="Title"/>
+          <p:cNvSpPr>
+            <a:spLocks noGrp="1"/>
+          </p:cNvSpPr>
+          <p:nvPr>
+            <p:ph type="title"/>
+          </p:nvPr>
+        </p:nvSpPr>
+        <p:spPr/>
+        <p:txBody>
+          <a:bodyPr/>
+          <a:lstStyle/>
+          <a:p>
+            <a:r>
+              <a:rPr lang="ja-JP"/>
+              <a:t>目次</a:t>
+            </a:r>
+          </a:p>
+        </p:txBody>
+      </p:sp>
+      <p:grpSp>
+        <p:nvGrpSpPr>
+          <p:cNvPr id="33" name="organism/O-S1 目次"/>
+          <p:cNvGrpSpPr/>
+          <p:nvPr/>
+        </p:nvGrpSpPr>
+        <p:grpSpPr>
+          <a:xfrm>
+            <a:off x="457200" y="965200"/>
+            <a:ext cx="8229600" cy="3657600"/>
+            <a:chOff x="457200" y="965200"/>
+            <a:chExt cx="8229600" cy="3657600"/>
+          </a:xfrm>
+        </p:grpSpPr>
+        <p:sp>
+          <p:nvSpPr>
+            <p:cNvPr id="3" name="Rule_01"/>
+            <p:cNvSpPr/>
+            <p:nvPr/>
+          </p:nvSpPr>
+          <p:spPr>
+            <a:xfrm>
+              <a:off x="457200" y="965200"/>
+              <a:ext cx="3962400" cy="12700"/>
+            </a:xfrm>
+            <a:prstGeom prst="rect">
+              <a:avLst/>
+            </a:prstGeom>
+            <a:solidFill>
+              <a:schemeClr val="accent5"/>
+            </a:solidFill>
+            <a:ln>
+              <a:noFill/>
+            </a:ln>
+          </p:spPr>
+        </p:sp>
+        <p:sp>
+          <p:nvSpPr>
+            <p:cNvPr id="4" name="Rule_02"/>
+            <p:cNvSpPr/>
+            <p:nvPr/>
+          </p:nvSpPr>
+          <p:spPr>
+            <a:xfrm>
+              <a:off x="4724400" y="965200"/>
+              <a:ext cx="3962400" cy="12700"/>
+            </a:xfrm>
+            <a:prstGeom prst="rect">
+              <a:avLst/>
+            </a:prstGeom>
+            <a:solidFill>
+              <a:schemeClr val="accent5"/>
+            </a:solidFill>
+            <a:ln>
+              <a:noFill/>
+            </a:ln>
+          </p:spPr>
+        </p:sp>
+        <p:sp>
+          <p:nvSpPr>
+            <p:cNvPr id="5" name="Rule_03"/>
+            <p:cNvSpPr/>
+            <p:nvPr/>
+          </p:nvSpPr>
+          <p:spPr>
+            <a:xfrm>
+              <a:off x="457200" y="2235200"/>
+              <a:ext cx="3962400" cy="12700"/>
+            </a:xfrm>
+            <a:prstGeom prst="rect">
+              <a:avLst/>
+            </a:prstGeom>
+            <a:solidFill>
+              <a:schemeClr val="accent5"/>
+            </a:solidFill>
+            <a:ln>
+              <a:noFill/>
+            </a:ln>
+          </p:spPr>
+        </p:sp>
+        <p:sp>
+          <p:nvSpPr>
+            <p:cNvPr id="6" name="Rule_04"/>
+            <p:cNvSpPr/>
+            <p:nvPr/>
+          </p:nvSpPr>
+          <p:spPr>
+            <a:xfrm>
+              <a:off x="4724400" y="2235200"/>
+              <a:ext cx="3962400" cy="12700"/>
+            </a:xfrm>
+            <a:prstGeom prst="rect">
+              <a:avLst/>
+            </a:prstGeom>
+            <a:solidFill>
+              <a:schemeClr val="accent5"/>
+            </a:solidFill>
+            <a:ln>
+              <a:noFill/>
+            </a:ln>
+          </p:spPr>
+        </p:sp>
+        <p:sp>
+          <p:nvSpPr>
+            <p:cNvPr id="7" name="Rule_05"/>
+            <p:cNvSpPr/>
+            <p:nvPr/>
+          </p:nvSpPr>
+          <p:spPr>
+            <a:xfrm>
+              <a:off x="457200" y="3505200"/>
+              <a:ext cx="3962400" cy="12700"/>
+            </a:xfrm>
+            <a:prstGeom prst="rect">
+              <a:avLst/>
+            </a:prstGeom>
+            <a:solidFill>
+              <a:schemeClr val="accent5"/>
+            </a:solidFill>
+            <a:ln>
+              <a:noFill/>
+            </a:ln>
+          </p:spPr>
+        </p:sp>
+        <p:sp>
+          <p:nvSpPr>
+            <p:cNvPr id="8" name="Rule_06"/>
+            <p:cNvSpPr/>
+            <p:nvPr/>
+          </p:nvSpPr>
+          <p:spPr>
+            <a:xfrm>
+              <a:off x="4724400" y="3505200"/>
+              <a:ext cx="3962400" cy="12700"/>
+            </a:xfrm>
+            <a:prstGeom prst="rect">
+              <a:avLst/>
+            </a:prstGeom>
+            <a:solidFill>
+              <a:schemeClr val="accent5"/>
+            </a:solidFill>
+            <a:ln>
+              <a:noFill/>
+            </a:ln>
+          </p:spPr>
+        </p:sp>
+        <p:sp>
+          <p:nvSpPr>
+            <p:cNvPr id="9" name="No_01"/>
+            <p:cNvSpPr txBox="1"/>
+            <p:nvPr/>
+          </p:nvSpPr>
+          <p:spPr>
+            <a:xfrm>
+              <a:off x="457200" y="1117600"/>
+              <a:ext cx="381000" cy="247650"/>
+            </a:xfrm>
+            <a:prstGeom prst="rect">
+              <a:avLst/>
+            </a:prstGeom>
+            <a:noFill/>
+          </p:spPr>
+          <p:txBody>
+            <a:bodyPr wrap="square" lIns="0" tIns="0" rIns="0" bIns="0" anchor="ctr">
+              <a:noAutofit/>
+            </a:bodyPr>
+            <a:lstStyle>
+              <a:lvl1pPr marL="0" indent="0" algn="l">
+                <a:lnSpc>
+                  <a:spcPts val="1960"/>
+                </a:lnSpc>
+                <a:spcBef>
+                  <a:spcPts val="0"/>
+                </a:spcBef>
+                <a:buNone/>
+                <a:defRPr sz="1400" b="0">
+                  <a:solidFill>
+                    <a:schemeClr val="accent1"/>
+                  </a:solidFill>
+                  <a:latin typeface="+mn-lt"/>
+                  <a:ea typeface="+mn-ea"/>
+                </a:defRPr>
+              </a:lvl1pPr>
+            </a:lstStyle>
+            <a:p>
+              <a:r>
+                <a:rPr lang="ja-JP"/>
+                <a:t>01</a:t>
+              </a:r>
+            </a:p>
+          </p:txBody>
+        </p:sp>
+        <p:sp>
+          <p:nvSpPr>
+            <p:cNvPr id="10" name="No_02"/>
+            <p:cNvSpPr txBox="1"/>
+            <p:nvPr/>
+          </p:nvSpPr>
+          <p:spPr>
+            <a:xfrm>
+              <a:off x="4724400" y="1117600"/>
+              <a:ext cx="381000" cy="247650"/>
+            </a:xfrm>
+            <a:prstGeom prst="rect">
+              <a:avLst/>
+            </a:prstGeom>
+            <a:noFill/>
+          </p:spPr>
+          <p:txBody>
+            <a:bodyPr wrap="square" lIns="0" tIns="0" rIns="0" bIns="0" anchor="ctr">
+              <a:noAutofit/>
+            </a:bodyPr>
+            <a:lstStyle>
+              <a:lvl1pPr marL="0" indent="0" algn="l">
+                <a:lnSpc>
+                  <a:spcPts val="1960"/>
+                </a:lnSpc>
+                <a:spcBef>
+                  <a:spcPts val="0"/>
+                </a:spcBef>
+                <a:buNone/>
+                <a:defRPr sz="1400" b="0">
+                  <a:solidFill>
+                    <a:schemeClr val="accent1"/>
+                  </a:solidFill>
+                  <a:latin typeface="+mn-lt"/>
+                  <a:ea typeface="+mn-ea"/>
+                </a:defRPr>
+              </a:lvl1pPr>
+            </a:lstStyle>
+            <a:p>
+              <a:r>
+                <a:rPr lang="ja-JP"/>
+                <a:t>02</a:t>
+              </a:r>
+            </a:p>
+          </p:txBody>
+        </p:sp>
+        <p:sp>
+          <p:nvSpPr>
+            <p:cNvPr id="11" name="No_03"/>
+            <p:cNvSpPr txBox="1"/>
+            <p:nvPr/>
+          </p:nvSpPr>
+          <p:spPr>
+            <a:xfrm>
+              <a:off x="457200" y="2387600"/>
+              <a:ext cx="381000" cy="247650"/>
+            </a:xfrm>
+            <a:prstGeom prst="rect">
+              <a:avLst/>
+            </a:prstGeom>
+            <a:noFill/>
+          </p:spPr>
+          <p:txBody>
+            <a:bodyPr wrap="square" lIns="0" tIns="0" rIns="0" bIns="0" anchor="ctr">
+              <a:noAutofit/>
+            </a:bodyPr>
+            <a:lstStyle>
+              <a:lvl1pPr marL="0" indent="0" algn="l">
+                <a:lnSpc>
+                  <a:spcPts val="1960"/>
+                </a:lnSpc>
+                <a:spcBef>
+                  <a:spcPts val="0"/>
+                </a:spcBef>
+                <a:buNone/>
+                <a:defRPr sz="1400" b="0">
+                  <a:solidFill>
+                    <a:schemeClr val="accent1"/>
+                  </a:solidFill>
+                  <a:latin typeface="+mn-lt"/>
+                  <a:ea typeface="+mn-ea"/>
+                </a:defRPr>
+              </a:lvl1pPr>
+            </a:lstStyle>
+            <a:p>
+              <a:r>
+                <a:rPr lang="ja-JP"/>
+                <a:t>03</a:t>
+              </a:r>
+            </a:p>
+          </p:txBody>
+        </p:sp>
+        <p:sp>
+          <p:nvSpPr>
+            <p:cNvPr id="12" name="No_04"/>
+            <p:cNvSpPr txBox="1"/>
+            <p:nvPr/>
+          </p:nvSpPr>
+          <p:spPr>
+            <a:xfrm>
+              <a:off x="4724400" y="2387600"/>
+              <a:ext cx="381000" cy="247650"/>
+            </a:xfrm>
+            <a:prstGeom prst="rect">
+              <a:avLst/>
+            </a:prstGeom>
+            <a:noFill/>
+          </p:spPr>
+          <p:txBody>
+            <a:bodyPr wrap="square" lIns="0" tIns="0" rIns="0" bIns="0" anchor="ctr">
+              <a:noAutofit/>
+            </a:bodyPr>
+            <a:lstStyle>
+              <a:lvl1pPr marL="0" indent="0" algn="l">
+                <a:lnSpc>
+                  <a:spcPts val="1960"/>
+                </a:lnSpc>
+                <a:spcBef>
+                  <a:spcPts val="0"/>
+                </a:spcBef>
+                <a:buNone/>
+                <a:defRPr sz="1400" b="0">
+                  <a:solidFill>
+                    <a:schemeClr val="accent1"/>
+                  </a:solidFill>
+                  <a:latin typeface="+mn-lt"/>
+                  <a:ea typeface="+mn-ea"/>
+                </a:defRPr>
+              </a:lvl1pPr>
+            </a:lstStyle>
+            <a:p>
+              <a:r>
+                <a:rPr lang="ja-JP"/>
+                <a:t>04</a:t>
+              </a:r>
+            </a:p>
+          </p:txBody>
+        </p:sp>
+        <p:sp>
+          <p:nvSpPr>
+            <p:cNvPr id="13" name="No_05"/>
+            <p:cNvSpPr txBox="1"/>
+            <p:nvPr/>
+          </p:nvSpPr>
+          <p:spPr>
+            <a:xfrm>
+              <a:off x="457200" y="3657600"/>
+              <a:ext cx="381000" cy="247650"/>
+            </a:xfrm>
+            <a:prstGeom prst="rect">
+              <a:avLst/>
+            </a:prstGeom>
+            <a:noFill/>
+          </p:spPr>
+          <p:txBody>
+            <a:bodyPr wrap="square" lIns="0" tIns="0" rIns="0" bIns="0" anchor="ctr">
+              <a:noAutofit/>
+            </a:bodyPr>
+            <a:lstStyle>
+              <a:lvl1pPr marL="0" indent="0" algn="l">
+                <a:lnSpc>
+                  <a:spcPts val="1960"/>
+                </a:lnSpc>
+                <a:spcBef>
+                  <a:spcPts val="0"/>
+                </a:spcBef>
+                <a:buNone/>
+                <a:defRPr sz="1400" b="0">
+                  <a:solidFill>
+                    <a:schemeClr val="accent1"/>
+                  </a:solidFill>
+                  <a:latin typeface="+mn-lt"/>
+                  <a:ea typeface="+mn-ea"/>
+                </a:defRPr>
+              </a:lvl1pPr>
+            </a:lstStyle>
+            <a:p>
+              <a:r>
+                <a:rPr lang="ja-JP"/>
+                <a:t>05</a:t>
+              </a:r>
+            </a:p>
+          </p:txBody>
+        </p:sp>
+        <p:sp>
+          <p:nvSpPr>
+            <p:cNvPr id="14" name="No_06"/>
+            <p:cNvSpPr txBox="1"/>
+            <p:nvPr/>
+          </p:nvSpPr>
+          <p:spPr>
+            <a:xfrm>
+              <a:off x="4724400" y="3657600"/>
+              <a:ext cx="381000" cy="247650"/>
+            </a:xfrm>
+            <a:prstGeom prst="rect">
+              <a:avLst/>
+            </a:prstGeom>
+            <a:noFill/>
+          </p:spPr>
+          <p:txBody>
+            <a:bodyPr wrap="square" lIns="0" tIns="0" rIns="0" bIns="0" anchor="ctr">
+              <a:noAutofit/>
+            </a:bodyPr>
+            <a:lstStyle>
+              <a:lvl1pPr marL="0" indent="0" algn="l">
+                <a:lnSpc>
+                  <a:spcPts val="1960"/>
+                </a:lnSpc>
+                <a:spcBef>
+                  <a:spcPts val="0"/>
+                </a:spcBef>
+                <a:buNone/>
+                <a:defRPr sz="1400" b="0">
+                  <a:solidFill>
+                    <a:schemeClr val="accent1"/>
+                  </a:solidFill>
+                  <a:latin typeface="+mn-lt"/>
+                  <a:ea typeface="+mn-ea"/>
+                </a:defRPr>
+              </a:lvl1pPr>
+            </a:lstStyle>
+            <a:p>
+              <a:r>
+                <a:rPr lang="ja-JP"/>
+                <a:t>06</a:t>
+              </a:r>
+            </a:p>
+          </p:txBody>
+        </p:sp>
+        <p:sp>
+          <p:nvSpPr>
+            <p:cNvPr id="15" name="Title_01"/>
+            <p:cNvSpPr txBox="1"/>
+            <p:nvPr/>
+          </p:nvSpPr>
+          <p:spPr>
+            <a:xfrm>
+              <a:off x="914400" y="1079500"/>
+              <a:ext cx="2946400" cy="298450"/>
+            </a:xfrm>
+            <a:prstGeom prst="rect">
+              <a:avLst/>
+            </a:prstGeom>
+            <a:noFill/>
+          </p:spPr>
+          <p:txBody>
+            <a:bodyPr wrap="square" lIns="0" tIns="0" rIns="0" bIns="0" anchor="ctr">
+              <a:noAutofit/>
+            </a:bodyPr>
+            <a:lstStyle>
+              <a:lvl1pPr marL="0" indent="0" algn="l">
+                <a:lnSpc>
+                  <a:spcPts val="2340"/>
+                </a:lnSpc>
+                <a:spcBef>
+                  <a:spcPts val="0"/>
+                </a:spcBef>
+                <a:buNone/>
+                <a:defRPr sz="1800" b="1">
+                  <a:solidFill>
+                    <a:schemeClr val="tx1"/>
+                  </a:solidFill>
+                  <a:latin typeface="+mn-lt"/>
+                  <a:ea typeface="+mn-ea"/>
+                </a:defRPr>
+              </a:lvl1pPr>
+            </a:lstStyle>
+            <a:p>
+              <a:r>
+                <a:rPr lang="ja-JP"/>
+                <a:t>今月の読まれ方</a:t>
+              </a:r>
+            </a:p>
+          </p:txBody>
+        </p:sp>
+        <p:sp>
+          <p:nvSpPr>
+            <p:cNvPr id="16" name="Title_02"/>
+            <p:cNvSpPr txBox="1"/>
+            <p:nvPr/>
+          </p:nvSpPr>
+          <p:spPr>
+            <a:xfrm>
+              <a:off x="5181600" y="1079500"/>
+              <a:ext cx="2946400" cy="298450"/>
+            </a:xfrm>
+            <a:prstGeom prst="rect">
+              <a:avLst/>
+            </a:prstGeom>
+            <a:noFill/>
+          </p:spPr>
+          <p:txBody>
+            <a:bodyPr wrap="square" lIns="0" tIns="0" rIns="0" bIns="0" anchor="ctr">
+              <a:noAutofit/>
+            </a:bodyPr>
+            <a:lstStyle>
+              <a:lvl1pPr marL="0" indent="0" algn="l">
+                <a:lnSpc>
+                  <a:spcPts val="2340"/>
+                </a:lnSpc>
+                <a:spcBef>
+                  <a:spcPts val="0"/>
+                </a:spcBef>
+                <a:buNone/>
+                <a:defRPr sz="1800" b="1">
+                  <a:solidFill>
+                    <a:schemeClr val="tx1"/>
+                  </a:solidFill>
+                  <a:latin typeface="+mn-lt"/>
+                  <a:ea typeface="+mn-ea"/>
+                </a:defRPr>
+              </a:lvl1pPr>
+            </a:lstStyle>
+            <a:p>
+              <a:r>
+                <a:rPr lang="ja-JP"/>
+                <a:t>記事ごとの成績</a:t>
+              </a:r>
+            </a:p>
+          </p:txBody>
+        </p:sp>
+        <p:sp>
+          <p:nvSpPr>
+            <p:cNvPr id="17" name="Title_03"/>
+            <p:cNvSpPr txBox="1"/>
+            <p:nvPr/>
+          </p:nvSpPr>
+          <p:spPr>
+            <a:xfrm>
+              <a:off x="914400" y="2349500"/>
+              <a:ext cx="2946400" cy="298450"/>
+            </a:xfrm>
+            <a:prstGeom prst="rect">
+              <a:avLst/>
+            </a:prstGeom>
+            <a:noFill/>
+          </p:spPr>
+          <p:txBody>
+            <a:bodyPr wrap="square" lIns="0" tIns="0" rIns="0" bIns="0" anchor="ctr">
+              <a:noAutofit/>
+            </a:bodyPr>
+            <a:lstStyle>
+              <a:lvl1pPr marL="0" indent="0" algn="l">
+                <a:lnSpc>
+                  <a:spcPts val="2340"/>
+                </a:lnSpc>
+                <a:spcBef>
+                  <a:spcPts val="0"/>
+                </a:spcBef>
+                <a:buNone/>
+                <a:defRPr sz="1800" b="1">
+                  <a:solidFill>
+                    <a:schemeClr val="tx1"/>
+                  </a:solidFill>
+                  <a:latin typeface="+mn-lt"/>
+                  <a:ea typeface="+mn-ea"/>
+                </a:defRPr>
+              </a:lvl1pPr>
+            </a:lstStyle>
+            <a:p>
+              <a:r>
+                <a:rPr lang="ja-JP"/>
+                <a:t>流入元の変化</a:t>
+              </a:r>
+            </a:p>
+          </p:txBody>
+        </p:sp>
+        <p:sp>
+          <p:nvSpPr>
+            <p:cNvPr id="18" name="Title_04"/>
+            <p:cNvSpPr txBox="1"/>
+            <p:nvPr/>
+          </p:nvSpPr>
+          <p:spPr>
+            <a:xfrm>
+              <a:off x="5181600" y="2349500"/>
+              <a:ext cx="2946400" cy="298450"/>
+            </a:xfrm>
+            <a:prstGeom prst="rect">
+              <a:avLst/>
+            </a:prstGeom>
+            <a:noFill/>
+          </p:spPr>
+          <p:txBody>
+            <a:bodyPr wrap="square" lIns="0" tIns="0" rIns="0" bIns="0" anchor="ctr">
+              <a:noAutofit/>
+            </a:bodyPr>
+            <a:lstStyle>
+              <a:lvl1pPr marL="0" indent="0" algn="l">
+                <a:lnSpc>
+                  <a:spcPts val="2340"/>
+                </a:lnSpc>
+                <a:spcBef>
+                  <a:spcPts val="0"/>
+                </a:spcBef>
+                <a:buNone/>
+                <a:defRPr sz="1800" b="1">
+                  <a:solidFill>
+                    <a:schemeClr val="tx1"/>
+                  </a:solidFill>
+                  <a:latin typeface="+mn-lt"/>
+                  <a:ea typeface="+mn-ea"/>
+                </a:defRPr>
+              </a:lvl1pPr>
+            </a:lstStyle>
+            <a:p>
+              <a:r>
+                <a:rPr lang="ja-JP"/>
+                <a:t>うまくいった型</a:t>
+              </a:r>
+            </a:p>
+          </p:txBody>
+        </p:sp>
+        <p:sp>
+          <p:nvSpPr>
+            <p:cNvPr id="19" name="Title_05"/>
+            <p:cNvSpPr txBox="1"/>
+            <p:nvPr/>
+          </p:nvSpPr>
+          <p:spPr>
+            <a:xfrm>
+              <a:off x="914400" y="3619500"/>
+              <a:ext cx="2946400" cy="298450"/>
+            </a:xfrm>
+            <a:prstGeom prst="rect">
+              <a:avLst/>
+            </a:prstGeom>
+            <a:noFill/>
+          </p:spPr>
+          <p:txBody>
+            <a:bodyPr wrap="square" lIns="0" tIns="0" rIns="0" bIns="0" anchor="ctr">
+              <a:noAutofit/>
+            </a:bodyPr>
+            <a:lstStyle>
+              <a:lvl1pPr marL="0" indent="0" algn="l">
+                <a:lnSpc>
+                  <a:spcPts val="2340"/>
+                </a:lnSpc>
+                <a:spcBef>
+                  <a:spcPts val="0"/>
+                </a:spcBef>
+                <a:buNone/>
+                <a:defRPr sz="1800" b="1">
+                  <a:solidFill>
+                    <a:schemeClr val="tx1"/>
+                  </a:solidFill>
+                  <a:latin typeface="+mn-lt"/>
+                  <a:ea typeface="+mn-ea"/>
+                </a:defRPr>
+              </a:lvl1pPr>
+            </a:lstStyle>
+            <a:p>
+              <a:r>
+                <a:rPr lang="ja-JP"/>
+                <a:t>次の一手</a:t>
+              </a:r>
+            </a:p>
+          </p:txBody>
+        </p:sp>
+        <p:sp>
+          <p:nvSpPr>
+            <p:cNvPr id="20" name="Title_06"/>
+            <p:cNvSpPr txBox="1"/>
+            <p:nvPr/>
+          </p:nvSpPr>
+          <p:spPr>
+            <a:xfrm>
+              <a:off x="5181600" y="3619500"/>
+              <a:ext cx="2946400" cy="298450"/>
+            </a:xfrm>
+            <a:prstGeom prst="rect">
+              <a:avLst/>
+            </a:prstGeom>
+            <a:noFill/>
+          </p:spPr>
+          <p:txBody>
+            <a:bodyPr wrap="square" lIns="0" tIns="0" rIns="0" bIns="0" anchor="ctr">
+              <a:noAutofit/>
+            </a:bodyPr>
+            <a:lstStyle>
+              <a:lvl1pPr marL="0" indent="0" algn="l">
+                <a:lnSpc>
+                  <a:spcPts val="2340"/>
+                </a:lnSpc>
+                <a:spcBef>
+                  <a:spcPts val="0"/>
+                </a:spcBef>
+                <a:buNone/>
+                <a:defRPr sz="1800" b="1">
+                  <a:solidFill>
+                    <a:schemeClr val="tx1"/>
+                  </a:solidFill>
+                  <a:latin typeface="+mn-lt"/>
+                  <a:ea typeface="+mn-ea"/>
+                </a:defRPr>
+              </a:lvl1pPr>
+            </a:lstStyle>
+            <a:p>
+              <a:r>
+                <a:rPr lang="ja-JP"/>
+                <a:t>付録</a:t>
+              </a:r>
+            </a:p>
+          </p:txBody>
+        </p:sp>
+        <p:sp>
+          <p:nvSpPr>
+            <p:cNvPr id="21" name="Sub_01"/>
+            <p:cNvSpPr txBox="1"/>
+            <p:nvPr/>
+          </p:nvSpPr>
+          <p:spPr>
+            <a:xfrm>
+              <a:off x="914400" y="1409700"/>
+              <a:ext cx="2946400" cy="196850"/>
+            </a:xfrm>
+            <a:prstGeom prst="rect">
+              <a:avLst/>
+            </a:prstGeom>
+            <a:noFill/>
+          </p:spPr>
+          <p:txBody>
+            <a:bodyPr wrap="square" lIns="0" tIns="0" rIns="0" bIns="0" anchor="ctr">
+              <a:noAutofit/>
+            </a:bodyPr>
+            <a:lstStyle>
+              <a:lvl1pPr marL="0" indent="0" algn="l">
+                <a:lnSpc>
+                  <a:spcPts val="1540"/>
+                </a:lnSpc>
+                <a:spcBef>
+                  <a:spcPts val="0"/>
+                </a:spcBef>
+                <a:buNone/>
+                <a:defRPr sz="1100" b="0">
+                  <a:solidFill>
+                    <a:schemeClr val="tx2"/>
+                  </a:solidFill>
+                  <a:latin typeface="+mn-lt"/>
+                  <a:ea typeface="+mn-ea"/>
+                </a:defRPr>
+              </a:lvl1pPr>
+            </a:lstStyle>
+            <a:p>
+              <a:r>
+                <a:rPr lang="ja-JP"/>
+                <a:t>PV・スキ・フォロワー</a:t>
+              </a:r>
+            </a:p>
+          </p:txBody>
+        </p:sp>
+        <p:sp>
+          <p:nvSpPr>
+            <p:cNvPr id="22" name="Sub_02"/>
+            <p:cNvSpPr txBox="1"/>
+            <p:nvPr/>
+          </p:nvSpPr>
+          <p:spPr>
+            <a:xfrm>
+              <a:off x="5181600" y="1409700"/>
+              <a:ext cx="2946400" cy="196850"/>
+            </a:xfrm>
+            <a:prstGeom prst="rect">
+              <a:avLst/>
+            </a:prstGeom>
+            <a:noFill/>
+          </p:spPr>
+          <p:txBody>
+            <a:bodyPr wrap="square" lIns="0" tIns="0" rIns="0" bIns="0" anchor="ctr">
+              <a:noAutofit/>
+            </a:bodyPr>
+            <a:lstStyle>
+              <a:lvl1pPr marL="0" indent="0" algn="l">
+                <a:lnSpc>
+                  <a:spcPts val="1540"/>
+                </a:lnSpc>
+                <a:spcBef>
+                  <a:spcPts val="0"/>
+                </a:spcBef>
+                <a:buNone/>
+                <a:defRPr sz="1100" b="0">
+                  <a:solidFill>
+                    <a:schemeClr val="tx2"/>
+                  </a:solidFill>
+                  <a:latin typeface="+mn-lt"/>
+                  <a:ea typeface="+mn-ea"/>
+                </a:defRPr>
+              </a:lvl1pPr>
+            </a:lstStyle>
+            <a:p>
+              <a:r>
+                <a:rPr lang="ja-JP"/>
+                <a:t>連載 #1〜#4 の比較</a:t>
+              </a:r>
+            </a:p>
+          </p:txBody>
+        </p:sp>
+        <p:sp>
+          <p:nvSpPr>
+            <p:cNvPr id="23" name="Sub_03"/>
+            <p:cNvSpPr txBox="1"/>
+            <p:nvPr/>
+          </p:nvSpPr>
+          <p:spPr>
+            <a:xfrm>
+              <a:off x="914400" y="2679700"/>
+              <a:ext cx="2946400" cy="196850"/>
+            </a:xfrm>
+            <a:prstGeom prst="rect">
+              <a:avLst/>
+            </a:prstGeom>
+            <a:noFill/>
+          </p:spPr>
+          <p:txBody>
+            <a:bodyPr wrap="square" lIns="0" tIns="0" rIns="0" bIns="0" anchor="ctr">
+              <a:noAutofit/>
+            </a:bodyPr>
+            <a:lstStyle>
+              <a:lvl1pPr marL="0" indent="0" algn="l">
+                <a:lnSpc>
+                  <a:spcPts val="1540"/>
+                </a:lnSpc>
+                <a:spcBef>
+                  <a:spcPts val="0"/>
+                </a:spcBef>
+                <a:buNone/>
+                <a:defRPr sz="1100" b="0">
+                  <a:solidFill>
+                    <a:schemeClr val="tx2"/>
+                  </a:solidFill>
+                  <a:latin typeface="+mn-lt"/>
+                  <a:ea typeface="+mn-ea"/>
+                </a:defRPr>
+              </a:lvl1pPr>
+            </a:lstStyle>
+            <a:p>
+              <a:r>
+                <a:rPr lang="ja-JP"/>
+                <a:t>検索が全体の 58%</a:t>
+              </a:r>
+            </a:p>
+          </p:txBody>
+        </p:sp>
+        <p:sp>
+          <p:nvSpPr>
+            <p:cNvPr id="24" name="Sub_04"/>
+            <p:cNvSpPr txBox="1"/>
+            <p:nvPr/>
+          </p:nvSpPr>
+          <p:spPr>
+            <a:xfrm>
+              <a:off x="5181600" y="2679700"/>
+              <a:ext cx="2946400" cy="196850"/>
+            </a:xfrm>
+            <a:prstGeom prst="rect">
+              <a:avLst/>
+            </a:prstGeom>
+            <a:noFill/>
+          </p:spPr>
+          <p:txBody>
+            <a:bodyPr wrap="square" lIns="0" tIns="0" rIns="0" bIns="0" anchor="ctr">
+              <a:noAutofit/>
+            </a:bodyPr>
+            <a:lstStyle>
+              <a:lvl1pPr marL="0" indent="0" algn="l">
+                <a:lnSpc>
+                  <a:spcPts val="1540"/>
+                </a:lnSpc>
+                <a:spcBef>
+                  <a:spcPts val="0"/>
+                </a:spcBef>
+                <a:buNone/>
+                <a:defRPr sz="1100" b="0">
+                  <a:solidFill>
+                    <a:schemeClr val="tx2"/>
+                  </a:solidFill>
+                  <a:latin typeface="+mn-lt"/>
+                  <a:ea typeface="+mn-ea"/>
+                </a:defRPr>
+              </a:lvl1pPr>
+            </a:lstStyle>
+            <a:p>
+              <a:r>
+                <a:rPr lang="ja-JP"/>
+                <a:t>一次情報 × 図解</a:t>
+              </a:r>
+            </a:p>
+          </p:txBody>
+        </p:sp>
+        <p:sp>
+          <p:nvSpPr>
+            <p:cNvPr id="25" name="Sub_05"/>
+            <p:cNvSpPr txBox="1"/>
+            <p:nvPr/>
+          </p:nvSpPr>
+          <p:spPr>
+            <a:xfrm>
+              <a:off x="914400" y="3949700"/>
+              <a:ext cx="2946400" cy="196850"/>
+            </a:xfrm>
+            <a:prstGeom prst="rect">
+              <a:avLst/>
+            </a:prstGeom>
+            <a:noFill/>
+          </p:spPr>
+          <p:txBody>
+            <a:bodyPr wrap="square" lIns="0" tIns="0" rIns="0" bIns="0" anchor="ctr">
+              <a:noAutofit/>
+            </a:bodyPr>
+            <a:lstStyle>
+              <a:lvl1pPr marL="0" indent="0" algn="l">
+                <a:lnSpc>
+                  <a:spcPts val="1540"/>
+                </a:lnSpc>
+                <a:spcBef>
+                  <a:spcPts val="0"/>
+                </a:spcBef>
+                <a:buNone/>
+                <a:defRPr sz="1100" b="0">
+                  <a:solidFill>
+                    <a:schemeClr val="tx2"/>
+                  </a:solidFill>
+                  <a:latin typeface="+mn-lt"/>
+                  <a:ea typeface="+mn-ea"/>
+                </a:defRPr>
+              </a:lvl1pPr>
+            </a:lstStyle>
+            <a:p>
+              <a:r>
+                <a:rPr lang="ja-JP"/>
+                <a:t>連載 #5 のテーマ</a:t>
+              </a:r>
+            </a:p>
+          </p:txBody>
+        </p:sp>
+        <p:sp>
+          <p:nvSpPr>
+            <p:cNvPr id="26" name="Sub_06"/>
+            <p:cNvSpPr txBox="1"/>
+            <p:nvPr/>
+          </p:nvSpPr>
+          <p:spPr>
+            <a:xfrm>
+              <a:off x="5181600" y="3949700"/>
+              <a:ext cx="2946400" cy="196850"/>
+            </a:xfrm>
+            <a:prstGeom prst="rect">
+              <a:avLst/>
+            </a:prstGeom>
+            <a:noFill/>
+          </p:spPr>
+          <p:txBody>
+            <a:bodyPr wrap="square" lIns="0" tIns="0" rIns="0" bIns="0" anchor="ctr">
+              <a:noAutofit/>
+            </a:bodyPr>
+            <a:lstStyle>
+              <a:lvl1pPr marL="0" indent="0" algn="l">
+                <a:lnSpc>
+                  <a:spcPts val="1540"/>
+                </a:lnSpc>
+                <a:spcBef>
+                  <a:spcPts val="0"/>
+                </a:spcBef>
+                <a:buNone/>
+                <a:defRPr sz="1100" b="0">
+                  <a:solidFill>
+                    <a:schemeClr val="tx2"/>
+                  </a:solidFill>
+                  <a:latin typeface="+mn-lt"/>
+                  <a:ea typeface="+mn-ea"/>
+                </a:defRPr>
+              </a:lvl1pPr>
+            </a:lstStyle>
+            <a:p>
+              <a:r>
+                <a:rPr lang="ja-JP"/>
+                <a:t>数値の定義と出典</a:t>
+              </a:r>
+            </a:p>
+          </p:txBody>
+        </p:sp>
+        <p:sp>
+          <p:nvSpPr>
+            <p:cNvPr id="27" name="Page_01"/>
+            <p:cNvSpPr txBox="1"/>
+            <p:nvPr/>
+          </p:nvSpPr>
+          <p:spPr>
+            <a:xfrm>
+              <a:off x="4038600" y="1117600"/>
+              <a:ext cx="381000" cy="247650"/>
+            </a:xfrm>
+            <a:prstGeom prst="rect">
+              <a:avLst/>
+            </a:prstGeom>
+            <a:noFill/>
+          </p:spPr>
+          <p:txBody>
+            <a:bodyPr wrap="square" lIns="0" tIns="0" rIns="0" bIns="0" anchor="ctr">
+              <a:noAutofit/>
+            </a:bodyPr>
+            <a:lstStyle>
+              <a:lvl1pPr marL="0" indent="0" algn="r">
+                <a:lnSpc>
+                  <a:spcPts val="1960"/>
+                </a:lnSpc>
+                <a:spcBef>
+                  <a:spcPts val="0"/>
+                </a:spcBef>
+                <a:buNone/>
+                <a:defRPr sz="1400" b="0">
+                  <a:solidFill>
+                    <a:schemeClr val="tx2"/>
+                  </a:solidFill>
+                  <a:latin typeface="+mn-lt"/>
+                  <a:ea typeface="+mn-ea"/>
+                </a:defRPr>
+              </a:lvl1pPr>
+            </a:lstStyle>
+            <a:p>
+              <a:r>
+                <a:rPr lang="ja-JP"/>
+                <a:t>2</a:t>
+              </a:r>
+            </a:p>
+          </p:txBody>
+        </p:sp>
+        <p:sp>
+          <p:nvSpPr>
+            <p:cNvPr id="28" name="Page_02"/>
+            <p:cNvSpPr txBox="1"/>
+            <p:nvPr/>
+          </p:nvSpPr>
+          <p:spPr>
+            <a:xfrm>
+              <a:off x="8305800" y="1117600"/>
+              <a:ext cx="381000" cy="247650"/>
+            </a:xfrm>
+            <a:prstGeom prst="rect">
+              <a:avLst/>
+            </a:prstGeom>
+            <a:noFill/>
+          </p:spPr>
+          <p:txBody>
+            <a:bodyPr wrap="square" lIns="0" tIns="0" rIns="0" bIns="0" anchor="ctr">
+              <a:noAutofit/>
+            </a:bodyPr>
+            <a:lstStyle>
+              <a:lvl1pPr marL="0" indent="0" algn="r">
+                <a:lnSpc>
+                  <a:spcPts val="1960"/>
+                </a:lnSpc>
+                <a:spcBef>
+                  <a:spcPts val="0"/>
+                </a:spcBef>
+                <a:buNone/>
+                <a:defRPr sz="1400" b="0">
+                  <a:solidFill>
+                    <a:schemeClr val="tx2"/>
+                  </a:solidFill>
+                  <a:latin typeface="+mn-lt"/>
+                  <a:ea typeface="+mn-ea"/>
+                </a:defRPr>
+              </a:lvl1pPr>
+            </a:lstStyle>
+            <a:p>
+              <a:r>
+                <a:rPr lang="ja-JP"/>
+                <a:t>6</a:t>
+              </a:r>
+            </a:p>
+          </p:txBody>
+        </p:sp>
+        <p:sp>
+          <p:nvSpPr>
+            <p:cNvPr id="29" name="Page_03"/>
+            <p:cNvSpPr txBox="1"/>
+            <p:nvPr/>
+          </p:nvSpPr>
+          <p:spPr>
+            <a:xfrm>
+              <a:off x="4038600" y="2387600"/>
+              <a:ext cx="381000" cy="247650"/>
+            </a:xfrm>
+            <a:prstGeom prst="rect">
+              <a:avLst/>
+            </a:prstGeom>
+            <a:noFill/>
+          </p:spPr>
+          <p:txBody>
+            <a:bodyPr wrap="square" lIns="0" tIns="0" rIns="0" bIns="0" anchor="ctr">
+              <a:noAutofit/>
+            </a:bodyPr>
+            <a:lstStyle>
+              <a:lvl1pPr marL="0" indent="0" algn="r">
+                <a:lnSpc>
+                  <a:spcPts val="1960"/>
+                </a:lnSpc>
+                <a:spcBef>
+                  <a:spcPts val="0"/>
+                </a:spcBef>
+                <a:buNone/>
+                <a:defRPr sz="1400" b="0">
+                  <a:solidFill>
+                    <a:schemeClr val="tx2"/>
+                  </a:solidFill>
+                  <a:latin typeface="+mn-lt"/>
+                  <a:ea typeface="+mn-ea"/>
+                </a:defRPr>
+              </a:lvl1pPr>
+            </a:lstStyle>
+            <a:p>
+              <a:r>
+                <a:rPr lang="ja-JP"/>
+                <a:t>9</a:t>
+              </a:r>
+            </a:p>
+          </p:txBody>
+        </p:sp>
+        <p:sp>
+          <p:nvSpPr>
+            <p:cNvPr id="30" name="Page_04"/>
+            <p:cNvSpPr txBox="1"/>
+            <p:nvPr/>
+          </p:nvSpPr>
+          <p:spPr>
+            <a:xfrm>
+              <a:off x="8305800" y="2387600"/>
+              <a:ext cx="381000" cy="247650"/>
+            </a:xfrm>
+            <a:prstGeom prst="rect">
+              <a:avLst/>
+            </a:prstGeom>
+            <a:noFill/>
+          </p:spPr>
+          <p:txBody>
+            <a:bodyPr wrap="square" lIns="0" tIns="0" rIns="0" bIns="0" anchor="ctr">
+              <a:noAutofit/>
+            </a:bodyPr>
+            <a:lstStyle>
+              <a:lvl1pPr marL="0" indent="0" algn="r">
+                <a:lnSpc>
+                  <a:spcPts val="1960"/>
+                </a:lnSpc>
+                <a:spcBef>
+                  <a:spcPts val="0"/>
+                </a:spcBef>
+                <a:buNone/>
+                <a:defRPr sz="1400" b="0">
+                  <a:solidFill>
+                    <a:schemeClr val="tx2"/>
+                  </a:solidFill>
+                  <a:latin typeface="+mn-lt"/>
+                  <a:ea typeface="+mn-ea"/>
+                </a:defRPr>
+              </a:lvl1pPr>
+            </a:lstStyle>
+            <a:p>
+              <a:r>
+                <a:rPr lang="ja-JP"/>
+                <a:t>12</a:t>
+              </a:r>
+            </a:p>
+          </p:txBody>
+        </p:sp>
+        <p:sp>
+          <p:nvSpPr>
+            <p:cNvPr id="31" name="Page_05"/>
+            <p:cNvSpPr txBox="1"/>
+            <p:nvPr/>
+          </p:nvSpPr>
+          <p:spPr>
+            <a:xfrm>
+              <a:off x="4038600" y="3657600"/>
+              <a:ext cx="381000" cy="247650"/>
+            </a:xfrm>
+            <a:prstGeom prst="rect">
+              <a:avLst/>
+            </a:prstGeom>
+            <a:noFill/>
+          </p:spPr>
+          <p:txBody>
+            <a:bodyPr wrap="square" lIns="0" tIns="0" rIns="0" bIns="0" anchor="ctr">
+              <a:noAutofit/>
+            </a:bodyPr>
+            <a:lstStyle>
+              <a:lvl1pPr marL="0" indent="0" algn="r">
+                <a:lnSpc>
+                  <a:spcPts val="1960"/>
+                </a:lnSpc>
+                <a:spcBef>
+                  <a:spcPts val="0"/>
+                </a:spcBef>
+                <a:buNone/>
+                <a:defRPr sz="1400" b="0">
+                  <a:solidFill>
+                    <a:schemeClr val="tx2"/>
+                  </a:solidFill>
+                  <a:latin typeface="+mn-lt"/>
+                  <a:ea typeface="+mn-ea"/>
+                </a:defRPr>
+              </a:lvl1pPr>
+            </a:lstStyle>
+            <a:p>
+              <a:r>
+                <a:rPr lang="ja-JP"/>
+                <a:t>15</a:t>
+              </a:r>
+            </a:p>
+          </p:txBody>
+        </p:sp>
+        <p:sp>
+          <p:nvSpPr>
+            <p:cNvPr id="32" name="Page_06"/>
+            <p:cNvSpPr txBox="1"/>
+            <p:nvPr/>
+          </p:nvSpPr>
+          <p:spPr>
+            <a:xfrm>
+              <a:off x="8305800" y="3657600"/>
+              <a:ext cx="381000" cy="247650"/>
+            </a:xfrm>
+            <a:prstGeom prst="rect">
+              <a:avLst/>
+            </a:prstGeom>
+            <a:noFill/>
+          </p:spPr>
+          <p:txBody>
+            <a:bodyPr wrap="square" lIns="0" tIns="0" rIns="0" bIns="0" anchor="ctr">
+              <a:noAutofit/>
+            </a:bodyPr>
+            <a:lstStyle>
+              <a:lvl1pPr marL="0" indent="0" algn="r">
+                <a:lnSpc>
+                  <a:spcPts val="1960"/>
+                </a:lnSpc>
+                <a:spcBef>
+                  <a:spcPts val="0"/>
+                </a:spcBef>
+                <a:buNone/>
+                <a:defRPr sz="1400" b="0">
+                  <a:solidFill>
+                    <a:schemeClr val="tx2"/>
+                  </a:solidFill>
+                  <a:latin typeface="+mn-lt"/>
+                  <a:ea typeface="+mn-ea"/>
+                </a:defRPr>
+              </a:lvl1pPr>
+            </a:lstStyle>
+            <a:p>
+              <a:r>
+                <a:rPr lang="ja-JP"/>
+                <a:t>18</a:t>
+              </a:r>
+            </a:p>
+          </p:txBody>
+        </p:sp>
+      </p:grpSp>
+      <p:sp>
+        <p:nvSpPr>
+          <p:cNvPr id="34" name="SlideNumber"/>
+          <p:cNvSpPr>
+            <a:spLocks noGrp="1"/>
+          </p:cNvSpPr>
+          <p:nvPr>
+            <p:ph type="sldNum" idx="12" sz="quarter"/>
+          </p:nvPr>
+        </p:nvSpPr>
+        <p:spPr/>
+        <p:txBody>
+          <a:bodyPr/>
+          <a:lstStyle/>
+          <a:p>
+            <a:fld id="{B6F15528-21DE-4FAA-801E-634DDDAF4B2B}" type="slidenum">
+              <a:rPr lang="ja-JP"/>
+              <a:t>‹#›</a:t>
+            </a:fld>
+          </a:p>
+        </p:txBody>
+      </p:sp>
+    </p:spTree>
+  </p:cSld>
+  <p:clrMapOvr>
+    <a:masterClrMapping/>
+  </p:clrMapOvr>
+</p:sld>
+</file>
+
+<file path=ppt/slides/slide26.xml><?xml version="1.0" encoding="utf-8"?>
+<p:sld xmlns:a="http://schemas.openxmlformats.org/drawingml/2006/main" xmlns:r="http://schemas.openxmlformats.org/officeDocument/2006/relationships" xmlns:p="http://schemas.openxmlformats.org/presentationml/2006/main">
+  <p:cSld>
+    <p:spTree>
+      <p:nvGrpSpPr>
+        <p:cNvPr id="1" name=""/>
+        <p:cNvGrpSpPr/>
+        <p:nvPr/>
+      </p:nvGrpSpPr>
+      <p:grpSpPr>
+        <a:xfrm>
+          <a:off x="0" y="0"/>
+          <a:ext cx="0" cy="0"/>
+          <a:chOff x="0" y="0"/>
+          <a:chExt cx="0" cy="0"/>
+        </a:xfrm>
+      </p:grpSpPr>
+      <p:sp>
+        <p:nvSpPr>
+          <p:cNvPr id="2" name="Title"/>
+          <p:cNvSpPr>
+            <a:spLocks noGrp="1"/>
+          </p:cNvSpPr>
+          <p:nvPr>
+            <p:ph type="title"/>
+          </p:nvPr>
+        </p:nvSpPr>
+        <p:spPr/>
+        <p:txBody>
+          <a:bodyPr/>
+          <a:lstStyle/>
+          <a:p>
+            <a:r>
+              <a:rPr lang="ja-JP"/>
+              <a:t>9月の記録</a:t>
+            </a:r>
+          </a:p>
+        </p:txBody>
+      </p:sp>
+      <p:grpSp>
+        <p:nvGrpSpPr>
+          <p:cNvPr id="13" name="organism/O-S2 写真ギャラリー"/>
+          <p:cNvGrpSpPr/>
+          <p:nvPr/>
+        </p:nvGrpSpPr>
+        <p:grpSpPr>
+          <a:xfrm>
+            <a:off x="457200" y="965200"/>
+            <a:ext cx="8229600" cy="3657600"/>
+            <a:chOff x="457200" y="965200"/>
+            <a:chExt cx="8229600" cy="3657600"/>
+          </a:xfrm>
+        </p:grpSpPr>
+        <p:sp>
+          <p:nvSpPr>
+            <p:cNvPr id="3" name="Photo_1"/>
+            <p:cNvSpPr/>
+            <p:nvPr/>
+          </p:nvSpPr>
+          <p:spPr>
+            <a:xfrm>
+              <a:off x="457200" y="965200"/>
+              <a:ext cx="4038600" cy="3657600"/>
+            </a:xfrm>
+            <a:prstGeom prst="rect">
+              <a:avLst/>
+            </a:prstGeom>
+            <a:solidFill>
+              <a:schemeClr val="accent5"/>
+            </a:solidFill>
+            <a:ln>
+              <a:noFill/>
+            </a:ln>
+          </p:spPr>
+        </p:sp>
+        <p:sp>
+          <p:nvSpPr>
+            <p:cNvPr id="4" name="Caption_1"/>
+            <p:cNvSpPr txBox="1"/>
+            <p:nvPr/>
+          </p:nvSpPr>
+          <p:spPr>
+            <a:xfrm>
+              <a:off x="609600" y="4318000"/>
+              <a:ext cx="2540000" cy="196850"/>
+            </a:xfrm>
+            <a:prstGeom prst="rect">
+              <a:avLst/>
+            </a:prstGeom>
+            <a:noFill/>
+          </p:spPr>
+          <p:txBody>
+            <a:bodyPr wrap="square" lIns="0" tIns="0" rIns="0" bIns="0" anchor="ctr">
+              <a:noAutofit/>
+            </a:bodyPr>
+            <a:lstStyle>
+              <a:lvl1pPr marL="0" indent="0" algn="l">
+                <a:lnSpc>
+                  <a:spcPts val="1540"/>
+                </a:lnSpc>
+                <a:spcBef>
+                  <a:spcPts val="0"/>
+                </a:spcBef>
+                <a:buNone/>
+                <a:defRPr sz="1100" b="0">
+                  <a:solidFill>
+                    <a:schemeClr val="tx2"/>
+                  </a:solidFill>
+                  <a:latin typeface="+mn-lt"/>
+                  <a:ea typeface="+mn-ea"/>
+                </a:defRPr>
+              </a:lvl1pPr>
+            </a:lstStyle>
+            <a:p>
+              <a:r>
+                <a:rPr lang="ja-JP"/>
+                <a:t>写真1（差し替え）</a:t>
+              </a:r>
+            </a:p>
+          </p:txBody>
+        </p:sp>
+        <p:sp>
+          <p:nvSpPr>
+            <p:cNvPr id="5" name="Photo_2"/>
+            <p:cNvSpPr/>
+            <p:nvPr/>
+          </p:nvSpPr>
+          <p:spPr>
+            <a:xfrm>
+              <a:off x="4800600" y="965200"/>
+              <a:ext cx="1866900" cy="1752600"/>
+            </a:xfrm>
+            <a:prstGeom prst="rect">
+              <a:avLst/>
+            </a:prstGeom>
+            <a:solidFill>
+              <a:schemeClr val="accent5"/>
+            </a:solidFill>
+            <a:ln>
+              <a:noFill/>
+            </a:ln>
+          </p:spPr>
+        </p:sp>
+        <p:sp>
+          <p:nvSpPr>
+            <p:cNvPr id="6" name="Photo_3"/>
+            <p:cNvSpPr/>
+            <p:nvPr/>
+          </p:nvSpPr>
+          <p:spPr>
+            <a:xfrm>
+              <a:off x="6819900" y="965200"/>
+              <a:ext cx="1866900" cy="1752600"/>
+            </a:xfrm>
+            <a:prstGeom prst="rect">
+              <a:avLst/>
+            </a:prstGeom>
+            <a:solidFill>
+              <a:schemeClr val="accent5"/>
+            </a:solidFill>
+            <a:ln>
+              <a:noFill/>
+            </a:ln>
+          </p:spPr>
+        </p:sp>
+        <p:sp>
+          <p:nvSpPr>
+            <p:cNvPr id="7" name="Photo_4"/>
+            <p:cNvSpPr/>
+            <p:nvPr/>
+          </p:nvSpPr>
+          <p:spPr>
+            <a:xfrm>
+              <a:off x="4800600" y="2870200"/>
+              <a:ext cx="1866900" cy="1752600"/>
+            </a:xfrm>
+            <a:prstGeom prst="rect">
+              <a:avLst/>
+            </a:prstGeom>
+            <a:solidFill>
+              <a:schemeClr val="accent5"/>
+            </a:solidFill>
+            <a:ln>
+              <a:noFill/>
+            </a:ln>
+          </p:spPr>
+        </p:sp>
+        <p:sp>
+          <p:nvSpPr>
+            <p:cNvPr id="8" name="Photo_5"/>
+            <p:cNvSpPr/>
+            <p:nvPr/>
+          </p:nvSpPr>
+          <p:spPr>
+            <a:xfrm>
+              <a:off x="6819900" y="2870200"/>
+              <a:ext cx="1866900" cy="1752600"/>
+            </a:xfrm>
+            <a:prstGeom prst="rect">
+              <a:avLst/>
+            </a:prstGeom>
+            <a:solidFill>
+              <a:schemeClr val="accent5"/>
+            </a:solidFill>
+            <a:ln>
+              <a:noFill/>
+            </a:ln>
+          </p:spPr>
+        </p:sp>
+        <p:sp>
+          <p:nvSpPr>
+            <p:cNvPr id="9" name="Caption_2"/>
+            <p:cNvSpPr txBox="1"/>
+            <p:nvPr/>
+          </p:nvSpPr>
+          <p:spPr>
+            <a:xfrm>
+              <a:off x="4927600" y="2463800"/>
+              <a:ext cx="1612900" cy="196850"/>
+            </a:xfrm>
+            <a:prstGeom prst="rect">
+              <a:avLst/>
+            </a:prstGeom>
+            <a:noFill/>
+          </p:spPr>
+          <p:txBody>
+            <a:bodyPr wrap="square" lIns="0" tIns="0" rIns="0" bIns="0" anchor="ctr">
+              <a:noAutofit/>
+            </a:bodyPr>
+            <a:lstStyle>
+              <a:lvl1pPr marL="0" indent="0" algn="l">
+                <a:lnSpc>
+                  <a:spcPts val="1540"/>
+                </a:lnSpc>
+                <a:spcBef>
+                  <a:spcPts val="0"/>
+                </a:spcBef>
+                <a:buNone/>
+                <a:defRPr sz="1100" b="0">
+                  <a:solidFill>
+                    <a:schemeClr val="tx2"/>
+                  </a:solidFill>
+                  <a:latin typeface="+mn-lt"/>
+                  <a:ea typeface="+mn-ea"/>
+                </a:defRPr>
+              </a:lvl1pPr>
+            </a:lstStyle>
+            <a:p>
+              <a:r>
+                <a:rPr lang="ja-JP"/>
+                <a:t>写真2</a:t>
+              </a:r>
+            </a:p>
+          </p:txBody>
+        </p:sp>
+        <p:sp>
+          <p:nvSpPr>
+            <p:cNvPr id="10" name="Caption_3"/>
+            <p:cNvSpPr txBox="1"/>
+            <p:nvPr/>
+          </p:nvSpPr>
+          <p:spPr>
+            <a:xfrm>
+              <a:off x="6946900" y="2463800"/>
+              <a:ext cx="1612900" cy="196850"/>
+            </a:xfrm>
+            <a:prstGeom prst="rect">
+              <a:avLst/>
+            </a:prstGeom>
+            <a:noFill/>
+          </p:spPr>
+          <p:txBody>
+            <a:bodyPr wrap="square" lIns="0" tIns="0" rIns="0" bIns="0" anchor="ctr">
+              <a:noAutofit/>
+            </a:bodyPr>
+            <a:lstStyle>
+              <a:lvl1pPr marL="0" indent="0" algn="l">
+                <a:lnSpc>
+                  <a:spcPts val="1540"/>
+                </a:lnSpc>
+                <a:spcBef>
+                  <a:spcPts val="0"/>
+                </a:spcBef>
+                <a:buNone/>
+                <a:defRPr sz="1100" b="0">
+                  <a:solidFill>
+                    <a:schemeClr val="tx2"/>
+                  </a:solidFill>
+                  <a:latin typeface="+mn-lt"/>
+                  <a:ea typeface="+mn-ea"/>
+                </a:defRPr>
+              </a:lvl1pPr>
+            </a:lstStyle>
+            <a:p>
+              <a:r>
+                <a:rPr lang="ja-JP"/>
+                <a:t>写真3</a:t>
+              </a:r>
+            </a:p>
+          </p:txBody>
+        </p:sp>
+        <p:sp>
+          <p:nvSpPr>
+            <p:cNvPr id="11" name="Caption_4"/>
+            <p:cNvSpPr txBox="1"/>
+            <p:nvPr/>
+          </p:nvSpPr>
+          <p:spPr>
+            <a:xfrm>
+              <a:off x="4927600" y="4368800"/>
+              <a:ext cx="1612900" cy="196850"/>
+            </a:xfrm>
+            <a:prstGeom prst="rect">
+              <a:avLst/>
+            </a:prstGeom>
+            <a:noFill/>
+          </p:spPr>
+          <p:txBody>
+            <a:bodyPr wrap="square" lIns="0" tIns="0" rIns="0" bIns="0" anchor="ctr">
+              <a:noAutofit/>
+            </a:bodyPr>
+            <a:lstStyle>
+              <a:lvl1pPr marL="0" indent="0" algn="l">
+                <a:lnSpc>
+                  <a:spcPts val="1540"/>
+                </a:lnSpc>
+                <a:spcBef>
+                  <a:spcPts val="0"/>
+                </a:spcBef>
+                <a:buNone/>
+                <a:defRPr sz="1100" b="0">
+                  <a:solidFill>
+                    <a:schemeClr val="tx2"/>
+                  </a:solidFill>
+                  <a:latin typeface="+mn-lt"/>
+                  <a:ea typeface="+mn-ea"/>
+                </a:defRPr>
+              </a:lvl1pPr>
+            </a:lstStyle>
+            <a:p>
+              <a:r>
+                <a:rPr lang="ja-JP"/>
+                <a:t>写真4</a:t>
+              </a:r>
+            </a:p>
+          </p:txBody>
+        </p:sp>
+        <p:sp>
+          <p:nvSpPr>
+            <p:cNvPr id="12" name="Caption_5"/>
+            <p:cNvSpPr txBox="1"/>
+            <p:nvPr/>
+          </p:nvSpPr>
+          <p:spPr>
+            <a:xfrm>
+              <a:off x="6946900" y="4368800"/>
+              <a:ext cx="1612900" cy="196850"/>
+            </a:xfrm>
+            <a:prstGeom prst="rect">
+              <a:avLst/>
+            </a:prstGeom>
+            <a:noFill/>
+          </p:spPr>
+          <p:txBody>
+            <a:bodyPr wrap="square" lIns="0" tIns="0" rIns="0" bIns="0" anchor="ctr">
+              <a:noAutofit/>
+            </a:bodyPr>
+            <a:lstStyle>
+              <a:lvl1pPr marL="0" indent="0" algn="l">
+                <a:lnSpc>
+                  <a:spcPts val="1540"/>
+                </a:lnSpc>
+                <a:spcBef>
+                  <a:spcPts val="0"/>
+                </a:spcBef>
+                <a:buNone/>
+                <a:defRPr sz="1100" b="0">
+                  <a:solidFill>
+                    <a:schemeClr val="tx2"/>
+                  </a:solidFill>
+                  <a:latin typeface="+mn-lt"/>
+                  <a:ea typeface="+mn-ea"/>
+                </a:defRPr>
+              </a:lvl1pPr>
+            </a:lstStyle>
+            <a:p>
+              <a:r>
+                <a:rPr lang="ja-JP"/>
+                <a:t>写真5</a:t>
+              </a:r>
+            </a:p>
+          </p:txBody>
+        </p:sp>
+      </p:grpSp>
+      <p:sp>
+        <p:nvSpPr>
+          <p:cNvPr id="14" name="SlideNumber"/>
+          <p:cNvSpPr>
+            <a:spLocks noGrp="1"/>
+          </p:cNvSpPr>
+          <p:nvPr>
+            <p:ph type="sldNum" idx="12" sz="quarter"/>
+          </p:nvPr>
+        </p:nvSpPr>
+        <p:spPr/>
+        <p:txBody>
+          <a:bodyPr/>
+          <a:lstStyle/>
+          <a:p>
+            <a:fld id="{B6F15528-21DE-4FAA-801E-634DDDAF4B2B}" type="slidenum">
+              <a:rPr lang="ja-JP"/>
+              <a:t>‹#›</a:t>
+            </a:fld>
+          </a:p>
+        </p:txBody>
+      </p:sp>
+    </p:spTree>
+  </p:cSld>
+  <p:clrMapOvr>
+    <a:masterClrMapping/>
+  </p:clrMapOvr>
+</p:sld>
+</file>
+
+<file path=ppt/slides/slide27.xml><?xml version="1.0" encoding="utf-8"?>
 <p:sld xmlns:a="http://schemas.openxmlformats.org/drawingml/2006/main" xmlns:r="http://schemas.openxmlformats.org/officeDocument/2006/relationships" xmlns:p="http://schemas.openxmlformats.org/presentationml/2006/main">
   <p:cSld>
     <p:spTree>
@@ -16216,7 +18137,7 @@
 </p:sld>
 </file>
 
-<file path=ppt/slides/slide25.xml><?xml version="1.0" encoding="utf-8"?>
+<file path=ppt/slides/slide28.xml><?xml version="1.0" encoding="utf-8"?>
 <p:sld xmlns:a="http://schemas.openxmlformats.org/drawingml/2006/main" xmlns:r="http://schemas.openxmlformats.org/officeDocument/2006/relationships" xmlns:p="http://schemas.openxmlformats.org/presentationml/2006/main">
   <p:cSld>
     <p:spTree>
@@ -16705,7 +18626,7 @@
 </p:sld>
 </file>
 
-<file path=ppt/slides/slide26.xml><?xml version="1.0" encoding="utf-8"?>
+<file path=ppt/slides/slide29.xml><?xml version="1.0" encoding="utf-8"?>
 <p:sld xmlns:a="http://schemas.openxmlformats.org/drawingml/2006/main" xmlns:r="http://schemas.openxmlformats.org/officeDocument/2006/relationships" xmlns:p="http://schemas.openxmlformats.org/presentationml/2006/main">
   <p:cSld>
     <p:spTree>
